--- a/BikeSharing_Presentation.pptx
+++ b/BikeSharing_Presentation.pptx
@@ -4,6 +4,9 @@
   <p:sldMasterIdLst>
     <p:sldMasterId id="2147483648" r:id="rId1"/>
   </p:sldMasterIdLst>
+  <p:notesMasterIdLst>
+    <p:notesMasterId r:id="rId17"/>
+  </p:notesMasterIdLst>
   <p:sldIdLst>
     <p:sldId id="256" r:id="rId2"/>
     <p:sldId id="257" r:id="rId3"/>
@@ -21,10 +24,7 @@
     <p:sldId id="269" r:id="rId15"/>
     <p:sldId id="270" r:id="rId16"/>
   </p:sldIdLst>
-  <p:notesMasterIdLst>
-    <p:notesMasterId r:id="rId17"/>
-  </p:notesMasterIdLst>
-  <p:sldSz cx="9144000" cy="5143500"/>
+  <p:sldSz cx="9144000" cy="5143500" type="screen16x9"/>
   <p:notesSz cx="5143500" cy="9144000"/>
   <p:defaultTextStyle>
     <a:lvl1pPr marL="0" algn="l" defTabSz="914400" rtl="0" eaLnBrk="1" latinLnBrk="0" hangingPunct="1">
@@ -118,13 +118,20 @@
       </a:defRPr>
     </a:lvl9pPr>
   </p:defaultTextStyle>
+  <p:extLst>
+    <p:ext uri="{EFAFB233-063F-42B5-8137-9DF3F51BA10A}">
+      <p15:sldGuideLst xmlns:p15="http://schemas.microsoft.com/office/powerpoint/2012/main"/>
+    </p:ext>
+  </p:extLst>
 </p:presentation>
 </file>
 
 <file path=ppt/charts/chart1.xml><?xml version="1.0" encoding="utf-8"?>
-<c:chartSpace xmlns:c="http://schemas.openxmlformats.org/drawingml/2006/chart" xmlns:a="http://schemas.openxmlformats.org/drawingml/2006/main" xmlns:r="http://schemas.openxmlformats.org/officeDocument/2006/relationships">
+<c:chartSpace xmlns:c="http://schemas.openxmlformats.org/drawingml/2006/chart" xmlns:a="http://schemas.openxmlformats.org/drawingml/2006/main" xmlns:r="http://schemas.openxmlformats.org/officeDocument/2006/relationships" xmlns:c16r2="http://schemas.microsoft.com/office/drawing/2015/06/chart">
   <c:date1904 val="0"/>
+  <c:lang val="en-US"/>
   <c:roundedCorners val="0"/>
+  <c:style val="2"/>
   <c:chart>
     <c:autoTitleDeleted val="1"/>
     <c:plotArea>
@@ -154,111 +161,85 @@
             <a:effectLst/>
           </c:spPr>
           <c:invertIfNegative val="0"/>
-          <c:dLbls>
-            <c:numFmt formatCode="#,##0" sourceLinked="0"/>
-            <c:txPr>
-              <a:bodyPr/>
-              <a:lstStyle/>
-              <a:p>
-                <a:pPr>
-                  <a:defRPr b="0" i="0" strike="noStrike" sz="1200" u="none">
-                    <a:solidFill>
-                      <a:srgbClr val="000000"/>
-                    </a:solidFill>
-                    <a:latin typeface="Arial"/>
-                  </a:defRPr>
-                </a:pPr>
-              </a:p>
-            </c:txPr>
-            <c:showLegendKey val="0"/>
-            <c:showVal val="0"/>
-            <c:showCatName val="0"/>
-            <c:showSerName val="0"/>
-            <c:showPercent val="0"/>
-            <c:showBubbleSize val="0"/>
-            <c:showLeaderLines val="0"/>
-          </c:dLbls>
           <c:cat>
-            <c:multiLvlStrRef>
+            <c:strRef>
               <c:f>Sheet1!$A$2:$A$25</c:f>
-              <c:multiLvlStrCache>
+              <c:strCache>
                 <c:ptCount val="24"/>
-                <c:lvl>
-                  <c:pt idx="0">
-                    <c:v>0</c:v>
-                  </c:pt>
-                  <c:pt idx="1">
-                    <c:v>1</c:v>
-                  </c:pt>
-                  <c:pt idx="2">
-                    <c:v>2</c:v>
-                  </c:pt>
-                  <c:pt idx="3">
-                    <c:v>3</c:v>
-                  </c:pt>
-                  <c:pt idx="4">
-                    <c:v>4</c:v>
-                  </c:pt>
-                  <c:pt idx="5">
-                    <c:v>5</c:v>
-                  </c:pt>
-                  <c:pt idx="6">
-                    <c:v>6</c:v>
-                  </c:pt>
-                  <c:pt idx="7">
-                    <c:v>7</c:v>
-                  </c:pt>
-                  <c:pt idx="8">
-                    <c:v>8</c:v>
-                  </c:pt>
-                  <c:pt idx="9">
-                    <c:v>9</c:v>
-                  </c:pt>
-                  <c:pt idx="10">
-                    <c:v>10</c:v>
-                  </c:pt>
-                  <c:pt idx="11">
-                    <c:v>11</c:v>
-                  </c:pt>
-                  <c:pt idx="12">
-                    <c:v>12</c:v>
-                  </c:pt>
-                  <c:pt idx="13">
-                    <c:v>13</c:v>
-                  </c:pt>
-                  <c:pt idx="14">
-                    <c:v>14</c:v>
-                  </c:pt>
-                  <c:pt idx="15">
-                    <c:v>15</c:v>
-                  </c:pt>
-                  <c:pt idx="16">
-                    <c:v>16</c:v>
-                  </c:pt>
-                  <c:pt idx="17">
-                    <c:v>17</c:v>
-                  </c:pt>
-                  <c:pt idx="18">
-                    <c:v>18</c:v>
-                  </c:pt>
-                  <c:pt idx="19">
-                    <c:v>19</c:v>
-                  </c:pt>
-                  <c:pt idx="20">
-                    <c:v>20</c:v>
-                  </c:pt>
-                  <c:pt idx="21">
-                    <c:v>21</c:v>
-                  </c:pt>
-                  <c:pt idx="22">
-                    <c:v>22</c:v>
-                  </c:pt>
-                  <c:pt idx="23">
-                    <c:v>23</c:v>
-                  </c:pt>
-                </c:lvl>
-              </c:multiLvlStrCache>
-            </c:multiLvlStrRef>
+                <c:pt idx="0">
+                  <c:v>0</c:v>
+                </c:pt>
+                <c:pt idx="1">
+                  <c:v>1</c:v>
+                </c:pt>
+                <c:pt idx="2">
+                  <c:v>2</c:v>
+                </c:pt>
+                <c:pt idx="3">
+                  <c:v>3</c:v>
+                </c:pt>
+                <c:pt idx="4">
+                  <c:v>4</c:v>
+                </c:pt>
+                <c:pt idx="5">
+                  <c:v>5</c:v>
+                </c:pt>
+                <c:pt idx="6">
+                  <c:v>6</c:v>
+                </c:pt>
+                <c:pt idx="7">
+                  <c:v>7</c:v>
+                </c:pt>
+                <c:pt idx="8">
+                  <c:v>8</c:v>
+                </c:pt>
+                <c:pt idx="9">
+                  <c:v>9</c:v>
+                </c:pt>
+                <c:pt idx="10">
+                  <c:v>10</c:v>
+                </c:pt>
+                <c:pt idx="11">
+                  <c:v>11</c:v>
+                </c:pt>
+                <c:pt idx="12">
+                  <c:v>12</c:v>
+                </c:pt>
+                <c:pt idx="13">
+                  <c:v>13</c:v>
+                </c:pt>
+                <c:pt idx="14">
+                  <c:v>14</c:v>
+                </c:pt>
+                <c:pt idx="15">
+                  <c:v>15</c:v>
+                </c:pt>
+                <c:pt idx="16">
+                  <c:v>16</c:v>
+                </c:pt>
+                <c:pt idx="17">
+                  <c:v>17</c:v>
+                </c:pt>
+                <c:pt idx="18">
+                  <c:v>18</c:v>
+                </c:pt>
+                <c:pt idx="19">
+                  <c:v>19</c:v>
+                </c:pt>
+                <c:pt idx="20">
+                  <c:v>20</c:v>
+                </c:pt>
+                <c:pt idx="21">
+                  <c:v>21</c:v>
+                </c:pt>
+                <c:pt idx="22">
+                  <c:v>22</c:v>
+                </c:pt>
+                <c:pt idx="23">
+                  <c:v>23</c:v>
+                </c:pt>
+              </c:strCache>
+            </c:strRef>
           </c:cat>
           <c:val>
             <c:numRef>
@@ -267,7 +248,7 @@
                 <c:formatCode>General</c:formatCode>
                 <c:ptCount val="24"/>
                 <c:pt idx="0">
-                  <c:v>9.8</c:v>
+                  <c:v>9.8000000000000007</c:v>
                 </c:pt>
                 <c:pt idx="1">
                   <c:v>6.3</c:v>
@@ -303,10 +284,10 @@
                   <c:v>60.1</c:v>
                 </c:pt>
                 <c:pt idx="12">
-                  <c:v>70.9</c:v>
+                  <c:v>70.900000000000006</c:v>
                 </c:pt>
                 <c:pt idx="13">
-                  <c:v>73.1</c:v>
+                  <c:v>73.099999999999994</c:v>
                 </c:pt>
                 <c:pt idx="14">
                   <c:v>77.2</c:v>
@@ -327,7 +308,7 @@
                   <c:v>50.5</c:v>
                 </c:pt>
                 <c:pt idx="20">
-                  <c:v>37.2</c:v>
+                  <c:v>37.200000000000003</c:v>
                 </c:pt>
                 <c:pt idx="21">
                   <c:v>28.4</c:v>
@@ -341,36 +322,23 @@
               </c:numCache>
             </c:numRef>
           </c:val>
+          <c:extLst>
+            <c:ext xmlns:c16="http://schemas.microsoft.com/office/drawing/2014/chart" uri="{C3380CC4-5D6E-409C-BE32-E72D297353CC}">
+              <c16:uniqueId val="{00000000-7D6B-4894-89EE-F82409AA74D1}"/>
+            </c:ext>
+          </c:extLst>
         </c:ser>
         <c:dLbls>
-          <c:numFmt formatCode="#,##0" sourceLinked="0"/>
-          <c:txPr>
-            <a:bodyPr/>
-            <a:lstStyle/>
-            <a:p>
-              <a:pPr>
-                <a:defRPr b="0" i="0" strike="noStrike" sz="1200" u="none">
-                  <a:solidFill>
-                    <a:srgbClr val="000000"/>
-                  </a:solidFill>
-                  <a:latin typeface="Arial"/>
-                </a:defRPr>
-              </a:pPr>
-            </a:p>
-          </c:txPr>
           <c:showLegendKey val="0"/>
           <c:showVal val="0"/>
           <c:showCatName val="0"/>
           <c:showSerName val="0"/>
           <c:showPercent val="0"/>
           <c:showBubbleSize val="0"/>
-          <c:showLeaderLines val="0"/>
         </c:dLbls>
         <c:gapWidth val="150"/>
-        <c:overlap val="0"/>
         <c:axId val="2094734554"/>
         <c:axId val="2094734552"/>
-        <c:axId val="2094734556"/>
       </c:barChart>
       <c:catAx>
         <c:axId val="2094734554"/>
@@ -411,6 +379,7 @@
         <c:crosses val="autoZero"/>
         <c:auto val="1"/>
         <c:lblAlgn val="ctr"/>
+        <c:lblOffset val="100"/>
         <c:noMultiLvlLbl val="1"/>
       </c:catAx>
       <c:valAx>
@@ -493,6 +462,7 @@
     </c:legend>
     <c:plotVisOnly val="1"/>
     <c:dispBlanksAs val="span"/>
+    <c:showDLblsOverMax val="1"/>
   </c:chart>
   <c:spPr>
     <a:solidFill>
@@ -510,9 +480,11 @@
 </file>
 
 <file path=ppt/charts/chart2.xml><?xml version="1.0" encoding="utf-8"?>
-<c:chartSpace xmlns:c="http://schemas.openxmlformats.org/drawingml/2006/chart" xmlns:a="http://schemas.openxmlformats.org/drawingml/2006/main" xmlns:r="http://schemas.openxmlformats.org/officeDocument/2006/relationships">
+<c:chartSpace xmlns:c="http://schemas.openxmlformats.org/drawingml/2006/chart" xmlns:a="http://schemas.openxmlformats.org/drawingml/2006/main" xmlns:r="http://schemas.openxmlformats.org/officeDocument/2006/relationships" xmlns:c16r2="http://schemas.microsoft.com/office/drawing/2015/06/chart">
   <c:date1904 val="0"/>
+  <c:lang val="en-US"/>
   <c:roundedCorners val="0"/>
+  <c:style val="2"/>
   <c:chart>
     <c:autoTitleDeleted val="1"/>
     <c:plotArea>
@@ -542,111 +514,85 @@
             <a:effectLst/>
           </c:spPr>
           <c:invertIfNegative val="0"/>
-          <c:dLbls>
-            <c:numFmt formatCode="#,##0" sourceLinked="0"/>
-            <c:txPr>
-              <a:bodyPr/>
-              <a:lstStyle/>
-              <a:p>
-                <a:pPr>
-                  <a:defRPr b="0" i="0" strike="noStrike" sz="1200" u="none">
-                    <a:solidFill>
-                      <a:srgbClr val="000000"/>
-                    </a:solidFill>
-                    <a:latin typeface="Arial"/>
-                  </a:defRPr>
-                </a:pPr>
-              </a:p>
-            </c:txPr>
-            <c:showLegendKey val="0"/>
-            <c:showVal val="0"/>
-            <c:showCatName val="0"/>
-            <c:showSerName val="0"/>
-            <c:showPercent val="0"/>
-            <c:showBubbleSize val="0"/>
-            <c:showLeaderLines val="0"/>
-          </c:dLbls>
           <c:cat>
-            <c:multiLvlStrRef>
+            <c:strRef>
               <c:f>Sheet1!$A$2:$A$25</c:f>
-              <c:multiLvlStrCache>
+              <c:strCache>
                 <c:ptCount val="24"/>
-                <c:lvl>
-                  <c:pt idx="0">
-                    <c:v>0</c:v>
-                  </c:pt>
-                  <c:pt idx="1">
-                    <c:v>1</c:v>
-                  </c:pt>
-                  <c:pt idx="2">
-                    <c:v>2</c:v>
-                  </c:pt>
-                  <c:pt idx="3">
-                    <c:v>3</c:v>
-                  </c:pt>
-                  <c:pt idx="4">
-                    <c:v>4</c:v>
-                  </c:pt>
-                  <c:pt idx="5">
-                    <c:v>5</c:v>
-                  </c:pt>
-                  <c:pt idx="6">
-                    <c:v>6</c:v>
-                  </c:pt>
-                  <c:pt idx="7">
-                    <c:v>7</c:v>
-                  </c:pt>
-                  <c:pt idx="8">
-                    <c:v>8</c:v>
-                  </c:pt>
-                  <c:pt idx="9">
-                    <c:v>9</c:v>
-                  </c:pt>
-                  <c:pt idx="10">
-                    <c:v>10</c:v>
-                  </c:pt>
-                  <c:pt idx="11">
-                    <c:v>11</c:v>
-                  </c:pt>
-                  <c:pt idx="12">
-                    <c:v>12</c:v>
-                  </c:pt>
-                  <c:pt idx="13">
-                    <c:v>13</c:v>
-                  </c:pt>
-                  <c:pt idx="14">
-                    <c:v>14</c:v>
-                  </c:pt>
-                  <c:pt idx="15">
-                    <c:v>15</c:v>
-                  </c:pt>
-                  <c:pt idx="16">
-                    <c:v>16</c:v>
-                  </c:pt>
-                  <c:pt idx="17">
-                    <c:v>17</c:v>
-                  </c:pt>
-                  <c:pt idx="18">
-                    <c:v>18</c:v>
-                  </c:pt>
-                  <c:pt idx="19">
-                    <c:v>19</c:v>
-                  </c:pt>
-                  <c:pt idx="20">
-                    <c:v>20</c:v>
-                  </c:pt>
-                  <c:pt idx="21">
-                    <c:v>21</c:v>
-                  </c:pt>
-                  <c:pt idx="22">
-                    <c:v>22</c:v>
-                  </c:pt>
-                  <c:pt idx="23">
-                    <c:v>23</c:v>
-                  </c:pt>
-                </c:lvl>
-              </c:multiLvlStrCache>
-            </c:multiLvlStrRef>
+                <c:pt idx="0">
+                  <c:v>0</c:v>
+                </c:pt>
+                <c:pt idx="1">
+                  <c:v>1</c:v>
+                </c:pt>
+                <c:pt idx="2">
+                  <c:v>2</c:v>
+                </c:pt>
+                <c:pt idx="3">
+                  <c:v>3</c:v>
+                </c:pt>
+                <c:pt idx="4">
+                  <c:v>4</c:v>
+                </c:pt>
+                <c:pt idx="5">
+                  <c:v>5</c:v>
+                </c:pt>
+                <c:pt idx="6">
+                  <c:v>6</c:v>
+                </c:pt>
+                <c:pt idx="7">
+                  <c:v>7</c:v>
+                </c:pt>
+                <c:pt idx="8">
+                  <c:v>8</c:v>
+                </c:pt>
+                <c:pt idx="9">
+                  <c:v>9</c:v>
+                </c:pt>
+                <c:pt idx="10">
+                  <c:v>10</c:v>
+                </c:pt>
+                <c:pt idx="11">
+                  <c:v>11</c:v>
+                </c:pt>
+                <c:pt idx="12">
+                  <c:v>12</c:v>
+                </c:pt>
+                <c:pt idx="13">
+                  <c:v>13</c:v>
+                </c:pt>
+                <c:pt idx="14">
+                  <c:v>14</c:v>
+                </c:pt>
+                <c:pt idx="15">
+                  <c:v>15</c:v>
+                </c:pt>
+                <c:pt idx="16">
+                  <c:v>16</c:v>
+                </c:pt>
+                <c:pt idx="17">
+                  <c:v>17</c:v>
+                </c:pt>
+                <c:pt idx="18">
+                  <c:v>18</c:v>
+                </c:pt>
+                <c:pt idx="19">
+                  <c:v>19</c:v>
+                </c:pt>
+                <c:pt idx="20">
+                  <c:v>20</c:v>
+                </c:pt>
+                <c:pt idx="21">
+                  <c:v>21</c:v>
+                </c:pt>
+                <c:pt idx="22">
+                  <c:v>22</c:v>
+                </c:pt>
+                <c:pt idx="23">
+                  <c:v>23</c:v>
+                </c:pt>
+              </c:strCache>
+            </c:strRef>
           </c:cat>
           <c:val>
             <c:numRef>
@@ -664,16 +610,16 @@
                   <c:v>18</c:v>
                 </c:pt>
                 <c:pt idx="3">
-                  <c:v>8.8</c:v>
+                  <c:v>8.8000000000000007</c:v>
                 </c:pt>
                 <c:pt idx="4">
-                  <c:v>5.1</c:v>
+                  <c:v>5.0999999999999996</c:v>
                 </c:pt>
                 <c:pt idx="5">
                   <c:v>18.8</c:v>
                 </c:pt>
                 <c:pt idx="6">
-                  <c:v>72.4</c:v>
+                  <c:v>72.400000000000006</c:v>
                 </c:pt>
                 <c:pt idx="7">
                   <c:v>196.5</c:v>
@@ -712,7 +658,7 @@
                   <c:v>359.1</c:v>
                 </c:pt>
                 <c:pt idx="19">
-                  <c:v>263.6</c:v>
+                  <c:v>263.60000000000002</c:v>
                 </c:pt>
                 <c:pt idx="20">
                   <c:v>190.1</c:v>
@@ -724,41 +670,28 @@
                   <c:v>109.4</c:v>
                 </c:pt>
                 <c:pt idx="23">
-                  <c:v>72.9</c:v>
+                  <c:v>72.900000000000006</c:v>
                 </c:pt>
               </c:numCache>
             </c:numRef>
           </c:val>
+          <c:extLst>
+            <c:ext xmlns:c16="http://schemas.microsoft.com/office/drawing/2014/chart" uri="{C3380CC4-5D6E-409C-BE32-E72D297353CC}">
+              <c16:uniqueId val="{00000000-18FB-486B-B5B3-C398CA46E84C}"/>
+            </c:ext>
+          </c:extLst>
         </c:ser>
         <c:dLbls>
-          <c:numFmt formatCode="#,##0" sourceLinked="0"/>
-          <c:txPr>
-            <a:bodyPr/>
-            <a:lstStyle/>
-            <a:p>
-              <a:pPr>
-                <a:defRPr b="0" i="0" strike="noStrike" sz="1200" u="none">
-                  <a:solidFill>
-                    <a:srgbClr val="000000"/>
-                  </a:solidFill>
-                  <a:latin typeface="Arial"/>
-                </a:defRPr>
-              </a:pPr>
-            </a:p>
-          </c:txPr>
           <c:showLegendKey val="0"/>
           <c:showVal val="0"/>
           <c:showCatName val="0"/>
           <c:showSerName val="0"/>
           <c:showPercent val="0"/>
           <c:showBubbleSize val="0"/>
-          <c:showLeaderLines val="0"/>
         </c:dLbls>
         <c:gapWidth val="150"/>
-        <c:overlap val="0"/>
         <c:axId val="2094734554"/>
         <c:axId val="2094734552"/>
-        <c:axId val="2094734556"/>
       </c:barChart>
       <c:catAx>
         <c:axId val="2094734554"/>
@@ -799,6 +732,7 @@
         <c:crosses val="autoZero"/>
         <c:auto val="1"/>
         <c:lblAlgn val="ctr"/>
+        <c:lblOffset val="100"/>
         <c:noMultiLvlLbl val="1"/>
       </c:catAx>
       <c:valAx>
@@ -881,6 +815,7 @@
     </c:legend>
     <c:plotVisOnly val="1"/>
     <c:dispBlanksAs val="span"/>
+    <c:showDLblsOverMax val="1"/>
   </c:chart>
   <c:spPr>
     <a:solidFill>
@@ -898,9 +833,11 @@
 </file>
 
 <file path=ppt/charts/chart3.xml><?xml version="1.0" encoding="utf-8"?>
-<c:chartSpace xmlns:c="http://schemas.openxmlformats.org/drawingml/2006/chart" xmlns:a="http://schemas.openxmlformats.org/drawingml/2006/main" xmlns:r="http://schemas.openxmlformats.org/officeDocument/2006/relationships">
+<c:chartSpace xmlns:c="http://schemas.openxmlformats.org/drawingml/2006/chart" xmlns:a="http://schemas.openxmlformats.org/drawingml/2006/main" xmlns:r="http://schemas.openxmlformats.org/officeDocument/2006/relationships" xmlns:c16r2="http://schemas.microsoft.com/office/drawing/2015/06/chart">
   <c:date1904 val="0"/>
+  <c:lang val="en-US"/>
   <c:roundedCorners val="1"/>
+  <c:style val="2"/>
   <c:chart>
     <c:autoTitleDeleted val="1"/>
     <c:plotArea>
@@ -930,51 +867,25 @@
             <a:effectLst/>
           </c:spPr>
           <c:invertIfNegative val="0"/>
-          <c:dLbls>
-            <c:numFmt formatCode="#,##0" sourceLinked="0"/>
-            <c:txPr>
-              <a:bodyPr/>
-              <a:lstStyle/>
-              <a:p>
-                <a:pPr>
-                  <a:defRPr b="0" i="0" strike="noStrike" sz="1200" u="none">
-                    <a:solidFill>
-                      <a:srgbClr val="000000"/>
-                    </a:solidFill>
-                    <a:latin typeface="Arial"/>
-                  </a:defRPr>
-                </a:pPr>
-              </a:p>
-            </c:txPr>
-            <c:showLegendKey val="0"/>
-            <c:showVal val="0"/>
-            <c:showCatName val="0"/>
-            <c:showSerName val="0"/>
-            <c:showPercent val="0"/>
-            <c:showBubbleSize val="0"/>
-            <c:showLeaderLines val="0"/>
-          </c:dLbls>
           <c:cat>
-            <c:multiLvlStrRef>
+            <c:strRef>
               <c:f>Sheet1!$A$2:$A$5</c:f>
-              <c:multiLvlStrCache>
+              <c:strCache>
                 <c:ptCount val="4"/>
-                <c:lvl>
-                  <c:pt idx="0">
-                    <c:v>Spring</c:v>
-                  </c:pt>
-                  <c:pt idx="1">
-                    <c:v>Summer</c:v>
-                  </c:pt>
-                  <c:pt idx="2">
-                    <c:v>Fall</c:v>
-                  </c:pt>
-                  <c:pt idx="3">
-                    <c:v>Winter</c:v>
-                  </c:pt>
-                </c:lvl>
-              </c:multiLvlStrCache>
-            </c:multiLvlStrRef>
+                <c:pt idx="0">
+                  <c:v>Spring</c:v>
+                </c:pt>
+                <c:pt idx="1">
+                  <c:v>Summer</c:v>
+                </c:pt>
+                <c:pt idx="2">
+                  <c:v>Fall</c:v>
+                </c:pt>
+                <c:pt idx="3">
+                  <c:v>Winter</c:v>
+                </c:pt>
+              </c:strCache>
+            </c:strRef>
           </c:cat>
           <c:val>
             <c:numRef>
@@ -986,7 +897,7 @@
                   <c:v>49.2</c:v>
                 </c:pt>
                 <c:pt idx="1">
-                  <c:v>71.4</c:v>
+                  <c:v>71.400000000000006</c:v>
                 </c:pt>
                 <c:pt idx="2">
                   <c:v>52.3</c:v>
@@ -997,6 +908,11 @@
               </c:numCache>
             </c:numRef>
           </c:val>
+          <c:extLst>
+            <c:ext xmlns:c16="http://schemas.microsoft.com/office/drawing/2014/chart" uri="{C3380CC4-5D6E-409C-BE32-E72D297353CC}">
+              <c16:uniqueId val="{00000000-6E56-432E-9334-F0DE019748B3}"/>
+            </c:ext>
+          </c:extLst>
         </c:ser>
         <c:ser>
           <c:idx val="1"/>
@@ -1019,51 +935,25 @@
             <a:effectLst/>
           </c:spPr>
           <c:invertIfNegative val="0"/>
-          <c:dLbls>
-            <c:numFmt formatCode="#,##0" sourceLinked="0"/>
-            <c:txPr>
-              <a:bodyPr/>
-              <a:lstStyle/>
-              <a:p>
-                <a:pPr>
-                  <a:defRPr b="0" i="0" strike="noStrike" sz="1200" u="none">
-                    <a:solidFill>
-                      <a:srgbClr val="000000"/>
-                    </a:solidFill>
-                    <a:latin typeface="Arial"/>
-                  </a:defRPr>
-                </a:pPr>
-              </a:p>
-            </c:txPr>
-            <c:showLegendKey val="0"/>
-            <c:showVal val="0"/>
-            <c:showCatName val="0"/>
-            <c:showSerName val="0"/>
-            <c:showPercent val="0"/>
-            <c:showBubbleSize val="0"/>
-            <c:showLeaderLines val="0"/>
-          </c:dLbls>
           <c:cat>
-            <c:multiLvlStrRef>
+            <c:strRef>
               <c:f>Sheet1!$A$2:$A$5</c:f>
-              <c:multiLvlStrCache>
+              <c:strCache>
                 <c:ptCount val="4"/>
-                <c:lvl>
-                  <c:pt idx="0">
-                    <c:v>Spring</c:v>
-                  </c:pt>
-                  <c:pt idx="1">
-                    <c:v>Summer</c:v>
-                  </c:pt>
-                  <c:pt idx="2">
-                    <c:v>Fall</c:v>
-                  </c:pt>
-                  <c:pt idx="3">
-                    <c:v>Winter</c:v>
-                  </c:pt>
-                </c:lvl>
-              </c:multiLvlStrCache>
-            </c:multiLvlStrRef>
+                <c:pt idx="0">
+                  <c:v>Spring</c:v>
+                </c:pt>
+                <c:pt idx="1">
+                  <c:v>Summer</c:v>
+                </c:pt>
+                <c:pt idx="2">
+                  <c:v>Fall</c:v>
+                </c:pt>
+                <c:pt idx="3">
+                  <c:v>Winter</c:v>
+                </c:pt>
+              </c:strCache>
+            </c:strRef>
           </c:cat>
           <c:val>
             <c:numRef>
@@ -1086,36 +976,23 @@
               </c:numCache>
             </c:numRef>
           </c:val>
+          <c:extLst>
+            <c:ext xmlns:c16="http://schemas.microsoft.com/office/drawing/2014/chart" uri="{C3380CC4-5D6E-409C-BE32-E72D297353CC}">
+              <c16:uniqueId val="{00000001-6E56-432E-9334-F0DE019748B3}"/>
+            </c:ext>
+          </c:extLst>
         </c:ser>
         <c:dLbls>
-          <c:numFmt formatCode="#,##0" sourceLinked="0"/>
-          <c:txPr>
-            <a:bodyPr/>
-            <a:lstStyle/>
-            <a:p>
-              <a:pPr>
-                <a:defRPr b="0" i="0" strike="noStrike" sz="1200" u="none">
-                  <a:solidFill>
-                    <a:srgbClr val="000000"/>
-                  </a:solidFill>
-                  <a:latin typeface="Arial"/>
-                </a:defRPr>
-              </a:pPr>
-            </a:p>
-          </c:txPr>
           <c:showLegendKey val="0"/>
           <c:showVal val="0"/>
           <c:showCatName val="0"/>
           <c:showSerName val="0"/>
           <c:showPercent val="0"/>
           <c:showBubbleSize val="0"/>
-          <c:showLeaderLines val="0"/>
         </c:dLbls>
         <c:gapWidth val="150"/>
-        <c:overlap val="0"/>
         <c:axId val="2094734554"/>
         <c:axId val="2094734552"/>
-        <c:axId val="2094734556"/>
       </c:barChart>
       <c:catAx>
         <c:axId val="2094734554"/>
@@ -1156,6 +1033,7 @@
         <c:crosses val="autoZero"/>
         <c:auto val="1"/>
         <c:lblAlgn val="ctr"/>
+        <c:lblOffset val="100"/>
         <c:noMultiLvlLbl val="1"/>
       </c:catAx>
       <c:valAx>
@@ -1238,6 +1116,7 @@
     </c:legend>
     <c:plotVisOnly val="1"/>
     <c:dispBlanksAs val="span"/>
+    <c:showDLblsOverMax val="1"/>
   </c:chart>
   <c:spPr>
     <a:solidFill>
@@ -1255,9 +1134,11 @@
 </file>
 
 <file path=ppt/charts/chart4.xml><?xml version="1.0" encoding="utf-8"?>
-<c:chartSpace xmlns:c="http://schemas.openxmlformats.org/drawingml/2006/chart" xmlns:a="http://schemas.openxmlformats.org/drawingml/2006/main" xmlns:r="http://schemas.openxmlformats.org/officeDocument/2006/relationships">
+<c:chartSpace xmlns:c="http://schemas.openxmlformats.org/drawingml/2006/chart" xmlns:a="http://schemas.openxmlformats.org/drawingml/2006/main" xmlns:r="http://schemas.openxmlformats.org/officeDocument/2006/relationships" xmlns:c16r2="http://schemas.microsoft.com/office/drawing/2015/06/chart">
   <c:date1904 val="0"/>
+  <c:lang val="en-US"/>
   <c:roundedCorners val="1"/>
+  <c:style val="2"/>
   <c:chart>
     <c:autoTitleDeleted val="1"/>
     <c:plotArea>
@@ -1287,51 +1168,25 @@
             <a:effectLst/>
           </c:spPr>
           <c:invertIfNegative val="0"/>
-          <c:dLbls>
-            <c:numFmt formatCode="#,##0" sourceLinked="0"/>
-            <c:txPr>
-              <a:bodyPr/>
-              <a:lstStyle/>
-              <a:p>
-                <a:pPr>
-                  <a:defRPr b="0" i="0" strike="noStrike" sz="1200" u="none">
-                    <a:solidFill>
-                      <a:srgbClr val="000000"/>
-                    </a:solidFill>
-                    <a:latin typeface="Arial"/>
-                  </a:defRPr>
-                </a:pPr>
-              </a:p>
-            </c:txPr>
-            <c:showLegendKey val="0"/>
-            <c:showVal val="0"/>
-            <c:showCatName val="0"/>
-            <c:showSerName val="0"/>
-            <c:showPercent val="0"/>
-            <c:showBubbleSize val="0"/>
-            <c:showLeaderLines val="0"/>
-          </c:dLbls>
           <c:cat>
-            <c:multiLvlStrRef>
+            <c:strRef>
               <c:f>Sheet1!$A$2:$A$5</c:f>
-              <c:multiLvlStrCache>
+              <c:strCache>
                 <c:ptCount val="4"/>
-                <c:lvl>
-                  <c:pt idx="0">
-                    <c:v>Clear</c:v>
-                  </c:pt>
-                  <c:pt idx="1">
-                    <c:v>Misty</c:v>
-                  </c:pt>
-                  <c:pt idx="2">
-                    <c:v>Light Rain</c:v>
-                  </c:pt>
-                  <c:pt idx="3">
-                    <c:v>Heavy Rain</c:v>
-                  </c:pt>
-                </c:lvl>
-              </c:multiLvlStrCache>
-            </c:multiLvlStrRef>
+                <c:pt idx="0">
+                  <c:v>Clear</c:v>
+                </c:pt>
+                <c:pt idx="1">
+                  <c:v>Misty</c:v>
+                </c:pt>
+                <c:pt idx="2">
+                  <c:v>Light Rain</c:v>
+                </c:pt>
+                <c:pt idx="3">
+                  <c:v>Heavy Rain</c:v>
+                </c:pt>
+              </c:strCache>
+            </c:strRef>
           </c:cat>
           <c:val>
             <c:numRef>
@@ -1340,7 +1195,7 @@
                 <c:formatCode>General</c:formatCode>
                 <c:ptCount val="4"/>
                 <c:pt idx="0">
-                  <c:v>40.8</c:v>
+                  <c:v>40.799999999999997</c:v>
                 </c:pt>
                 <c:pt idx="1">
                   <c:v>28.1</c:v>
@@ -1349,11 +1204,16 @@
                   <c:v>14.5</c:v>
                 </c:pt>
                 <c:pt idx="3">
-                  <c:v>2.2</c:v>
+                  <c:v>2.2000000000000002</c:v>
                 </c:pt>
               </c:numCache>
             </c:numRef>
           </c:val>
+          <c:extLst>
+            <c:ext xmlns:c16="http://schemas.microsoft.com/office/drawing/2014/chart" uri="{C3380CC4-5D6E-409C-BE32-E72D297353CC}">
+              <c16:uniqueId val="{00000000-E97D-4AF4-BAC8-BF3DFDE2F646}"/>
+            </c:ext>
+          </c:extLst>
         </c:ser>
         <c:ser>
           <c:idx val="1"/>
@@ -1376,51 +1236,25 @@
             <a:effectLst/>
           </c:spPr>
           <c:invertIfNegative val="0"/>
-          <c:dLbls>
-            <c:numFmt formatCode="#,##0" sourceLinked="0"/>
-            <c:txPr>
-              <a:bodyPr/>
-              <a:lstStyle/>
-              <a:p>
-                <a:pPr>
-                  <a:defRPr b="0" i="0" strike="noStrike" sz="1200" u="none">
-                    <a:solidFill>
-                      <a:srgbClr val="000000"/>
-                    </a:solidFill>
-                    <a:latin typeface="Arial"/>
-                  </a:defRPr>
-                </a:pPr>
-              </a:p>
-            </c:txPr>
-            <c:showLegendKey val="0"/>
-            <c:showVal val="0"/>
-            <c:showCatName val="0"/>
-            <c:showSerName val="0"/>
-            <c:showPercent val="0"/>
-            <c:showBubbleSize val="0"/>
-            <c:showLeaderLines val="0"/>
-          </c:dLbls>
           <c:cat>
-            <c:multiLvlStrRef>
+            <c:strRef>
               <c:f>Sheet1!$A$2:$A$5</c:f>
-              <c:multiLvlStrCache>
+              <c:strCache>
                 <c:ptCount val="4"/>
-                <c:lvl>
-                  <c:pt idx="0">
-                    <c:v>Clear</c:v>
-                  </c:pt>
-                  <c:pt idx="1">
-                    <c:v>Misty</c:v>
-                  </c:pt>
-                  <c:pt idx="2">
-                    <c:v>Light Rain</c:v>
-                  </c:pt>
-                  <c:pt idx="3">
-                    <c:v>Heavy Rain</c:v>
-                  </c:pt>
-                </c:lvl>
-              </c:multiLvlStrCache>
-            </c:multiLvlStrRef>
+                <c:pt idx="0">
+                  <c:v>Clear</c:v>
+                </c:pt>
+                <c:pt idx="1">
+                  <c:v>Misty</c:v>
+                </c:pt>
+                <c:pt idx="2">
+                  <c:v>Light Rain</c:v>
+                </c:pt>
+                <c:pt idx="3">
+                  <c:v>Heavy Rain</c:v>
+                </c:pt>
+              </c:strCache>
+            </c:strRef>
           </c:cat>
           <c:val>
             <c:numRef>
@@ -1429,7 +1263,7 @@
                 <c:formatCode>General</c:formatCode>
                 <c:ptCount val="4"/>
                 <c:pt idx="0">
-                  <c:v>163.2</c:v>
+                  <c:v>163.19999999999999</c:v>
                 </c:pt>
                 <c:pt idx="1">
                   <c:v>138.6</c:v>
@@ -1438,41 +1272,28 @@
                   <c:v>96.3</c:v>
                 </c:pt>
                 <c:pt idx="3">
-                  <c:v>65.1</c:v>
+                  <c:v>65.099999999999994</c:v>
                 </c:pt>
               </c:numCache>
             </c:numRef>
           </c:val>
+          <c:extLst>
+            <c:ext xmlns:c16="http://schemas.microsoft.com/office/drawing/2014/chart" uri="{C3380CC4-5D6E-409C-BE32-E72D297353CC}">
+              <c16:uniqueId val="{00000001-E97D-4AF4-BAC8-BF3DFDE2F646}"/>
+            </c:ext>
+          </c:extLst>
         </c:ser>
         <c:dLbls>
-          <c:numFmt formatCode="#,##0" sourceLinked="0"/>
-          <c:txPr>
-            <a:bodyPr/>
-            <a:lstStyle/>
-            <a:p>
-              <a:pPr>
-                <a:defRPr b="0" i="0" strike="noStrike" sz="1200" u="none">
-                  <a:solidFill>
-                    <a:srgbClr val="000000"/>
-                  </a:solidFill>
-                  <a:latin typeface="Arial"/>
-                </a:defRPr>
-              </a:pPr>
-            </a:p>
-          </c:txPr>
           <c:showLegendKey val="0"/>
           <c:showVal val="0"/>
           <c:showCatName val="0"/>
           <c:showSerName val="0"/>
           <c:showPercent val="0"/>
           <c:showBubbleSize val="0"/>
-          <c:showLeaderLines val="0"/>
         </c:dLbls>
         <c:gapWidth val="150"/>
-        <c:overlap val="0"/>
         <c:axId val="2094734554"/>
         <c:axId val="2094734552"/>
-        <c:axId val="2094734556"/>
       </c:barChart>
       <c:catAx>
         <c:axId val="2094734554"/>
@@ -1513,6 +1334,7 @@
         <c:crosses val="autoZero"/>
         <c:auto val="1"/>
         <c:lblAlgn val="ctr"/>
+        <c:lblOffset val="100"/>
         <c:noMultiLvlLbl val="1"/>
       </c:catAx>
       <c:valAx>
@@ -1595,6 +1417,7 @@
     </c:legend>
     <c:plotVisOnly val="1"/>
     <c:dispBlanksAs val="span"/>
+    <c:showDLblsOverMax val="1"/>
   </c:chart>
   <c:spPr>
     <a:solidFill>
@@ -1612,9 +1435,11 @@
 </file>
 
 <file path=ppt/charts/chart5.xml><?xml version="1.0" encoding="utf-8"?>
-<c:chartSpace xmlns:c="http://schemas.openxmlformats.org/drawingml/2006/chart" xmlns:a="http://schemas.openxmlformats.org/drawingml/2006/main" xmlns:r="http://schemas.openxmlformats.org/officeDocument/2006/relationships">
+<c:chartSpace xmlns:c="http://schemas.openxmlformats.org/drawingml/2006/chart" xmlns:a="http://schemas.openxmlformats.org/drawingml/2006/main" xmlns:r="http://schemas.openxmlformats.org/officeDocument/2006/relationships" xmlns:c16r2="http://schemas.microsoft.com/office/drawing/2015/06/chart">
   <c:date1904 val="0"/>
+  <c:lang val="en-US"/>
   <c:roundedCorners val="1"/>
+  <c:style val="2"/>
   <c:chart>
     <c:autoTitleDeleted val="1"/>
     <c:plotArea>
@@ -1644,62 +1469,35 @@
             <a:effectLst/>
           </c:spPr>
           <c:invertIfNegative val="0"/>
-          <c:dLbls>
-            <c:numFmt formatCode="#,##0" sourceLinked="0"/>
-            <c:txPr>
-              <a:bodyPr/>
-              <a:lstStyle/>
-              <a:p>
-                <a:pPr>
-                  <a:defRPr b="0" i="0" strike="noStrike" sz="900" u="none">
-                    <a:solidFill>
-                      <a:srgbClr val="FFFFFF"/>
-                    </a:solidFill>
-                    <a:latin typeface="Arial"/>
-                  </a:defRPr>
-                </a:pPr>
-              </a:p>
-            </c:txPr>
-            <c:showLegendKey val="0"/>
-            <c:showVal val="1"/>
-            <c:showCatName val="0"/>
-            <c:showSerName val="0"/>
-            <c:showPercent val="0"/>
-            <c:showBubbleSize val="0"/>
-            <c:showLeaderLines val="0"/>
-          </c:dLbls>
           <c:dPt>
             <c:idx val="0"/>
             <c:invertIfNegative val="0"/>
             <c:bubble3D val="0"/>
-            <c:spPr>
-              <a:solidFill>
-                <a:srgbClr val="90CAF9"/>
-              </a:solidFill>
-              <a:effectLst/>
-            </c:spPr>
+            <c:extLst>
+              <c:ext xmlns:c16="http://schemas.microsoft.com/office/drawing/2014/chart" uri="{C3380CC4-5D6E-409C-BE32-E72D297353CC}">
+                <c16:uniqueId val="{00000001-0C3F-4404-A2FC-01523499CAA1}"/>
+              </c:ext>
+            </c:extLst>
           </c:dPt>
           <c:dPt>
             <c:idx val="1"/>
             <c:invertIfNegative val="0"/>
             <c:bubble3D val="0"/>
-            <c:spPr>
-              <a:solidFill>
-                <a:srgbClr val="90CAF9"/>
-              </a:solidFill>
-              <a:effectLst/>
-            </c:spPr>
+            <c:extLst>
+              <c:ext xmlns:c16="http://schemas.microsoft.com/office/drawing/2014/chart" uri="{C3380CC4-5D6E-409C-BE32-E72D297353CC}">
+                <c16:uniqueId val="{00000003-0C3F-4404-A2FC-01523499CAA1}"/>
+              </c:ext>
+            </c:extLst>
           </c:dPt>
           <c:dPt>
             <c:idx val="2"/>
             <c:invertIfNegative val="0"/>
             <c:bubble3D val="0"/>
-            <c:spPr>
-              <a:solidFill>
-                <a:srgbClr val="90CAF9"/>
-              </a:solidFill>
-              <a:effectLst/>
-            </c:spPr>
+            <c:extLst>
+              <c:ext xmlns:c16="http://schemas.microsoft.com/office/drawing/2014/chart" uri="{C3380CC4-5D6E-409C-BE32-E72D297353CC}">
+                <c16:uniqueId val="{00000005-0C3F-4404-A2FC-01523499CAA1}"/>
+              </c:ext>
+            </c:extLst>
           </c:dPt>
           <c:dPt>
             <c:idx val="3"/>
@@ -1711,28 +1509,68 @@
               </a:solidFill>
               <a:effectLst/>
             </c:spPr>
+            <c:extLst>
+              <c:ext xmlns:c16="http://schemas.microsoft.com/office/drawing/2014/chart" uri="{C3380CC4-5D6E-409C-BE32-E72D297353CC}">
+                <c16:uniqueId val="{00000007-0C3F-4404-A2FC-01523499CAA1}"/>
+              </c:ext>
+            </c:extLst>
           </c:dPt>
+          <c:dLbls>
+            <c:numFmt formatCode="#,##0" sourceLinked="0"/>
+            <c:spPr>
+              <a:noFill/>
+              <a:ln>
+                <a:noFill/>
+              </a:ln>
+              <a:effectLst/>
+            </c:spPr>
+            <c:txPr>
+              <a:bodyPr/>
+              <a:lstStyle/>
+              <a:p>
+                <a:pPr>
+                  <a:defRPr sz="900" b="0" i="0" u="none" strike="noStrike">
+                    <a:solidFill>
+                      <a:srgbClr val="FFFFFF"/>
+                    </a:solidFill>
+                    <a:latin typeface="Arial"/>
+                  </a:defRPr>
+                </a:pPr>
+                <a:endParaRPr lang="en-US"/>
+              </a:p>
+            </c:txPr>
+            <c:showLegendKey val="0"/>
+            <c:showVal val="1"/>
+            <c:showCatName val="0"/>
+            <c:showSerName val="0"/>
+            <c:showPercent val="0"/>
+            <c:showBubbleSize val="0"/>
+            <c:showLeaderLines val="0"/>
+            <c:extLst>
+              <c:ext xmlns:c15="http://schemas.microsoft.com/office/drawing/2012/chart" uri="{CE6537A1-D6FC-4f65-9D91-7224C49458BB}">
+                <c15:showLeaderLines val="0"/>
+              </c:ext>
+            </c:extLst>
+          </c:dLbls>
           <c:cat>
-            <c:multiLvlStrRef>
+            <c:strRef>
               <c:f>Sheet1!$A$2:$A$5</c:f>
-              <c:multiLvlStrCache>
+              <c:strCache>
                 <c:ptCount val="4"/>
-                <c:lvl>
-                  <c:pt idx="0">
-                    <c:v>Linear Reg</c:v>
-                  </c:pt>
-                  <c:pt idx="1">
-                    <c:v>XGBoost</c:v>
-                  </c:pt>
-                  <c:pt idx="2">
-                    <c:v>Random Forest</c:v>
-                  </c:pt>
-                  <c:pt idx="3">
-                    <c:v>LightGBM</c:v>
-                  </c:pt>
-                </c:lvl>
-              </c:multiLvlStrCache>
-            </c:multiLvlStrRef>
+                <c:pt idx="0">
+                  <c:v>Linear Reg</c:v>
+                </c:pt>
+                <c:pt idx="1">
+                  <c:v>XGBoost</c:v>
+                </c:pt>
+                <c:pt idx="2">
+                  <c:v>Random Forest</c:v>
+                </c:pt>
+                <c:pt idx="3">
+                  <c:v>LightGBM</c:v>
+                </c:pt>
+              </c:strCache>
+            </c:strRef>
           </c:cat>
           <c:val>
             <c:numRef>
@@ -1741,50 +1579,37 @@
                 <c:formatCode>General</c:formatCode>
                 <c:ptCount val="4"/>
                 <c:pt idx="0">
-                  <c:v>40.094</c:v>
+                  <c:v>40.094000000000001</c:v>
                 </c:pt>
                 <c:pt idx="1">
-                  <c:v>31.909</c:v>
+                  <c:v>31.908999999999999</c:v>
                 </c:pt>
                 <c:pt idx="2">
-                  <c:v>31.397</c:v>
+                  <c:v>31.396999999999998</c:v>
                 </c:pt>
                 <c:pt idx="3">
-                  <c:v>30.673</c:v>
+                  <c:v>30.672999999999998</c:v>
                 </c:pt>
               </c:numCache>
             </c:numRef>
           </c:val>
+          <c:extLst>
+            <c:ext xmlns:c16="http://schemas.microsoft.com/office/drawing/2014/chart" uri="{C3380CC4-5D6E-409C-BE32-E72D297353CC}">
+              <c16:uniqueId val="{00000008-0C3F-4404-A2FC-01523499CAA1}"/>
+            </c:ext>
+          </c:extLst>
         </c:ser>
         <c:dLbls>
-          <c:numFmt formatCode="#,##0" sourceLinked="0"/>
-          <c:txPr>
-            <a:bodyPr/>
-            <a:lstStyle/>
-            <a:p>
-              <a:pPr>
-                <a:defRPr b="0" i="0" strike="noStrike" sz="900" u="none">
-                  <a:solidFill>
-                    <a:srgbClr val="FFFFFF"/>
-                  </a:solidFill>
-                  <a:latin typeface="Arial"/>
-                </a:defRPr>
-              </a:pPr>
-            </a:p>
-          </c:txPr>
           <c:showLegendKey val="0"/>
           <c:showVal val="1"/>
           <c:showCatName val="0"/>
           <c:showSerName val="0"/>
           <c:showPercent val="0"/>
           <c:showBubbleSize val="0"/>
-          <c:showLeaderLines val="0"/>
         </c:dLbls>
         <c:gapWidth val="150"/>
-        <c:overlap val="0"/>
         <c:axId val="2094734554"/>
         <c:axId val="2094734552"/>
-        <c:axId val="2094734556"/>
       </c:barChart>
       <c:catAx>
         <c:axId val="2094734554"/>
@@ -1825,6 +1650,7 @@
         <c:crosses val="autoZero"/>
         <c:auto val="1"/>
         <c:lblAlgn val="ctr"/>
+        <c:lblOffset val="100"/>
         <c:noMultiLvlLbl val="1"/>
       </c:catAx>
       <c:valAx>
@@ -1889,6 +1715,7 @@
     </c:plotArea>
     <c:plotVisOnly val="1"/>
     <c:dispBlanksAs val="span"/>
+    <c:showDLblsOverMax val="1"/>
   </c:chart>
   <c:spPr>
     <a:solidFill>
@@ -1906,9 +1733,11 @@
 </file>
 
 <file path=ppt/charts/chart6.xml><?xml version="1.0" encoding="utf-8"?>
-<c:chartSpace xmlns:c="http://schemas.openxmlformats.org/drawingml/2006/chart" xmlns:a="http://schemas.openxmlformats.org/drawingml/2006/main" xmlns:r="http://schemas.openxmlformats.org/officeDocument/2006/relationships">
+<c:chartSpace xmlns:c="http://schemas.openxmlformats.org/drawingml/2006/chart" xmlns:a="http://schemas.openxmlformats.org/drawingml/2006/main" xmlns:r="http://schemas.openxmlformats.org/officeDocument/2006/relationships" xmlns:c16r2="http://schemas.microsoft.com/office/drawing/2015/06/chart">
   <c:date1904 val="0"/>
+  <c:lang val="en-US"/>
   <c:roundedCorners val="1"/>
+  <c:style val="2"/>
   <c:chart>
     <c:autoTitleDeleted val="1"/>
     <c:plotArea>
@@ -1938,62 +1767,35 @@
             <a:effectLst/>
           </c:spPr>
           <c:invertIfNegative val="0"/>
-          <c:dLbls>
-            <c:numFmt formatCode="#,##0" sourceLinked="0"/>
-            <c:txPr>
-              <a:bodyPr/>
-              <a:lstStyle/>
-              <a:p>
-                <a:pPr>
-                  <a:defRPr b="0" i="0" strike="noStrike" sz="900" u="none">
-                    <a:solidFill>
-                      <a:srgbClr val="FFFFFF"/>
-                    </a:solidFill>
-                    <a:latin typeface="Arial"/>
-                  </a:defRPr>
-                </a:pPr>
-              </a:p>
-            </c:txPr>
-            <c:showLegendKey val="0"/>
-            <c:showVal val="1"/>
-            <c:showCatName val="0"/>
-            <c:showSerName val="0"/>
-            <c:showPercent val="0"/>
-            <c:showBubbleSize val="0"/>
-            <c:showLeaderLines val="0"/>
-          </c:dLbls>
           <c:dPt>
             <c:idx val="0"/>
             <c:invertIfNegative val="0"/>
             <c:bubble3D val="0"/>
-            <c:spPr>
-              <a:solidFill>
-                <a:srgbClr val="EF9A9A"/>
-              </a:solidFill>
-              <a:effectLst/>
-            </c:spPr>
+            <c:extLst>
+              <c:ext xmlns:c16="http://schemas.microsoft.com/office/drawing/2014/chart" uri="{C3380CC4-5D6E-409C-BE32-E72D297353CC}">
+                <c16:uniqueId val="{00000001-7CA7-4B9F-A224-41360C844819}"/>
+              </c:ext>
+            </c:extLst>
           </c:dPt>
           <c:dPt>
             <c:idx val="1"/>
             <c:invertIfNegative val="0"/>
             <c:bubble3D val="0"/>
-            <c:spPr>
-              <a:solidFill>
-                <a:srgbClr val="EF9A9A"/>
-              </a:solidFill>
-              <a:effectLst/>
-            </c:spPr>
+            <c:extLst>
+              <c:ext xmlns:c16="http://schemas.microsoft.com/office/drawing/2014/chart" uri="{C3380CC4-5D6E-409C-BE32-E72D297353CC}">
+                <c16:uniqueId val="{00000003-7CA7-4B9F-A224-41360C844819}"/>
+              </c:ext>
+            </c:extLst>
           </c:dPt>
           <c:dPt>
             <c:idx val="2"/>
             <c:invertIfNegative val="0"/>
             <c:bubble3D val="0"/>
-            <c:spPr>
-              <a:solidFill>
-                <a:srgbClr val="EF9A9A"/>
-              </a:solidFill>
-              <a:effectLst/>
-            </c:spPr>
+            <c:extLst>
+              <c:ext xmlns:c16="http://schemas.microsoft.com/office/drawing/2014/chart" uri="{C3380CC4-5D6E-409C-BE32-E72D297353CC}">
+                <c16:uniqueId val="{00000005-7CA7-4B9F-A224-41360C844819}"/>
+              </c:ext>
+            </c:extLst>
           </c:dPt>
           <c:dPt>
             <c:idx val="3"/>
@@ -2005,28 +1807,68 @@
               </a:solidFill>
               <a:effectLst/>
             </c:spPr>
+            <c:extLst>
+              <c:ext xmlns:c16="http://schemas.microsoft.com/office/drawing/2014/chart" uri="{C3380CC4-5D6E-409C-BE32-E72D297353CC}">
+                <c16:uniqueId val="{00000007-7CA7-4B9F-A224-41360C844819}"/>
+              </c:ext>
+            </c:extLst>
           </c:dPt>
+          <c:dLbls>
+            <c:numFmt formatCode="#,##0" sourceLinked="0"/>
+            <c:spPr>
+              <a:noFill/>
+              <a:ln>
+                <a:noFill/>
+              </a:ln>
+              <a:effectLst/>
+            </c:spPr>
+            <c:txPr>
+              <a:bodyPr/>
+              <a:lstStyle/>
+              <a:p>
+                <a:pPr>
+                  <a:defRPr sz="900" b="0" i="0" u="none" strike="noStrike">
+                    <a:solidFill>
+                      <a:srgbClr val="FFFFFF"/>
+                    </a:solidFill>
+                    <a:latin typeface="Arial"/>
+                  </a:defRPr>
+                </a:pPr>
+                <a:endParaRPr lang="en-US"/>
+              </a:p>
+            </c:txPr>
+            <c:showLegendKey val="0"/>
+            <c:showVal val="1"/>
+            <c:showCatName val="0"/>
+            <c:showSerName val="0"/>
+            <c:showPercent val="0"/>
+            <c:showBubbleSize val="0"/>
+            <c:showLeaderLines val="0"/>
+            <c:extLst>
+              <c:ext xmlns:c15="http://schemas.microsoft.com/office/drawing/2012/chart" uri="{CE6537A1-D6FC-4f65-9D91-7224C49458BB}">
+                <c15:showLeaderLines val="0"/>
+              </c:ext>
+            </c:extLst>
+          </c:dLbls>
           <c:cat>
-            <c:multiLvlStrRef>
+            <c:strRef>
               <c:f>Sheet1!$A$2:$A$5</c:f>
-              <c:multiLvlStrCache>
+              <c:strCache>
                 <c:ptCount val="4"/>
-                <c:lvl>
-                  <c:pt idx="0">
-                    <c:v>Linear Reg</c:v>
-                  </c:pt>
-                  <c:pt idx="1">
-                    <c:v>Random Forest</c:v>
-                  </c:pt>
-                  <c:pt idx="2">
-                    <c:v>XGBoost</c:v>
-                  </c:pt>
-                  <c:pt idx="3">
-                    <c:v>LightGBM</c:v>
-                  </c:pt>
-                </c:lvl>
-              </c:multiLvlStrCache>
-            </c:multiLvlStrRef>
+                <c:pt idx="0">
+                  <c:v>Linear Reg</c:v>
+                </c:pt>
+                <c:pt idx="1">
+                  <c:v>Random Forest</c:v>
+                </c:pt>
+                <c:pt idx="2">
+                  <c:v>XGBoost</c:v>
+                </c:pt>
+                <c:pt idx="3">
+                  <c:v>LightGBM</c:v>
+                </c:pt>
+              </c:strCache>
+            </c:strRef>
           </c:cat>
           <c:val>
             <c:numRef>
@@ -2038,47 +1880,34 @@
                   <c:v>120.538</c:v>
                 </c:pt>
                 <c:pt idx="1">
-                  <c:v>77.746</c:v>
+                  <c:v>77.745999999999995</c:v>
                 </c:pt>
                 <c:pt idx="2">
-                  <c:v>74.516</c:v>
+                  <c:v>74.516000000000005</c:v>
                 </c:pt>
                 <c:pt idx="3">
-                  <c:v>72.318</c:v>
+                  <c:v>72.317999999999998</c:v>
                 </c:pt>
               </c:numCache>
             </c:numRef>
           </c:val>
+          <c:extLst>
+            <c:ext xmlns:c16="http://schemas.microsoft.com/office/drawing/2014/chart" uri="{C3380CC4-5D6E-409C-BE32-E72D297353CC}">
+              <c16:uniqueId val="{00000008-7CA7-4B9F-A224-41360C844819}"/>
+            </c:ext>
+          </c:extLst>
         </c:ser>
         <c:dLbls>
-          <c:numFmt formatCode="#,##0" sourceLinked="0"/>
-          <c:txPr>
-            <a:bodyPr/>
-            <a:lstStyle/>
-            <a:p>
-              <a:pPr>
-                <a:defRPr b="0" i="0" strike="noStrike" sz="900" u="none">
-                  <a:solidFill>
-                    <a:srgbClr val="FFFFFF"/>
-                  </a:solidFill>
-                  <a:latin typeface="Arial"/>
-                </a:defRPr>
-              </a:pPr>
-            </a:p>
-          </c:txPr>
           <c:showLegendKey val="0"/>
           <c:showVal val="1"/>
           <c:showCatName val="0"/>
           <c:showSerName val="0"/>
           <c:showPercent val="0"/>
           <c:showBubbleSize val="0"/>
-          <c:showLeaderLines val="0"/>
         </c:dLbls>
         <c:gapWidth val="150"/>
-        <c:overlap val="0"/>
         <c:axId val="2094734554"/>
         <c:axId val="2094734552"/>
-        <c:axId val="2094734556"/>
       </c:barChart>
       <c:catAx>
         <c:axId val="2094734554"/>
@@ -2119,6 +1948,7 @@
         <c:crosses val="autoZero"/>
         <c:auto val="1"/>
         <c:lblAlgn val="ctr"/>
+        <c:lblOffset val="100"/>
         <c:noMultiLvlLbl val="1"/>
       </c:catAx>
       <c:valAx>
@@ -2183,6 +2013,7 @@
     </c:plotArea>
     <c:plotVisOnly val="1"/>
     <c:dispBlanksAs val="span"/>
+    <c:showDLblsOverMax val="1"/>
   </c:chart>
   <c:spPr>
     <a:solidFill>
@@ -2200,9 +2031,11 @@
 </file>
 
 <file path=ppt/charts/chart7.xml><?xml version="1.0" encoding="utf-8"?>
-<c:chartSpace xmlns:c="http://schemas.openxmlformats.org/drawingml/2006/chart" xmlns:a="http://schemas.openxmlformats.org/drawingml/2006/main" xmlns:r="http://schemas.openxmlformats.org/officeDocument/2006/relationships">
+<c:chartSpace xmlns:c="http://schemas.openxmlformats.org/drawingml/2006/chart" xmlns:a="http://schemas.openxmlformats.org/drawingml/2006/main" xmlns:r="http://schemas.openxmlformats.org/officeDocument/2006/relationships" xmlns:c16r2="http://schemas.microsoft.com/office/drawing/2015/06/chart">
   <c:date1904 val="0"/>
+  <c:lang val="en-US"/>
   <c:roundedCorners val="1"/>
+  <c:style val="2"/>
   <c:chart>
     <c:autoTitleDeleted val="1"/>
     <c:plotArea>
@@ -2232,63 +2065,37 @@
             <a:effectLst/>
           </c:spPr>
           <c:invertIfNegative val="0"/>
-          <c:dLbls>
-            <c:numFmt formatCode="#,##0" sourceLinked="0"/>
-            <c:txPr>
-              <a:bodyPr/>
-              <a:lstStyle/>
-              <a:p>
-                <a:pPr>
-                  <a:defRPr b="0" i="0" strike="noStrike" sz="1200" u="none">
-                    <a:solidFill>
-                      <a:srgbClr val="000000"/>
-                    </a:solidFill>
-                    <a:latin typeface="Arial"/>
-                  </a:defRPr>
-                </a:pPr>
-              </a:p>
-            </c:txPr>
-            <c:showLegendKey val="0"/>
-            <c:showVal val="0"/>
-            <c:showCatName val="0"/>
-            <c:showSerName val="0"/>
-            <c:showPercent val="0"/>
-            <c:showBubbleSize val="0"/>
-            <c:showLeaderLines val="0"/>
-          </c:dLbls>
           <c:cat>
-            <c:multiLvlStrRef>
+            <c:strRef>
               <c:f>Sheet1!$A$2:$A$9</c:f>
-              <c:multiLvlStrCache>
+              <c:strCache>
                 <c:ptCount val="8"/>
-                <c:lvl>
-                  <c:pt idx="0">
-                    <c:v>holiday</c:v>
-                  </c:pt>
-                  <c:pt idx="1">
-                    <c:v>year</c:v>
-                  </c:pt>
-                  <c:pt idx="2">
-                    <c:v>weathersit</c:v>
-                  </c:pt>
-                  <c:pt idx="3">
-                    <c:v>season</c:v>
-                  </c:pt>
-                  <c:pt idx="4">
-                    <c:v>atemp</c:v>
-                  </c:pt>
-                  <c:pt idx="5">
-                    <c:v>temp</c:v>
-                  </c:pt>
-                  <c:pt idx="6">
-                    <c:v>hum</c:v>
-                  </c:pt>
-                  <c:pt idx="7">
-                    <c:v>hr</c:v>
-                  </c:pt>
-                </c:lvl>
-              </c:multiLvlStrCache>
-            </c:multiLvlStrRef>
+                <c:pt idx="0">
+                  <c:v>holiday</c:v>
+                </c:pt>
+                <c:pt idx="1">
+                  <c:v>year</c:v>
+                </c:pt>
+                <c:pt idx="2">
+                  <c:v>weathersit</c:v>
+                </c:pt>
+                <c:pt idx="3">
+                  <c:v>season</c:v>
+                </c:pt>
+                <c:pt idx="4">
+                  <c:v>atemp</c:v>
+                </c:pt>
+                <c:pt idx="5">
+                  <c:v>temp</c:v>
+                </c:pt>
+                <c:pt idx="6">
+                  <c:v>hum</c:v>
+                </c:pt>
+                <c:pt idx="7">
+                  <c:v>hr</c:v>
+                </c:pt>
+              </c:strCache>
+            </c:strRef>
           </c:cat>
           <c:val>
             <c:numRef>
@@ -2323,36 +2130,23 @@
               </c:numCache>
             </c:numRef>
           </c:val>
+          <c:extLst>
+            <c:ext xmlns:c16="http://schemas.microsoft.com/office/drawing/2014/chart" uri="{C3380CC4-5D6E-409C-BE32-E72D297353CC}">
+              <c16:uniqueId val="{00000000-9795-4EFB-B3BC-13354E500964}"/>
+            </c:ext>
+          </c:extLst>
         </c:ser>
         <c:dLbls>
-          <c:numFmt formatCode="#,##0" sourceLinked="0"/>
-          <c:txPr>
-            <a:bodyPr/>
-            <a:lstStyle/>
-            <a:p>
-              <a:pPr>
-                <a:defRPr b="0" i="0" strike="noStrike" sz="1200" u="none">
-                  <a:solidFill>
-                    <a:srgbClr val="000000"/>
-                  </a:solidFill>
-                  <a:latin typeface="Arial"/>
-                </a:defRPr>
-              </a:pPr>
-            </a:p>
-          </c:txPr>
           <c:showLegendKey val="0"/>
           <c:showVal val="0"/>
           <c:showCatName val="0"/>
           <c:showSerName val="0"/>
           <c:showPercent val="0"/>
           <c:showBubbleSize val="0"/>
-          <c:showLeaderLines val="0"/>
         </c:dLbls>
         <c:gapWidth val="150"/>
-        <c:overlap val="0"/>
         <c:axId val="2094734554"/>
         <c:axId val="2094734552"/>
-        <c:axId val="2094734556"/>
       </c:barChart>
       <c:catAx>
         <c:axId val="2094734554"/>
@@ -2393,6 +2187,7 @@
         <c:crosses val="autoZero"/>
         <c:auto val="1"/>
         <c:lblAlgn val="ctr"/>
+        <c:lblOffset val="100"/>
         <c:noMultiLvlLbl val="1"/>
       </c:catAx>
       <c:valAx>
@@ -2457,6 +2252,7 @@
     </c:plotArea>
     <c:plotVisOnly val="1"/>
     <c:dispBlanksAs val="span"/>
+    <c:showDLblsOverMax val="1"/>
   </c:chart>
   <c:spPr>
     <a:solidFill>
@@ -2474,9 +2270,11 @@
 </file>
 
 <file path=ppt/charts/chart8.xml><?xml version="1.0" encoding="utf-8"?>
-<c:chartSpace xmlns:c="http://schemas.openxmlformats.org/drawingml/2006/chart" xmlns:a="http://schemas.openxmlformats.org/drawingml/2006/main" xmlns:r="http://schemas.openxmlformats.org/officeDocument/2006/relationships">
+<c:chartSpace xmlns:c="http://schemas.openxmlformats.org/drawingml/2006/chart" xmlns:a="http://schemas.openxmlformats.org/drawingml/2006/main" xmlns:r="http://schemas.openxmlformats.org/officeDocument/2006/relationships" xmlns:c16r2="http://schemas.microsoft.com/office/drawing/2015/06/chart">
   <c:date1904 val="0"/>
+  <c:lang val="en-US"/>
   <c:roundedCorners val="1"/>
+  <c:style val="2"/>
   <c:chart>
     <c:autoTitleDeleted val="1"/>
     <c:plotArea>
@@ -2506,63 +2304,37 @@
             <a:effectLst/>
           </c:spPr>
           <c:invertIfNegative val="0"/>
-          <c:dLbls>
-            <c:numFmt formatCode="#,##0" sourceLinked="0"/>
-            <c:txPr>
-              <a:bodyPr/>
-              <a:lstStyle/>
-              <a:p>
-                <a:pPr>
-                  <a:defRPr b="0" i="0" strike="noStrike" sz="1200" u="none">
-                    <a:solidFill>
-                      <a:srgbClr val="000000"/>
-                    </a:solidFill>
-                    <a:latin typeface="Arial"/>
-                  </a:defRPr>
-                </a:pPr>
-              </a:p>
-            </c:txPr>
-            <c:showLegendKey val="0"/>
-            <c:showVal val="0"/>
-            <c:showCatName val="0"/>
-            <c:showSerName val="0"/>
-            <c:showPercent val="0"/>
-            <c:showBubbleSize val="0"/>
-            <c:showLeaderLines val="0"/>
-          </c:dLbls>
           <c:cat>
-            <c:multiLvlStrRef>
+            <c:strRef>
               <c:f>Sheet1!$A$2:$A$9</c:f>
-              <c:multiLvlStrCache>
+              <c:strCache>
                 <c:ptCount val="8"/>
-                <c:lvl>
-                  <c:pt idx="0">
-                    <c:v>holiday</c:v>
-                  </c:pt>
-                  <c:pt idx="1">
-                    <c:v>year</c:v>
-                  </c:pt>
-                  <c:pt idx="2">
-                    <c:v>weathersit</c:v>
-                  </c:pt>
-                  <c:pt idx="3">
-                    <c:v>season</c:v>
-                  </c:pt>
-                  <c:pt idx="4">
-                    <c:v>atemp</c:v>
-                  </c:pt>
-                  <c:pt idx="5">
-                    <c:v>temp</c:v>
-                  </c:pt>
-                  <c:pt idx="6">
-                    <c:v>hum</c:v>
-                  </c:pt>
-                  <c:pt idx="7">
-                    <c:v>hr</c:v>
-                  </c:pt>
-                </c:lvl>
-              </c:multiLvlStrCache>
-            </c:multiLvlStrRef>
+                <c:pt idx="0">
+                  <c:v>holiday</c:v>
+                </c:pt>
+                <c:pt idx="1">
+                  <c:v>year</c:v>
+                </c:pt>
+                <c:pt idx="2">
+                  <c:v>weathersit</c:v>
+                </c:pt>
+                <c:pt idx="3">
+                  <c:v>season</c:v>
+                </c:pt>
+                <c:pt idx="4">
+                  <c:v>atemp</c:v>
+                </c:pt>
+                <c:pt idx="5">
+                  <c:v>temp</c:v>
+                </c:pt>
+                <c:pt idx="6">
+                  <c:v>hum</c:v>
+                </c:pt>
+                <c:pt idx="7">
+                  <c:v>hr</c:v>
+                </c:pt>
+              </c:strCache>
+            </c:strRef>
           </c:cat>
           <c:val>
             <c:numRef>
@@ -2597,36 +2369,23 @@
               </c:numCache>
             </c:numRef>
           </c:val>
+          <c:extLst>
+            <c:ext xmlns:c16="http://schemas.microsoft.com/office/drawing/2014/chart" uri="{C3380CC4-5D6E-409C-BE32-E72D297353CC}">
+              <c16:uniqueId val="{00000000-CE3C-47C6-9F3F-03123F00A370}"/>
+            </c:ext>
+          </c:extLst>
         </c:ser>
         <c:dLbls>
-          <c:numFmt formatCode="#,##0" sourceLinked="0"/>
-          <c:txPr>
-            <a:bodyPr/>
-            <a:lstStyle/>
-            <a:p>
-              <a:pPr>
-                <a:defRPr b="0" i="0" strike="noStrike" sz="1200" u="none">
-                  <a:solidFill>
-                    <a:srgbClr val="000000"/>
-                  </a:solidFill>
-                  <a:latin typeface="Arial"/>
-                </a:defRPr>
-              </a:pPr>
-            </a:p>
-          </c:txPr>
           <c:showLegendKey val="0"/>
           <c:showVal val="0"/>
           <c:showCatName val="0"/>
           <c:showSerName val="0"/>
           <c:showPercent val="0"/>
           <c:showBubbleSize val="0"/>
-          <c:showLeaderLines val="0"/>
         </c:dLbls>
         <c:gapWidth val="150"/>
-        <c:overlap val="0"/>
         <c:axId val="2094734554"/>
         <c:axId val="2094734552"/>
-        <c:axId val="2094734556"/>
       </c:barChart>
       <c:catAx>
         <c:axId val="2094734554"/>
@@ -2667,6 +2426,7 @@
         <c:crosses val="autoZero"/>
         <c:auto val="1"/>
         <c:lblAlgn val="ctr"/>
+        <c:lblOffset val="100"/>
         <c:noMultiLvlLbl val="1"/>
       </c:catAx>
       <c:valAx>
@@ -2731,6 +2491,7 @@
     </c:plotArea>
     <c:plotVisOnly val="1"/>
     <c:dispBlanksAs val="span"/>
+    <c:showDLblsOverMax val="1"/>
   </c:chart>
   <c:spPr>
     <a:solidFill>
@@ -2769,234 +2530,10 @@
           <a:chExt cx="0" cy="0"/>
         </a:xfrm>
       </p:grpSpPr>
-      <p:sp>
-        <p:nvSpPr>
-          <p:cNvPr id="2" name="Header Placeholder 1"/>
-          <p:cNvSpPr>
-            <a:spLocks noGrp="1"/>
-          </p:cNvSpPr>
-          <p:nvPr>
-            <p:ph type="hdr" sz="quarter"/>
-          </p:nvPr>
-        </p:nvSpPr>
-        <p:spPr>
-          <a:xfrm>
-            <a:off x="0" y="0"/>
-            <a:ext cx="2971800" cy="458788"/>
-          </a:xfrm>
-          <a:prstGeom prst="rect">
-            <a:avLst/>
-          </a:prstGeom>
-        </p:spPr>
-        <p:txBody>
-          <a:bodyPr vert="horz" lIns="91440" tIns="45720" rIns="91440" bIns="45720" rtlCol="0"/>
-          <a:lstStyle>
-            <a:lvl1pPr algn="l">
-              <a:defRPr sz="1200"/>
-            </a:lvl1pPr>
-          </a:lstStyle>
-          <a:p>
-            <a:endParaRPr lang="en-US"/>
-          </a:p>
-        </p:txBody>
-      </p:sp>
-      <p:sp>
-        <p:nvSpPr>
-          <p:cNvPr id="3" name="Date Placeholder 2"/>
-          <p:cNvSpPr>
-            <a:spLocks noGrp="1"/>
-          </p:cNvSpPr>
-          <p:nvPr>
-            <p:ph type="dt" idx="1"/>
-          </p:nvPr>
-        </p:nvSpPr>
-        <p:spPr>
-          <a:xfrm>
-            <a:off x="3884613" y="0"/>
-            <a:ext cx="2971800" cy="458788"/>
-          </a:xfrm>
-          <a:prstGeom prst="rect">
-            <a:avLst/>
-          </a:prstGeom>
-        </p:spPr>
-        <p:txBody>
-          <a:bodyPr vert="horz" lIns="91440" tIns="45720" rIns="91440" bIns="45720" rtlCol="0"/>
-          <a:lstStyle>
-            <a:lvl1pPr algn="r">
-              <a:defRPr sz="1200"/>
-            </a:lvl1pPr>
-          </a:lstStyle>
-          <a:p>
-            <a:fld id="{5282F153-3F37-0F45-9E97-73ACFA13230C}" type="datetimeFigureOut">
-              <a:rPr lang="en-US"/>
-              <a:t>7/23/19</a:t>
-            </a:fld>
-            <a:endParaRPr lang="en-US"/>
-          </a:p>
-        </p:txBody>
-      </p:sp>
-      <p:sp>
-        <p:nvSpPr>
-          <p:cNvPr id="4" name="Slide Image Placeholder 3"/>
-          <p:cNvSpPr>
-            <a:spLocks noGrp="1" noRot="1" noChangeAspect="1"/>
-          </p:cNvSpPr>
-          <p:nvPr>
-            <p:ph type="sldImg" idx="2"/>
-          </p:nvPr>
-        </p:nvSpPr>
-        <p:spPr>
-          <a:xfrm>
-            <a:off x="685800" y="1143000"/>
-            <a:ext cx="5486400" cy="3086100"/>
-          </a:xfrm>
-          <a:prstGeom prst="rect">
-            <a:avLst/>
-          </a:prstGeom>
-          <a:noFill/>
-          <a:ln w="12700">
-            <a:solidFill>
-              <a:prstClr val="black"/>
-            </a:solidFill>
-          </a:ln>
-        </p:spPr>
-        <p:txBody>
-          <a:bodyPr vert="horz" lIns="91440" tIns="45720" rIns="91440" bIns="45720" rtlCol="0" anchor="ctr"/>
-          <a:lstStyle/>
-          <a:p>
-            <a:endParaRPr lang="en-US"/>
-          </a:p>
-        </p:txBody>
-      </p:sp>
-      <p:sp>
-        <p:nvSpPr>
-          <p:cNvPr id="5" name="Notes Placeholder 4"/>
-          <p:cNvSpPr>
-            <a:spLocks noGrp="1"/>
-          </p:cNvSpPr>
-          <p:nvPr>
-            <p:ph type="body" sz="quarter" idx="3"/>
-          </p:nvPr>
-        </p:nvSpPr>
-        <p:spPr>
-          <a:xfrm>
-            <a:off x="685800" y="4400550"/>
-            <a:ext cx="5486400" cy="3600450"/>
-          </a:xfrm>
-          <a:prstGeom prst="rect">
-            <a:avLst/>
-          </a:prstGeom>
-        </p:spPr>
-        <p:txBody>
-          <a:bodyPr vert="horz" lIns="91440" tIns="45720" rIns="91440" bIns="45720" rtlCol="0"/>
-          <a:lstStyle/>
-          <a:p>
-            <a:pPr lvl="0"/>
-            <a:r>
-              <a:rPr lang="en-US"/>
-              <a:t>Click to edit Master text styles</a:t>
-            </a:r>
-          </a:p>
-          <a:p>
-            <a:pPr lvl="1"/>
-            <a:r>
-              <a:rPr lang="en-US"/>
-              <a:t>Second level</a:t>
-            </a:r>
-          </a:p>
-          <a:p>
-            <a:pPr lvl="2"/>
-            <a:r>
-              <a:rPr lang="en-US"/>
-              <a:t>Third level</a:t>
-            </a:r>
-          </a:p>
-          <a:p>
-            <a:pPr lvl="3"/>
-            <a:r>
-              <a:rPr lang="en-US"/>
-              <a:t>Fourth level</a:t>
-            </a:r>
-          </a:p>
-          <a:p>
-            <a:pPr lvl="4"/>
-            <a:r>
-              <a:rPr lang="en-US"/>
-              <a:t>Fifth level</a:t>
-            </a:r>
-          </a:p>
-        </p:txBody>
-      </p:sp>
-      <p:sp>
-        <p:nvSpPr>
-          <p:cNvPr id="6" name="Footer Placeholder 5"/>
-          <p:cNvSpPr>
-            <a:spLocks noGrp="1"/>
-          </p:cNvSpPr>
-          <p:nvPr>
-            <p:ph type="ftr" sz="quarter" idx="4"/>
-          </p:nvPr>
-        </p:nvSpPr>
-        <p:spPr>
-          <a:xfrm>
-            <a:off x="0" y="8685213"/>
-            <a:ext cx="2971800" cy="458787"/>
-          </a:xfrm>
-          <a:prstGeom prst="rect">
-            <a:avLst/>
-          </a:prstGeom>
-        </p:spPr>
-        <p:txBody>
-          <a:bodyPr vert="horz" lIns="91440" tIns="45720" rIns="91440" bIns="45720" rtlCol="0" anchor="b"/>
-          <a:lstStyle>
-            <a:lvl1pPr algn="l">
-              <a:defRPr sz="1200"/>
-            </a:lvl1pPr>
-          </a:lstStyle>
-          <a:p>
-            <a:endParaRPr lang="en-US"/>
-          </a:p>
-        </p:txBody>
-      </p:sp>
-      <p:sp>
-        <p:nvSpPr>
-          <p:cNvPr id="7" name="Slide Number Placeholder 6"/>
-          <p:cNvSpPr>
-            <a:spLocks noGrp="1"/>
-          </p:cNvSpPr>
-          <p:nvPr>
-            <p:ph type="sldNum" sz="quarter" idx="5"/>
-          </p:nvPr>
-        </p:nvSpPr>
-        <p:spPr>
-          <a:xfrm>
-            <a:off x="3884613" y="8685213"/>
-            <a:ext cx="2971800" cy="458787"/>
-          </a:xfrm>
-          <a:prstGeom prst="rect">
-            <a:avLst/>
-          </a:prstGeom>
-        </p:spPr>
-        <p:txBody>
-          <a:bodyPr vert="horz" lIns="91440" tIns="45720" rIns="91440" bIns="45720" rtlCol="0" anchor="b"/>
-          <a:lstStyle>
-            <a:lvl1pPr algn="r">
-              <a:defRPr sz="1200"/>
-            </a:lvl1pPr>
-          </a:lstStyle>
-          <a:p>
-            <a:fld id="{CE5E9CC1-C706-0F49-92D6-E571CC5EEA8F}" type="slidenum">
-              <a:rPr lang="en-US"/>
-              <a:t>‹#›</a:t>
-            </a:fld>
-            <a:endParaRPr lang="en-US"/>
-          </a:p>
-        </p:txBody>
-      </p:sp>
     </p:spTree>
     <p:extLst>
       <p:ext uri="{BB962C8B-B14F-4D97-AF65-F5344CB8AC3E}">
-        <p14:creationId xmlns:p14="http://schemas.microsoft.com/office/powerpoint/2010/main" val="1024086991"/>
+        <p14:creationId xmlns:p14="http://schemas.microsoft.com/office/powerpoint/2010/main" val="2849644771"/>
       </p:ext>
     </p:extLst>
   </p:cSld>
@@ -3140,10 +2677,6 @@
           <a:bodyPr/>
           <a:lstStyle/>
           <a:p>
-            <a:r>
-              <a:rPr lang="en-US" dirty="0"/>
-              <a:t/>
-            </a:r>
             <a:endParaRPr lang="en-US" dirty="0"/>
           </a:p>
         </p:txBody>
@@ -3228,10 +2761,6 @@
           <a:bodyPr/>
           <a:lstStyle/>
           <a:p>
-            <a:r>
-              <a:rPr lang="en-US" dirty="0"/>
-              <a:t/>
-            </a:r>
             <a:endParaRPr lang="en-US" dirty="0"/>
           </a:p>
         </p:txBody>
@@ -3316,10 +2845,6 @@
           <a:bodyPr/>
           <a:lstStyle/>
           <a:p>
-            <a:r>
-              <a:rPr lang="en-US" dirty="0"/>
-              <a:t/>
-            </a:r>
             <a:endParaRPr lang="en-US" dirty="0"/>
           </a:p>
         </p:txBody>
@@ -3404,10 +2929,6 @@
           <a:bodyPr/>
           <a:lstStyle/>
           <a:p>
-            <a:r>
-              <a:rPr lang="en-US" dirty="0"/>
-              <a:t/>
-            </a:r>
             <a:endParaRPr lang="en-US" dirty="0"/>
           </a:p>
         </p:txBody>
@@ -3492,10 +3013,6 @@
           <a:bodyPr/>
           <a:lstStyle/>
           <a:p>
-            <a:r>
-              <a:rPr lang="en-US" dirty="0"/>
-              <a:t/>
-            </a:r>
             <a:endParaRPr lang="en-US" dirty="0"/>
           </a:p>
         </p:txBody>
@@ -3580,10 +3097,6 @@
           <a:bodyPr/>
           <a:lstStyle/>
           <a:p>
-            <a:r>
-              <a:rPr lang="en-US" dirty="0"/>
-              <a:t/>
-            </a:r>
             <a:endParaRPr lang="en-US" dirty="0"/>
           </a:p>
         </p:txBody>
@@ -3668,10 +3181,6 @@
           <a:bodyPr/>
           <a:lstStyle/>
           <a:p>
-            <a:r>
-              <a:rPr lang="en-US" dirty="0"/>
-              <a:t/>
-            </a:r>
             <a:endParaRPr lang="en-US" dirty="0"/>
           </a:p>
         </p:txBody>
@@ -3756,10 +3265,6 @@
           <a:bodyPr/>
           <a:lstStyle/>
           <a:p>
-            <a:r>
-              <a:rPr lang="en-US" dirty="0"/>
-              <a:t/>
-            </a:r>
             <a:endParaRPr lang="en-US" dirty="0"/>
           </a:p>
         </p:txBody>
@@ -3844,10 +3349,6 @@
           <a:bodyPr/>
           <a:lstStyle/>
           <a:p>
-            <a:r>
-              <a:rPr lang="en-US" dirty="0"/>
-              <a:t/>
-            </a:r>
             <a:endParaRPr lang="en-US" dirty="0"/>
           </a:p>
         </p:txBody>
@@ -3932,10 +3433,6 @@
           <a:bodyPr/>
           <a:lstStyle/>
           <a:p>
-            <a:r>
-              <a:rPr lang="en-US" dirty="0"/>
-              <a:t/>
-            </a:r>
             <a:endParaRPr lang="en-US" dirty="0"/>
           </a:p>
         </p:txBody>
@@ -4020,10 +3517,6 @@
           <a:bodyPr/>
           <a:lstStyle/>
           <a:p>
-            <a:r>
-              <a:rPr lang="en-US" dirty="0"/>
-              <a:t/>
-            </a:r>
             <a:endParaRPr lang="en-US" dirty="0"/>
           </a:p>
         </p:txBody>
@@ -4108,10 +3601,6 @@
           <a:bodyPr/>
           <a:lstStyle/>
           <a:p>
-            <a:r>
-              <a:rPr lang="en-US" dirty="0"/>
-              <a:t/>
-            </a:r>
             <a:endParaRPr lang="en-US" dirty="0"/>
           </a:p>
         </p:txBody>
@@ -4196,10 +3685,6 @@
           <a:bodyPr/>
           <a:lstStyle/>
           <a:p>
-            <a:r>
-              <a:rPr lang="en-US" dirty="0"/>
-              <a:t/>
-            </a:r>
             <a:endParaRPr lang="en-US" dirty="0"/>
           </a:p>
         </p:txBody>
@@ -4284,10 +3769,6 @@
           <a:bodyPr/>
           <a:lstStyle/>
           <a:p>
-            <a:r>
-              <a:rPr lang="en-US" dirty="0"/>
-              <a:t/>
-            </a:r>
             <a:endParaRPr lang="en-US" dirty="0"/>
           </a:p>
         </p:txBody>
@@ -4372,10 +3853,6 @@
           <a:bodyPr/>
           <a:lstStyle/>
           <a:p>
-            <a:r>
-              <a:rPr lang="en-US" dirty="0"/>
-              <a:t/>
-            </a:r>
             <a:endParaRPr lang="en-US" dirty="0"/>
           </a:p>
         </p:txBody>
@@ -4449,6 +3926,11 @@
 <file path=ppt/slideMasters/slideMaster1.xml><?xml version="1.0" encoding="utf-8"?>
 <p:sldMaster xmlns:a="http://schemas.openxmlformats.org/drawingml/2006/main" xmlns:r="http://schemas.openxmlformats.org/officeDocument/2006/relationships" xmlns:p="http://schemas.openxmlformats.org/presentationml/2006/main">
   <p:cSld>
+    <p:bg>
+      <p:bgRef idx="1001">
+        <a:schemeClr val="bg1"/>
+      </p:bgRef>
+    </p:bg>
     <p:spTree>
       <p:nvGrpSpPr>
         <p:cNvPr id="1" name=""/>
@@ -4731,6 +4213,7 @@
         <a:solidFill>
           <a:srgbClr val="0A0F1E"/>
         </a:solidFill>
+        <a:effectLst/>
       </p:bgPr>
     </p:bg>
     <p:spTree>
@@ -5018,7 +4501,7 @@
           <a:bodyPr wrap="square" rtlCol="0" anchor="ctr"/>
           <a:lstStyle/>
           <a:p>
-            <a:pPr algn="ctr" indent="0" marL="0">
+            <a:pPr marL="0" indent="0" algn="ctr">
               <a:buNone/>
             </a:pPr>
             <a:r>
@@ -5057,7 +4540,7 @@
           <a:bodyPr wrap="square" rtlCol="0" anchor="ctr"/>
           <a:lstStyle/>
           <a:p>
-            <a:pPr algn="l" indent="0" marL="0">
+            <a:pPr marL="0" indent="0" algn="l">
               <a:buNone/>
             </a:pPr>
             <a:r>
@@ -5096,7 +4579,7 @@
           <a:bodyPr wrap="square" rtlCol="0" anchor="ctr"/>
           <a:lstStyle/>
           <a:p>
-            <a:pPr algn="l" indent="0" marL="0">
+            <a:pPr marL="0" indent="0" algn="l">
               <a:buNone/>
             </a:pPr>
             <a:r>
@@ -5135,7 +4618,7 @@
           <a:bodyPr wrap="square" rtlCol="0" anchor="ctr"/>
           <a:lstStyle/>
           <a:p>
-            <a:pPr algn="l" indent="0" marL="0">
+            <a:pPr marL="0" indent="0" algn="l">
               <a:buNone/>
             </a:pPr>
             <a:r>
@@ -5152,7 +4635,7 @@
             <a:endParaRPr lang="en-US" sz="1400" dirty="0"/>
           </a:p>
           <a:p>
-            <a:pPr algn="l" indent="0" marL="0">
+            <a:pPr marL="0" indent="0" algn="l">
               <a:buNone/>
             </a:pPr>
             <a:r>
@@ -5216,7 +4699,7 @@
           <a:bodyPr wrap="square" rtlCol="0" anchor="ctr"/>
           <a:lstStyle/>
           <a:p>
-            <a:pPr algn="l" indent="0" marL="0">
+            <a:pPr marL="0" indent="0" algn="l">
               <a:buNone/>
             </a:pPr>
             <a:r>
@@ -5228,7 +4711,7 @@
                 <a:ea typeface="Calibri" pitchFamily="34" charset="-122"/>
                 <a:cs typeface="Calibri" pitchFamily="34" charset="-120"/>
               </a:rPr>
-              <a:t>[Your Name]  ·  BikeShare Co.  ·  Capstone Project Module 3</a:t>
+              <a:t>Fahrizal Safalah ·  BikeShare Co.  ·  Capstone Project Module 3</a:t>
             </a:r>
             <a:endParaRPr lang="en-US" sz="1100" dirty="0"/>
           </a:p>
@@ -5280,11 +4763,11 @@
           <a:bodyPr wrap="square" rtlCol="0" anchor="ctr"/>
           <a:lstStyle/>
           <a:p>
-            <a:pPr algn="ctr" indent="0" marL="0">
-              <a:buNone/>
-            </a:pPr>
-            <a:r>
-              <a:rPr lang="en-US" sz="750" b="1" spc="200" kern="0" dirty="0">
+            <a:pPr marL="0" indent="0" algn="ctr">
+              <a:buNone/>
+            </a:pPr>
+            <a:r>
+              <a:rPr lang="en-US" sz="750" b="1" kern="0" spc="200" dirty="0">
                 <a:solidFill>
                   <a:srgbClr val="7B8DB0"/>
                 </a:solidFill>
@@ -5314,6 +4797,7 @@
         <a:solidFill>
           <a:srgbClr val="0A0F1E"/>
         </a:solidFill>
+        <a:effectLst/>
       </p:bgPr>
     </p:bg>
     <p:spTree>
@@ -5376,11 +4860,11 @@
           <a:bodyPr wrap="square" rtlCol="0" anchor="ctr"/>
           <a:lstStyle/>
           <a:p>
-            <a:pPr algn="l" indent="0" marL="0">
-              <a:buNone/>
-            </a:pPr>
-            <a:r>
-              <a:rPr lang="en-US" sz="800" b="1" spc="300" kern="0" dirty="0">
+            <a:pPr marL="0" indent="0" algn="l">
+              <a:buNone/>
+            </a:pPr>
+            <a:r>
+              <a:rPr lang="en-US" sz="800" b="1" kern="0" spc="300" dirty="0">
                 <a:solidFill>
                   <a:srgbClr val="00D4FF"/>
                 </a:solidFill>
@@ -5415,7 +4899,7 @@
           <a:bodyPr wrap="square" rtlCol="0" anchor="ctr"/>
           <a:lstStyle/>
           <a:p>
-            <a:pPr algn="l" indent="0" marL="0">
+            <a:pPr marL="0" indent="0" algn="l">
               <a:buNone/>
             </a:pPr>
             <a:r>
@@ -5554,11 +5038,11 @@
           <a:bodyPr wrap="square" rtlCol="0" anchor="ctr"/>
           <a:lstStyle/>
           <a:p>
-            <a:pPr indent="0" marL="0">
-              <a:buNone/>
-            </a:pPr>
-            <a:r>
-              <a:rPr lang="en-US" sz="800" b="1" spc="200" kern="0" dirty="0">
+            <a:pPr marL="0" indent="0">
+              <a:buNone/>
+            </a:pPr>
+            <a:r>
+              <a:rPr lang="en-US" sz="800" b="1" kern="0" spc="200" dirty="0">
                 <a:solidFill>
                   <a:srgbClr val="00D4FF"/>
                 </a:solidFill>
@@ -5593,7 +5077,7 @@
           <a:bodyPr wrap="square" rtlCol="0" anchor="ctr"/>
           <a:lstStyle/>
           <a:p>
-            <a:pPr algn="ctr" indent="0" marL="0">
+            <a:pPr marL="0" indent="0" algn="ctr">
               <a:buNone/>
             </a:pPr>
             <a:r>
@@ -5632,7 +5116,7 @@
           <a:bodyPr wrap="square" rtlCol="0" anchor="ctr"/>
           <a:lstStyle/>
           <a:p>
-            <a:pPr indent="0" marL="0">
+            <a:pPr marL="0" indent="0">
               <a:buNone/>
             </a:pPr>
             <a:r>
@@ -5671,7 +5155,7 @@
           <a:bodyPr wrap="square" rtlCol="0" anchor="ctr"/>
           <a:lstStyle/>
           <a:p>
-            <a:pPr algn="ctr" indent="0" marL="0">
+            <a:pPr marL="0" indent="0" algn="ctr">
               <a:buNone/>
             </a:pPr>
             <a:r>
@@ -5710,7 +5194,7 @@
           <a:bodyPr wrap="square" rtlCol="0" anchor="ctr"/>
           <a:lstStyle/>
           <a:p>
-            <a:pPr indent="0" marL="0">
+            <a:pPr marL="0" indent="0">
               <a:buNone/>
             </a:pPr>
             <a:r>
@@ -5749,7 +5233,7 @@
           <a:bodyPr wrap="square" rtlCol="0" anchor="ctr"/>
           <a:lstStyle/>
           <a:p>
-            <a:pPr algn="ctr" indent="0" marL="0">
+            <a:pPr marL="0" indent="0" algn="ctr">
               <a:buNone/>
             </a:pPr>
             <a:r>
@@ -5788,7 +5272,7 @@
           <a:bodyPr wrap="square" rtlCol="0" anchor="ctr"/>
           <a:lstStyle/>
           <a:p>
-            <a:pPr indent="0" marL="0">
+            <a:pPr marL="0" indent="0">
               <a:buNone/>
             </a:pPr>
             <a:r>
@@ -5827,7 +5311,7 @@
           <a:bodyPr wrap="square" rtlCol="0" anchor="ctr"/>
           <a:lstStyle/>
           <a:p>
-            <a:pPr algn="ctr" indent="0" marL="0">
+            <a:pPr marL="0" indent="0" algn="ctr">
               <a:buNone/>
             </a:pPr>
             <a:r>
@@ -5866,7 +5350,7 @@
           <a:bodyPr wrap="square" rtlCol="0" anchor="ctr"/>
           <a:lstStyle/>
           <a:p>
-            <a:pPr indent="0" marL="0">
+            <a:pPr marL="0" indent="0">
               <a:buNone/>
             </a:pPr>
             <a:r>
@@ -5905,7 +5389,7 @@
           <a:bodyPr wrap="square" rtlCol="0" anchor="ctr"/>
           <a:lstStyle/>
           <a:p>
-            <a:pPr algn="ctr" indent="0" marL="0">
+            <a:pPr marL="0" indent="0" algn="ctr">
               <a:buNone/>
             </a:pPr>
             <a:r>
@@ -5944,7 +5428,7 @@
           <a:bodyPr wrap="square" rtlCol="0" anchor="ctr"/>
           <a:lstStyle/>
           <a:p>
-            <a:pPr indent="0" marL="0">
+            <a:pPr marL="0" indent="0">
               <a:buNone/>
             </a:pPr>
             <a:r>
@@ -5983,11 +5467,11 @@
           <a:bodyPr wrap="square" rtlCol="0" anchor="ctr"/>
           <a:lstStyle/>
           <a:p>
-            <a:pPr indent="0" marL="0">
-              <a:buNone/>
-            </a:pPr>
-            <a:r>
-              <a:rPr lang="en-US" sz="800" b="1" spc="100" kern="0" dirty="0">
+            <a:pPr marL="0" indent="0">
+              <a:buNone/>
+            </a:pPr>
+            <a:r>
+              <a:rPr lang="en-US" sz="800" b="1" kern="0" spc="100" dirty="0">
                 <a:solidFill>
                   <a:srgbClr val="FF6B35"/>
                 </a:solidFill>
@@ -6003,7 +5487,7 @@
       </p:sp>
       <p:graphicFrame>
         <p:nvGraphicFramePr>
-          <p:cNvPr id="11" name="Table 0"/>
+          <p:cNvPr id="21" name="Table 0"/>
           <p:cNvGraphicFramePr>
             <a:graphicFrameLocks noGrp="1"/>
           </p:cNvGraphicFramePr>
@@ -6024,9 +5508,27 @@
             <a:tbl>
               <a:tblPr/>
               <a:tblGrid>
-                <a:gridCol w="1737360"/>
-                <a:gridCol w="1143000"/>
-                <a:gridCol w="1143000"/>
+                <a:gridCol w="1737360">
+                  <a:extLst>
+                    <a:ext uri="{9D8B030D-6E8A-4147-A177-3AD203B41FA5}">
+                      <a16:colId xmlns:a16="http://schemas.microsoft.com/office/drawing/2014/main" val="20000"/>
+                    </a:ext>
+                  </a:extLst>
+                </a:gridCol>
+                <a:gridCol w="1143000">
+                  <a:extLst>
+                    <a:ext uri="{9D8B030D-6E8A-4147-A177-3AD203B41FA5}">
+                      <a16:colId xmlns:a16="http://schemas.microsoft.com/office/drawing/2014/main" val="20001"/>
+                    </a:ext>
+                  </a:extLst>
+                </a:gridCol>
+                <a:gridCol w="1143000">
+                  <a:extLst>
+                    <a:ext uri="{9D8B030D-6E8A-4147-A177-3AD203B41FA5}">
+                      <a16:colId xmlns:a16="http://schemas.microsoft.com/office/drawing/2014/main" val="20002"/>
+                    </a:ext>
+                  </a:extLst>
+                </a:gridCol>
               </a:tblGrid>
               <a:tr h="274320">
                 <a:tc>
@@ -6034,7 +5536,7 @@
                     <a:bodyPr/>
                     <a:lstStyle/>
                     <a:p>
-                      <a:pPr indent="0" marL="0">
+                      <a:pPr marL="0" indent="0">
                         <a:buNone/>
                       </a:pPr>
                       <a:r>
@@ -6078,7 +5580,7 @@
                     <a:bodyPr/>
                     <a:lstStyle/>
                     <a:p>
-                      <a:pPr algn="ctr" indent="0" marL="0">
+                      <a:pPr marL="0" indent="0" algn="ctr">
                         <a:buNone/>
                       </a:pPr>
                       <a:r>
@@ -6122,7 +5624,7 @@
                     <a:bodyPr/>
                     <a:lstStyle/>
                     <a:p>
-                      <a:pPr algn="ctr" indent="0" marL="0">
+                      <a:pPr marL="0" indent="0" algn="ctr">
                         <a:buNone/>
                       </a:pPr>
                       <a:r>
@@ -6161,6 +5663,11 @@
                     </a:solidFill>
                   </a:tcPr>
                 </a:tc>
+                <a:extLst>
+                  <a:ext uri="{0D108BD9-81ED-4DB2-BD59-A6C34878D82A}">
+                    <a16:rowId xmlns:a16="http://schemas.microsoft.com/office/drawing/2014/main" val="10000"/>
+                  </a:ext>
+                </a:extLst>
               </a:tr>
               <a:tr h="274320">
                 <a:tc>
@@ -6168,7 +5675,7 @@
                     <a:bodyPr/>
                     <a:lstStyle/>
                     <a:p>
-                      <a:pPr indent="0" marL="0">
+                      <a:pPr marL="0" indent="0">
                         <a:buNone/>
                       </a:pPr>
                       <a:r>
@@ -6212,7 +5719,7 @@
                     <a:bodyPr/>
                     <a:lstStyle/>
                     <a:p>
-                      <a:pPr algn="ctr" indent="0" marL="0">
+                      <a:pPr marL="0" indent="0" algn="ctr">
                         <a:buNone/>
                       </a:pPr>
                       <a:r>
@@ -6256,7 +5763,7 @@
                     <a:bodyPr/>
                     <a:lstStyle/>
                     <a:p>
-                      <a:pPr algn="ctr" indent="0" marL="0">
+                      <a:pPr marL="0" indent="0" algn="ctr">
                         <a:buNone/>
                       </a:pPr>
                       <a:r>
@@ -6295,6 +5802,11 @@
                     </a:solidFill>
                   </a:tcPr>
                 </a:tc>
+                <a:extLst>
+                  <a:ext uri="{0D108BD9-81ED-4DB2-BD59-A6C34878D82A}">
+                    <a16:rowId xmlns:a16="http://schemas.microsoft.com/office/drawing/2014/main" val="10001"/>
+                  </a:ext>
+                </a:extLst>
               </a:tr>
               <a:tr h="274320">
                 <a:tc>
@@ -6302,7 +5814,7 @@
                     <a:bodyPr/>
                     <a:lstStyle/>
                     <a:p>
-                      <a:pPr indent="0" marL="0">
+                      <a:pPr marL="0" indent="0">
                         <a:buNone/>
                       </a:pPr>
                       <a:r>
@@ -6346,7 +5858,7 @@
                     <a:bodyPr/>
                     <a:lstStyle/>
                     <a:p>
-                      <a:pPr algn="ctr" indent="0" marL="0">
+                      <a:pPr marL="0" indent="0" algn="ctr">
                         <a:buNone/>
                       </a:pPr>
                       <a:r>
@@ -6390,7 +5902,7 @@
                     <a:bodyPr/>
                     <a:lstStyle/>
                     <a:p>
-                      <a:pPr algn="ctr" indent="0" marL="0">
+                      <a:pPr marL="0" indent="0" algn="ctr">
                         <a:buNone/>
                       </a:pPr>
                       <a:r>
@@ -6429,6 +5941,11 @@
                     </a:solidFill>
                   </a:tcPr>
                 </a:tc>
+                <a:extLst>
+                  <a:ext uri="{0D108BD9-81ED-4DB2-BD59-A6C34878D82A}">
+                    <a16:rowId xmlns:a16="http://schemas.microsoft.com/office/drawing/2014/main" val="10002"/>
+                  </a:ext>
+                </a:extLst>
               </a:tr>
               <a:tr h="274320">
                 <a:tc>
@@ -6436,7 +5953,7 @@
                     <a:bodyPr/>
                     <a:lstStyle/>
                     <a:p>
-                      <a:pPr indent="0" marL="0">
+                      <a:pPr marL="0" indent="0">
                         <a:buNone/>
                       </a:pPr>
                       <a:r>
@@ -6480,7 +5997,7 @@
                     <a:bodyPr/>
                     <a:lstStyle/>
                     <a:p>
-                      <a:pPr algn="ctr" indent="0" marL="0">
+                      <a:pPr marL="0" indent="0" algn="ctr">
                         <a:buNone/>
                       </a:pPr>
                       <a:r>
@@ -6524,7 +6041,7 @@
                     <a:bodyPr/>
                     <a:lstStyle/>
                     <a:p>
-                      <a:pPr algn="ctr" indent="0" marL="0">
+                      <a:pPr marL="0" indent="0" algn="ctr">
                         <a:buNone/>
                       </a:pPr>
                       <a:r>
@@ -6563,6 +6080,11 @@
                     </a:solidFill>
                   </a:tcPr>
                 </a:tc>
+                <a:extLst>
+                  <a:ext uri="{0D108BD9-81ED-4DB2-BD59-A6C34878D82A}">
+                    <a16:rowId xmlns:a16="http://schemas.microsoft.com/office/drawing/2014/main" val="10003"/>
+                  </a:ext>
+                </a:extLst>
               </a:tr>
               <a:tr h="274320">
                 <a:tc>
@@ -6570,7 +6092,7 @@
                     <a:bodyPr/>
                     <a:lstStyle/>
                     <a:p>
-                      <a:pPr indent="0" marL="0">
+                      <a:pPr marL="0" indent="0">
                         <a:buNone/>
                       </a:pPr>
                       <a:r>
@@ -6614,7 +6136,7 @@
                     <a:bodyPr/>
                     <a:lstStyle/>
                     <a:p>
-                      <a:pPr algn="ctr" indent="0" marL="0">
+                      <a:pPr marL="0" indent="0" algn="ctr">
                         <a:buNone/>
                       </a:pPr>
                       <a:r>
@@ -6658,7 +6180,7 @@
                     <a:bodyPr/>
                     <a:lstStyle/>
                     <a:p>
-                      <a:pPr algn="ctr" indent="0" marL="0">
+                      <a:pPr marL="0" indent="0" algn="ctr">
                         <a:buNone/>
                       </a:pPr>
                       <a:r>
@@ -6697,6 +6219,11 @@
                     </a:solidFill>
                   </a:tcPr>
                 </a:tc>
+                <a:extLst>
+                  <a:ext uri="{0D108BD9-81ED-4DB2-BD59-A6C34878D82A}">
+                    <a16:rowId xmlns:a16="http://schemas.microsoft.com/office/drawing/2014/main" val="10004"/>
+                  </a:ext>
+                </a:extLst>
               </a:tr>
             </a:tbl>
           </a:graphicData>
@@ -6723,11 +6250,11 @@
           <a:bodyPr wrap="square" rtlCol="0" anchor="ctr"/>
           <a:lstStyle/>
           <a:p>
-            <a:pPr indent="0" marL="0">
-              <a:buNone/>
-            </a:pPr>
-            <a:r>
-              <a:rPr lang="en-US" sz="800" b="1" spc="100" kern="0" dirty="0">
+            <a:pPr marL="0" indent="0">
+              <a:buNone/>
+            </a:pPr>
+            <a:r>
+              <a:rPr lang="en-US" sz="800" b="1" kern="0" spc="100" dirty="0">
                 <a:solidFill>
                   <a:srgbClr val="00E5A0"/>
                 </a:solidFill>
@@ -6787,7 +6314,7 @@
           <a:bodyPr wrap="square" rtlCol="0" anchor="ctr"/>
           <a:lstStyle/>
           <a:p>
-            <a:pPr algn="ctr" indent="0" marL="0">
+            <a:pPr marL="0" indent="0" algn="ctr">
               <a:buNone/>
             </a:pPr>
             <a:r>
@@ -6826,7 +6353,7 @@
           <a:bodyPr wrap="square" rtlCol="0" anchor="ctr"/>
           <a:lstStyle/>
           <a:p>
-            <a:pPr algn="ctr" indent="0" marL="0">
+            <a:pPr marL="0" indent="0" algn="ctr">
               <a:buNone/>
             </a:pPr>
             <a:r>
@@ -6890,7 +6417,7 @@
           <a:bodyPr wrap="square" rtlCol="0" anchor="ctr"/>
           <a:lstStyle/>
           <a:p>
-            <a:pPr algn="ctr" indent="0" marL="0">
+            <a:pPr marL="0" indent="0" algn="ctr">
               <a:buNone/>
             </a:pPr>
             <a:r>
@@ -6929,7 +6456,7 @@
           <a:bodyPr wrap="square" rtlCol="0" anchor="ctr"/>
           <a:lstStyle/>
           <a:p>
-            <a:pPr algn="ctr" indent="0" marL="0">
+            <a:pPr marL="0" indent="0" algn="ctr">
               <a:buNone/>
             </a:pPr>
             <a:r>
@@ -6993,7 +6520,7 @@
           <a:bodyPr wrap="square" rtlCol="0" anchor="ctr"/>
           <a:lstStyle/>
           <a:p>
-            <a:pPr algn="ctr" indent="0" marL="0">
+            <a:pPr marL="0" indent="0" algn="ctr">
               <a:buNone/>
             </a:pPr>
             <a:r>
@@ -7032,7 +6559,7 @@
           <a:bodyPr wrap="square" rtlCol="0" anchor="ctr"/>
           <a:lstStyle/>
           <a:p>
-            <a:pPr algn="ctr" indent="0" marL="0">
+            <a:pPr marL="0" indent="0" algn="ctr">
               <a:buNone/>
             </a:pPr>
             <a:r>
@@ -7096,7 +6623,7 @@
           <a:bodyPr wrap="square" rtlCol="0" anchor="ctr"/>
           <a:lstStyle/>
           <a:p>
-            <a:pPr algn="ctr" indent="0" marL="0">
+            <a:pPr marL="0" indent="0" algn="ctr">
               <a:buNone/>
             </a:pPr>
             <a:r>
@@ -7135,7 +6662,7 @@
           <a:bodyPr wrap="square" rtlCol="0" anchor="ctr"/>
           <a:lstStyle/>
           <a:p>
-            <a:pPr algn="ctr" indent="0" marL="0">
+            <a:pPr marL="0" indent="0" algn="ctr">
               <a:buNone/>
             </a:pPr>
             <a:r>
@@ -7224,11 +6751,11 @@
           <a:bodyPr wrap="square" rtlCol="0" anchor="ctr"/>
           <a:lstStyle/>
           <a:p>
-            <a:pPr indent="0" marL="0">
-              <a:buNone/>
-            </a:pPr>
-            <a:r>
-              <a:rPr lang="en-US" sz="800" b="1" spc="200" kern="0" dirty="0">
+            <a:pPr marL="0" indent="0">
+              <a:buNone/>
+            </a:pPr>
+            <a:r>
+              <a:rPr lang="en-US" sz="800" b="1" kern="0" spc="200" dirty="0">
                 <a:solidFill>
                   <a:srgbClr val="F59E0B"/>
                 </a:solidFill>
@@ -7263,7 +6790,7 @@
           <a:bodyPr wrap="square" rtlCol="0" anchor="ctr"/>
           <a:lstStyle/>
           <a:p>
-            <a:pPr indent="0" marL="0">
+            <a:pPr marL="0" indent="0">
               <a:buNone/>
             </a:pPr>
             <a:r>
@@ -7297,6 +6824,7 @@
         <a:solidFill>
           <a:srgbClr val="0A0F1E"/>
         </a:solidFill>
+        <a:effectLst/>
       </p:bgPr>
     </p:bg>
     <p:spTree>
@@ -7359,11 +6887,11 @@
           <a:bodyPr wrap="square" rtlCol="0" anchor="ctr"/>
           <a:lstStyle/>
           <a:p>
-            <a:pPr algn="l" indent="0" marL="0">
-              <a:buNone/>
-            </a:pPr>
-            <a:r>
-              <a:rPr lang="en-US" sz="800" b="1" spc="300" kern="0" dirty="0">
+            <a:pPr marL="0" indent="0" algn="l">
+              <a:buNone/>
+            </a:pPr>
+            <a:r>
+              <a:rPr lang="en-US" sz="800" b="1" kern="0" spc="300" dirty="0">
                 <a:solidFill>
                   <a:srgbClr val="00D4FF"/>
                 </a:solidFill>
@@ -7398,7 +6926,7 @@
           <a:bodyPr wrap="square" rtlCol="0" anchor="ctr"/>
           <a:lstStyle/>
           <a:p>
-            <a:pPr algn="l" indent="0" marL="0">
+            <a:pPr marL="0" indent="0" algn="l">
               <a:buNone/>
             </a:pPr>
             <a:r>
@@ -7443,7 +6971,7 @@
       </p:sp>
       <p:graphicFrame>
         <p:nvGraphicFramePr>
-          <p:cNvPr id="6" name="Chart 0" descr=""/>
+          <p:cNvPr id="6" name="Chart 0"/>
           <p:cNvGraphicFramePr/>
           <p:nvPr/>
         </p:nvGraphicFramePr>
@@ -7451,15 +6979,15 @@
           <a:off x="411480" y="1051560"/>
           <a:ext cx="4023360" cy="2834640"/>
         </p:xfrm>
-        <a:graphic xmlns:a="http://schemas.openxmlformats.org/drawingml/2006/main">
+        <a:graphic>
           <a:graphicData uri="http://schemas.openxmlformats.org/drawingml/2006/chart">
-            <c:chart xmlns:c="http://schemas.openxmlformats.org/drawingml/2006/chart" r:id="rId1"/>
+            <c:chart xmlns:c="http://schemas.openxmlformats.org/drawingml/2006/chart" xmlns:r="http://schemas.openxmlformats.org/officeDocument/2006/relationships" r:id="rId3"/>
           </a:graphicData>
         </a:graphic>
       </p:graphicFrame>
       <p:graphicFrame>
         <p:nvGraphicFramePr>
-          <p:cNvPr id="7" name="Chart 1" descr=""/>
+          <p:cNvPr id="7" name="Chart 1"/>
           <p:cNvGraphicFramePr/>
           <p:nvPr/>
         </p:nvGraphicFramePr>
@@ -7467,9 +6995,9 @@
           <a:off x="4617720" y="1051560"/>
           <a:ext cx="4114800" cy="2834640"/>
         </p:xfrm>
-        <a:graphic xmlns:a="http://schemas.openxmlformats.org/drawingml/2006/main">
+        <a:graphic>
           <a:graphicData uri="http://schemas.openxmlformats.org/drawingml/2006/chart">
-            <c:chart xmlns:c="http://schemas.openxmlformats.org/drawingml/2006/chart" r:id="rId2"/>
+            <c:chart xmlns:c="http://schemas.openxmlformats.org/drawingml/2006/chart" xmlns:r="http://schemas.openxmlformats.org/officeDocument/2006/relationships" r:id="rId4"/>
           </a:graphicData>
         </a:graphic>
       </p:graphicFrame>
@@ -7519,7 +7047,7 @@
           <a:bodyPr wrap="square" rtlCol="0" anchor="ctr"/>
           <a:lstStyle/>
           <a:p>
-            <a:pPr indent="0" marL="0">
+            <a:pPr marL="0" indent="0">
               <a:buNone/>
             </a:pPr>
             <a:r>
@@ -7558,7 +7086,7 @@
           <a:bodyPr wrap="square" rtlCol="0" anchor="ctr"/>
           <a:lstStyle/>
           <a:p>
-            <a:pPr indent="0" marL="0">
+            <a:pPr marL="0" indent="0">
               <a:buNone/>
             </a:pPr>
             <a:r>
@@ -7622,7 +7150,7 @@
           <a:bodyPr wrap="square" rtlCol="0" anchor="ctr"/>
           <a:lstStyle/>
           <a:p>
-            <a:pPr indent="0" marL="0">
+            <a:pPr marL="0" indent="0">
               <a:buNone/>
             </a:pPr>
             <a:r>
@@ -7661,7 +7189,7 @@
           <a:bodyPr wrap="square" rtlCol="0" anchor="ctr"/>
           <a:lstStyle/>
           <a:p>
-            <a:pPr indent="0" marL="0">
+            <a:pPr marL="0" indent="0">
               <a:buNone/>
             </a:pPr>
             <a:r>
@@ -7725,7 +7253,7 @@
           <a:bodyPr wrap="square" rtlCol="0" anchor="ctr"/>
           <a:lstStyle/>
           <a:p>
-            <a:pPr indent="0" marL="0">
+            <a:pPr marL="0" indent="0">
               <a:buNone/>
             </a:pPr>
             <a:r>
@@ -7764,7 +7292,7 @@
           <a:bodyPr wrap="square" rtlCol="0" anchor="ctr"/>
           <a:lstStyle/>
           <a:p>
-            <a:pPr indent="0" marL="0">
+            <a:pPr marL="0" indent="0">
               <a:buNone/>
             </a:pPr>
             <a:r>
@@ -7798,6 +7326,7 @@
         <a:solidFill>
           <a:srgbClr val="0A0F1E"/>
         </a:solidFill>
+        <a:effectLst/>
       </p:bgPr>
     </p:bg>
     <p:spTree>
@@ -7860,11 +7389,11 @@
           <a:bodyPr wrap="square" rtlCol="0" anchor="ctr"/>
           <a:lstStyle/>
           <a:p>
-            <a:pPr algn="l" indent="0" marL="0">
-              <a:buNone/>
-            </a:pPr>
-            <a:r>
-              <a:rPr lang="en-US" sz="800" b="1" spc="300" kern="0" dirty="0">
+            <a:pPr marL="0" indent="0" algn="l">
+              <a:buNone/>
+            </a:pPr>
+            <a:r>
+              <a:rPr lang="en-US" sz="800" b="1" kern="0" spc="300" dirty="0">
                 <a:solidFill>
                   <a:srgbClr val="00D4FF"/>
                 </a:solidFill>
@@ -7899,7 +7428,7 @@
           <a:bodyPr wrap="square" rtlCol="0" anchor="ctr"/>
           <a:lstStyle/>
           <a:p>
-            <a:pPr algn="l" indent="0" marL="0">
+            <a:pPr marL="0" indent="0" algn="l">
               <a:buNone/>
             </a:pPr>
             <a:r>
@@ -8013,7 +7542,7 @@
           <a:bodyPr wrap="square" rtlCol="0" anchor="ctr"/>
           <a:lstStyle/>
           <a:p>
-            <a:pPr algn="ctr" indent="0" marL="0">
+            <a:pPr marL="0" indent="0" algn="ctr">
               <a:buNone/>
             </a:pPr>
             <a:r>
@@ -8052,7 +7581,7 @@
           <a:bodyPr wrap="square" rtlCol="0" anchor="ctr"/>
           <a:lstStyle/>
           <a:p>
-            <a:pPr algn="ctr" indent="0" marL="0">
+            <a:pPr marL="0" indent="0" algn="ctr">
               <a:buNone/>
             </a:pPr>
             <a:r>
@@ -8091,7 +7620,7 @@
           <a:bodyPr wrap="square" rtlCol="0" anchor="ctr"/>
           <a:lstStyle/>
           <a:p>
-            <a:pPr indent="0" marL="0">
+            <a:pPr marL="0" indent="0">
               <a:buNone/>
             </a:pPr>
             <a:r>
@@ -8130,7 +7659,7 @@
           <a:bodyPr wrap="square" rtlCol="0" anchor="ctr"/>
           <a:lstStyle/>
           <a:p>
-            <a:pPr indent="0" marL="0">
+            <a:pPr marL="0" indent="0">
               <a:buNone/>
             </a:pPr>
             <a:r>
@@ -8169,7 +7698,7 @@
           <a:bodyPr wrap="square" rtlCol="0" anchor="ctr"/>
           <a:lstStyle/>
           <a:p>
-            <a:pPr indent="0" marL="0">
+            <a:pPr marL="0" indent="0">
               <a:buNone/>
             </a:pPr>
             <a:r>
@@ -8208,7 +7737,7 @@
           <a:bodyPr wrap="square" rtlCol="0" anchor="ctr"/>
           <a:lstStyle/>
           <a:p>
-            <a:pPr indent="0" marL="0">
+            <a:pPr marL="0" indent="0">
               <a:buNone/>
             </a:pPr>
             <a:r>
@@ -8297,7 +7826,7 @@
           <a:bodyPr wrap="square" rtlCol="0" anchor="ctr"/>
           <a:lstStyle/>
           <a:p>
-            <a:pPr algn="ctr" indent="0" marL="0">
+            <a:pPr marL="0" indent="0" algn="ctr">
               <a:buNone/>
             </a:pPr>
             <a:r>
@@ -8336,7 +7865,7 @@
           <a:bodyPr wrap="square" rtlCol="0" anchor="ctr"/>
           <a:lstStyle/>
           <a:p>
-            <a:pPr algn="ctr" indent="0" marL="0">
+            <a:pPr marL="0" indent="0" algn="ctr">
               <a:buNone/>
             </a:pPr>
             <a:r>
@@ -8375,7 +7904,7 @@
           <a:bodyPr wrap="square" rtlCol="0" anchor="ctr"/>
           <a:lstStyle/>
           <a:p>
-            <a:pPr indent="0" marL="0">
+            <a:pPr marL="0" indent="0">
               <a:buNone/>
             </a:pPr>
             <a:r>
@@ -8414,7 +7943,7 @@
           <a:bodyPr wrap="square" rtlCol="0" anchor="ctr"/>
           <a:lstStyle/>
           <a:p>
-            <a:pPr indent="0" marL="0">
+            <a:pPr marL="0" indent="0">
               <a:buNone/>
             </a:pPr>
             <a:r>
@@ -8453,7 +7982,7 @@
           <a:bodyPr wrap="square" rtlCol="0" anchor="ctr"/>
           <a:lstStyle/>
           <a:p>
-            <a:pPr indent="0" marL="0">
+            <a:pPr marL="0" indent="0">
               <a:buNone/>
             </a:pPr>
             <a:r>
@@ -8492,7 +8021,7 @@
           <a:bodyPr wrap="square" rtlCol="0" anchor="ctr"/>
           <a:lstStyle/>
           <a:p>
-            <a:pPr indent="0" marL="0">
+            <a:pPr marL="0" indent="0">
               <a:buNone/>
             </a:pPr>
             <a:r>
@@ -8556,7 +8085,7 @@
           <a:bodyPr wrap="square" rtlCol="0" anchor="ctr"/>
           <a:lstStyle/>
           <a:p>
-            <a:pPr algn="ctr" indent="0" marL="0">
+            <a:pPr marL="0" indent="0" algn="ctr">
               <a:buNone/>
             </a:pPr>
             <a:r>
@@ -8645,11 +8174,11 @@
           <a:bodyPr wrap="square" rtlCol="0" anchor="ctr"/>
           <a:lstStyle/>
           <a:p>
-            <a:pPr indent="0" marL="0">
-              <a:buNone/>
-            </a:pPr>
-            <a:r>
-              <a:rPr lang="en-US" sz="800" b="1" spc="200" kern="0" dirty="0">
+            <a:pPr marL="0" indent="0">
+              <a:buNone/>
+            </a:pPr>
+            <a:r>
+              <a:rPr lang="en-US" sz="800" b="1" kern="0" spc="200" dirty="0">
                 <a:solidFill>
                   <a:srgbClr val="00E5A0"/>
                 </a:solidFill>
@@ -8684,7 +8213,7 @@
           <a:bodyPr wrap="square" rtlCol="0" anchor="ctr"/>
           <a:lstStyle/>
           <a:p>
-            <a:pPr indent="0" marL="0">
+            <a:pPr marL="0" indent="0">
               <a:buNone/>
             </a:pPr>
             <a:r>
@@ -8701,7 +8230,7 @@
             <a:endParaRPr lang="en-US" sz="1050" dirty="0"/>
           </a:p>
           <a:p>
-            <a:pPr indent="0" marL="0">
+            <a:pPr marL="0" indent="0">
               <a:buNone/>
             </a:pPr>
             <a:r>
@@ -8718,7 +8247,7 @@
             <a:endParaRPr lang="en-US" sz="1050" dirty="0"/>
           </a:p>
           <a:p>
-            <a:pPr indent="0" marL="0">
+            <a:pPr marL="0" indent="0">
               <a:buNone/>
             </a:pPr>
             <a:r>
@@ -8752,6 +8281,7 @@
         <a:solidFill>
           <a:srgbClr val="0A0F1E"/>
         </a:solidFill>
+        <a:effectLst/>
       </p:bgPr>
     </p:bg>
     <p:spTree>
@@ -8814,11 +8344,11 @@
           <a:bodyPr wrap="square" rtlCol="0" anchor="ctr"/>
           <a:lstStyle/>
           <a:p>
-            <a:pPr algn="l" indent="0" marL="0">
-              <a:buNone/>
-            </a:pPr>
-            <a:r>
-              <a:rPr lang="en-US" sz="800" b="1" spc="300" kern="0" dirty="0">
+            <a:pPr marL="0" indent="0" algn="l">
+              <a:buNone/>
+            </a:pPr>
+            <a:r>
+              <a:rPr lang="en-US" sz="800" b="1" kern="0" spc="300" dirty="0">
                 <a:solidFill>
                   <a:srgbClr val="00D4FF"/>
                 </a:solidFill>
@@ -8853,7 +8383,7 @@
           <a:bodyPr wrap="square" rtlCol="0" anchor="ctr"/>
           <a:lstStyle/>
           <a:p>
-            <a:pPr algn="l" indent="0" marL="0">
+            <a:pPr marL="0" indent="0" algn="l">
               <a:buNone/>
             </a:pPr>
             <a:r>
@@ -8992,7 +8522,7 @@
           <a:bodyPr wrap="square" rtlCol="0" anchor="ctr"/>
           <a:lstStyle/>
           <a:p>
-            <a:pPr algn="ctr" indent="0" marL="0">
+            <a:pPr marL="0" indent="0" algn="ctr">
               <a:buNone/>
             </a:pPr>
             <a:r>
@@ -9031,7 +8561,7 @@
           <a:bodyPr wrap="square" rtlCol="0" anchor="ctr"/>
           <a:lstStyle/>
           <a:p>
-            <a:pPr indent="0" marL="0">
+            <a:pPr marL="0" indent="0">
               <a:buNone/>
             </a:pPr>
             <a:r>
@@ -9070,7 +8600,7 @@
           <a:bodyPr wrap="square" rtlCol="0" anchor="ctr"/>
           <a:lstStyle/>
           <a:p>
-            <a:pPr indent="0" marL="0">
+            <a:pPr marL="0" indent="0">
               <a:buNone/>
             </a:pPr>
             <a:r>
@@ -9184,7 +8714,7 @@
           <a:bodyPr wrap="square" rtlCol="0" anchor="ctr"/>
           <a:lstStyle/>
           <a:p>
-            <a:pPr algn="ctr" indent="0" marL="0">
+            <a:pPr marL="0" indent="0" algn="ctr">
               <a:buNone/>
             </a:pPr>
             <a:r>
@@ -9223,7 +8753,7 @@
           <a:bodyPr wrap="square" rtlCol="0" anchor="ctr"/>
           <a:lstStyle/>
           <a:p>
-            <a:pPr indent="0" marL="0">
+            <a:pPr marL="0" indent="0">
               <a:buNone/>
             </a:pPr>
             <a:r>
@@ -9262,7 +8792,7 @@
           <a:bodyPr wrap="square" rtlCol="0" anchor="ctr"/>
           <a:lstStyle/>
           <a:p>
-            <a:pPr indent="0" marL="0">
+            <a:pPr marL="0" indent="0">
               <a:buNone/>
             </a:pPr>
             <a:r>
@@ -9376,7 +8906,7 @@
           <a:bodyPr wrap="square" rtlCol="0" anchor="ctr"/>
           <a:lstStyle/>
           <a:p>
-            <a:pPr algn="ctr" indent="0" marL="0">
+            <a:pPr marL="0" indent="0" algn="ctr">
               <a:buNone/>
             </a:pPr>
             <a:r>
@@ -9415,7 +8945,7 @@
           <a:bodyPr wrap="square" rtlCol="0" anchor="ctr"/>
           <a:lstStyle/>
           <a:p>
-            <a:pPr indent="0" marL="0">
+            <a:pPr marL="0" indent="0">
               <a:buNone/>
             </a:pPr>
             <a:r>
@@ -9454,7 +8984,7 @@
           <a:bodyPr wrap="square" rtlCol="0" anchor="ctr"/>
           <a:lstStyle/>
           <a:p>
-            <a:pPr indent="0" marL="0">
+            <a:pPr marL="0" indent="0">
               <a:buNone/>
             </a:pPr>
             <a:r>
@@ -9568,7 +9098,7 @@
           <a:bodyPr wrap="square" rtlCol="0" anchor="ctr"/>
           <a:lstStyle/>
           <a:p>
-            <a:pPr algn="ctr" indent="0" marL="0">
+            <a:pPr marL="0" indent="0" algn="ctr">
               <a:buNone/>
             </a:pPr>
             <a:r>
@@ -9607,7 +9137,7 @@
           <a:bodyPr wrap="square" rtlCol="0" anchor="ctr"/>
           <a:lstStyle/>
           <a:p>
-            <a:pPr indent="0" marL="0">
+            <a:pPr marL="0" indent="0">
               <a:buNone/>
             </a:pPr>
             <a:r>
@@ -9646,7 +9176,7 @@
           <a:bodyPr wrap="square" rtlCol="0" anchor="ctr"/>
           <a:lstStyle/>
           <a:p>
-            <a:pPr indent="0" marL="0">
+            <a:pPr marL="0" indent="0">
               <a:buNone/>
             </a:pPr>
             <a:r>
@@ -9680,6 +9210,7 @@
         <a:solidFill>
           <a:srgbClr val="0A0F1E"/>
         </a:solidFill>
+        <a:effectLst/>
       </p:bgPr>
     </p:bg>
     <p:spTree>
@@ -9742,11 +9273,11 @@
           <a:bodyPr wrap="square" rtlCol="0" anchor="ctr"/>
           <a:lstStyle/>
           <a:p>
-            <a:pPr algn="l" indent="0" marL="0">
-              <a:buNone/>
-            </a:pPr>
-            <a:r>
-              <a:rPr lang="en-US" sz="800" b="1" spc="300" kern="0" dirty="0">
+            <a:pPr marL="0" indent="0" algn="l">
+              <a:buNone/>
+            </a:pPr>
+            <a:r>
+              <a:rPr lang="en-US" sz="800" b="1" kern="0" spc="300" dirty="0">
                 <a:solidFill>
                   <a:srgbClr val="00D4FF"/>
                 </a:solidFill>
@@ -9781,7 +9312,7 @@
           <a:bodyPr wrap="square" rtlCol="0" anchor="ctr"/>
           <a:lstStyle/>
           <a:p>
-            <a:pPr algn="l" indent="0" marL="0">
+            <a:pPr marL="0" indent="0" algn="l">
               <a:buNone/>
             </a:pPr>
             <a:r>
@@ -9920,7 +9451,7 @@
           <a:bodyPr wrap="square" rtlCol="0" anchor="ctr"/>
           <a:lstStyle/>
           <a:p>
-            <a:pPr algn="ctr" indent="0" marL="0">
+            <a:pPr marL="0" indent="0" algn="ctr">
               <a:buNone/>
             </a:pPr>
             <a:r>
@@ -9959,7 +9490,7 @@
           <a:bodyPr wrap="square" rtlCol="0" anchor="ctr"/>
           <a:lstStyle/>
           <a:p>
-            <a:pPr indent="0" marL="0">
+            <a:pPr marL="0" indent="0">
               <a:buNone/>
             </a:pPr>
             <a:r>
@@ -9998,7 +9529,7 @@
           <a:bodyPr wrap="square" rtlCol="0" anchor="ctr"/>
           <a:lstStyle/>
           <a:p>
-            <a:pPr indent="0" marL="0">
+            <a:pPr marL="0" indent="0">
               <a:buNone/>
             </a:pPr>
             <a:r>
@@ -10112,7 +9643,7 @@
           <a:bodyPr wrap="square" rtlCol="0" anchor="ctr"/>
           <a:lstStyle/>
           <a:p>
-            <a:pPr algn="ctr" indent="0" marL="0">
+            <a:pPr marL="0" indent="0" algn="ctr">
               <a:buNone/>
             </a:pPr>
             <a:r>
@@ -10151,7 +9682,7 @@
           <a:bodyPr wrap="square" rtlCol="0" anchor="ctr"/>
           <a:lstStyle/>
           <a:p>
-            <a:pPr indent="0" marL="0">
+            <a:pPr marL="0" indent="0">
               <a:buNone/>
             </a:pPr>
             <a:r>
@@ -10190,7 +9721,7 @@
           <a:bodyPr wrap="square" rtlCol="0" anchor="ctr"/>
           <a:lstStyle/>
           <a:p>
-            <a:pPr indent="0" marL="0">
+            <a:pPr marL="0" indent="0">
               <a:buNone/>
             </a:pPr>
             <a:r>
@@ -10304,7 +9835,7 @@
           <a:bodyPr wrap="square" rtlCol="0" anchor="ctr"/>
           <a:lstStyle/>
           <a:p>
-            <a:pPr algn="ctr" indent="0" marL="0">
+            <a:pPr marL="0" indent="0" algn="ctr">
               <a:buNone/>
             </a:pPr>
             <a:r>
@@ -10343,7 +9874,7 @@
           <a:bodyPr wrap="square" rtlCol="0" anchor="ctr"/>
           <a:lstStyle/>
           <a:p>
-            <a:pPr indent="0" marL="0">
+            <a:pPr marL="0" indent="0">
               <a:buNone/>
             </a:pPr>
             <a:r>
@@ -10382,7 +9913,7 @@
           <a:bodyPr wrap="square" rtlCol="0" anchor="ctr"/>
           <a:lstStyle/>
           <a:p>
-            <a:pPr indent="0" marL="0">
+            <a:pPr marL="0" indent="0">
               <a:buNone/>
             </a:pPr>
             <a:r>
@@ -10496,7 +10027,7 @@
           <a:bodyPr wrap="square" rtlCol="0" anchor="ctr"/>
           <a:lstStyle/>
           <a:p>
-            <a:pPr algn="ctr" indent="0" marL="0">
+            <a:pPr marL="0" indent="0" algn="ctr">
               <a:buNone/>
             </a:pPr>
             <a:r>
@@ -10535,7 +10066,7 @@
           <a:bodyPr wrap="square" rtlCol="0" anchor="ctr"/>
           <a:lstStyle/>
           <a:p>
-            <a:pPr indent="0" marL="0">
+            <a:pPr marL="0" indent="0">
               <a:buNone/>
             </a:pPr>
             <a:r>
@@ -10574,7 +10105,7 @@
           <a:bodyPr wrap="square" rtlCol="0" anchor="ctr"/>
           <a:lstStyle/>
           <a:p>
-            <a:pPr indent="0" marL="0">
+            <a:pPr marL="0" indent="0">
               <a:buNone/>
             </a:pPr>
             <a:r>
@@ -10688,7 +10219,7 @@
           <a:bodyPr wrap="square" rtlCol="0" anchor="ctr"/>
           <a:lstStyle/>
           <a:p>
-            <a:pPr algn="ctr" indent="0" marL="0">
+            <a:pPr marL="0" indent="0" algn="ctr">
               <a:buNone/>
             </a:pPr>
             <a:r>
@@ -10727,7 +10258,7 @@
           <a:bodyPr wrap="square" rtlCol="0" anchor="ctr"/>
           <a:lstStyle/>
           <a:p>
-            <a:pPr indent="0" marL="0">
+            <a:pPr marL="0" indent="0">
               <a:buNone/>
             </a:pPr>
             <a:r>
@@ -10766,7 +10297,7 @@
           <a:bodyPr wrap="square" rtlCol="0" anchor="ctr"/>
           <a:lstStyle/>
           <a:p>
-            <a:pPr indent="0" marL="0">
+            <a:pPr marL="0" indent="0">
               <a:buNone/>
             </a:pPr>
             <a:r>
@@ -10800,6 +10331,7 @@
         <a:solidFill>
           <a:srgbClr val="0A0F1E"/>
         </a:solidFill>
+        <a:effectLst/>
       </p:bgPr>
     </p:bg>
     <p:spTree>
@@ -10937,7 +10469,7 @@
           <a:bodyPr wrap="square" rtlCol="0" anchor="ctr"/>
           <a:lstStyle/>
           <a:p>
-            <a:pPr indent="0" marL="0">
+            <a:pPr marL="0" indent="0">
               <a:buNone/>
             </a:pPr>
             <a:r>
@@ -10976,7 +10508,7 @@
           <a:bodyPr wrap="square" rtlCol="0" anchor="ctr"/>
           <a:lstStyle/>
           <a:p>
-            <a:pPr algn="l" indent="0" marL="0">
+            <a:pPr marL="0" indent="0" algn="l">
               <a:buNone/>
             </a:pPr>
             <a:r>
@@ -11037,11 +10569,11 @@
           <a:bodyPr wrap="square" rtlCol="0" anchor="ctr"/>
           <a:lstStyle/>
           <a:p>
-            <a:pPr algn="l" indent="0" marL="0">
-              <a:buNone/>
-            </a:pPr>
-            <a:r>
-              <a:rPr lang="en-US" sz="1100" dirty="0">
+            <a:pPr marL="0" indent="0" algn="l">
+              <a:buNone/>
+            </a:pPr>
+            <a:r>
+              <a:rPr lang="en-US" sz="1100">
                 <a:solidFill>
                   <a:srgbClr val="7B8DB0"/>
                 </a:solidFill>
@@ -11049,7 +10581,18 @@
                 <a:ea typeface="Calibri" pitchFamily="34" charset="-122"/>
                 <a:cs typeface="Calibri" pitchFamily="34" charset="-120"/>
               </a:rPr>
-              <a:t>[Your Name]  ·  BikeShare Co.  ·  Capstone Project Module 3</a:t>
+              <a:t>Fahrizal Safalah ·  </a:t>
+            </a:r>
+            <a:r>
+              <a:rPr lang="en-US" sz="1100" dirty="0">
+                <a:solidFill>
+                  <a:srgbClr val="7B8DB0"/>
+                </a:solidFill>
+                <a:latin typeface="Calibri" pitchFamily="34" charset="0"/>
+                <a:ea typeface="Calibri" pitchFamily="34" charset="-122"/>
+                <a:cs typeface="Calibri" pitchFamily="34" charset="-120"/>
+              </a:rPr>
+              <a:t>BikeShare Co.  ·  Capstone Project Module 3</a:t>
             </a:r>
             <a:endParaRPr lang="en-US" sz="1100" dirty="0"/>
           </a:p>
@@ -11101,7 +10644,7 @@
           <a:bodyPr wrap="square" rtlCol="0" anchor="ctr"/>
           <a:lstStyle/>
           <a:p>
-            <a:pPr algn="ctr" indent="0" marL="0">
+            <a:pPr marL="0" indent="0" algn="ctr">
               <a:buNone/>
             </a:pPr>
             <a:r>
@@ -11140,7 +10683,7 @@
           <a:bodyPr wrap="square" rtlCol="0" anchor="ctr"/>
           <a:lstStyle/>
           <a:p>
-            <a:pPr algn="ctr" indent="0" marL="0">
+            <a:pPr marL="0" indent="0" algn="ctr">
               <a:buNone/>
             </a:pPr>
             <a:r>
@@ -11204,7 +10747,7 @@
           <a:bodyPr wrap="square" rtlCol="0" anchor="ctr"/>
           <a:lstStyle/>
           <a:p>
-            <a:pPr algn="ctr" indent="0" marL="0">
+            <a:pPr marL="0" indent="0" algn="ctr">
               <a:buNone/>
             </a:pPr>
             <a:r>
@@ -11243,7 +10786,7 @@
           <a:bodyPr wrap="square" rtlCol="0" anchor="ctr"/>
           <a:lstStyle/>
           <a:p>
-            <a:pPr algn="ctr" indent="0" marL="0">
+            <a:pPr marL="0" indent="0" algn="ctr">
               <a:buNone/>
             </a:pPr>
             <a:r>
@@ -11307,7 +10850,7 @@
           <a:bodyPr wrap="square" rtlCol="0" anchor="ctr"/>
           <a:lstStyle/>
           <a:p>
-            <a:pPr algn="ctr" indent="0" marL="0">
+            <a:pPr marL="0" indent="0" algn="ctr">
               <a:buNone/>
             </a:pPr>
             <a:r>
@@ -11346,7 +10889,7 @@
           <a:bodyPr wrap="square" rtlCol="0" anchor="ctr"/>
           <a:lstStyle/>
           <a:p>
-            <a:pPr algn="ctr" indent="0" marL="0">
+            <a:pPr marL="0" indent="0" algn="ctr">
               <a:buNone/>
             </a:pPr>
             <a:r>
@@ -11410,11 +10953,11 @@
           <a:bodyPr wrap="square" rtlCol="0" anchor="ctr"/>
           <a:lstStyle/>
           <a:p>
-            <a:pPr algn="ctr" indent="0" marL="0">
-              <a:buNone/>
-            </a:pPr>
-            <a:r>
-              <a:rPr lang="en-US" sz="750" b="1" spc="200" kern="0" dirty="0">
+            <a:pPr marL="0" indent="0" algn="ctr">
+              <a:buNone/>
+            </a:pPr>
+            <a:r>
+              <a:rPr lang="en-US" sz="750" b="1" kern="0" spc="200" dirty="0">
                 <a:solidFill>
                   <a:srgbClr val="7B8DB0"/>
                 </a:solidFill>
@@ -11444,6 +10987,7 @@
         <a:solidFill>
           <a:srgbClr val="0A0F1E"/>
         </a:solidFill>
+        <a:effectLst/>
       </p:bgPr>
     </p:bg>
     <p:spTree>
@@ -11506,11 +11050,11 @@
           <a:bodyPr wrap="square" rtlCol="0" anchor="ctr"/>
           <a:lstStyle/>
           <a:p>
-            <a:pPr algn="l" indent="0" marL="0">
-              <a:buNone/>
-            </a:pPr>
-            <a:r>
-              <a:rPr lang="en-US" sz="800" b="1" spc="300" kern="0" dirty="0">
+            <a:pPr marL="0" indent="0" algn="l">
+              <a:buNone/>
+            </a:pPr>
+            <a:r>
+              <a:rPr lang="en-US" sz="800" b="1" kern="0" spc="300" dirty="0">
                 <a:solidFill>
                   <a:srgbClr val="00D4FF"/>
                 </a:solidFill>
@@ -11545,7 +11089,7 @@
           <a:bodyPr wrap="square" rtlCol="0" anchor="ctr"/>
           <a:lstStyle/>
           <a:p>
-            <a:pPr algn="l" indent="0" marL="0">
+            <a:pPr marL="0" indent="0" algn="l">
               <a:buNone/>
             </a:pPr>
             <a:r>
@@ -11659,7 +11203,7 @@
           <a:bodyPr wrap="square" rtlCol="0" anchor="ctr"/>
           <a:lstStyle/>
           <a:p>
-            <a:pPr algn="ctr" indent="0" marL="0">
+            <a:pPr marL="0" indent="0" algn="ctr">
               <a:buNone/>
             </a:pPr>
             <a:r>
@@ -11698,7 +11242,7 @@
           <a:bodyPr wrap="square" rtlCol="0" anchor="ctr"/>
           <a:lstStyle/>
           <a:p>
-            <a:pPr algn="l" indent="0" marL="0">
+            <a:pPr marL="0" indent="0" algn="l">
               <a:buNone/>
             </a:pPr>
             <a:r>
@@ -11737,7 +11281,7 @@
           <a:bodyPr wrap="square" rtlCol="0" anchor="ctr"/>
           <a:lstStyle/>
           <a:p>
-            <a:pPr algn="l" indent="0" marL="0">
+            <a:pPr marL="0" indent="0" algn="l">
               <a:buNone/>
             </a:pPr>
             <a:r>
@@ -11826,7 +11370,7 @@
           <a:bodyPr wrap="square" rtlCol="0" anchor="ctr"/>
           <a:lstStyle/>
           <a:p>
-            <a:pPr algn="ctr" indent="0" marL="0">
+            <a:pPr marL="0" indent="0" algn="ctr">
               <a:buNone/>
             </a:pPr>
             <a:r>
@@ -11865,7 +11409,7 @@
           <a:bodyPr wrap="square" rtlCol="0" anchor="ctr"/>
           <a:lstStyle/>
           <a:p>
-            <a:pPr algn="l" indent="0" marL="0">
+            <a:pPr marL="0" indent="0" algn="l">
               <a:buNone/>
             </a:pPr>
             <a:r>
@@ -11904,7 +11448,7 @@
           <a:bodyPr wrap="square" rtlCol="0" anchor="ctr"/>
           <a:lstStyle/>
           <a:p>
-            <a:pPr algn="l" indent="0" marL="0">
+            <a:pPr marL="0" indent="0" algn="l">
               <a:buNone/>
             </a:pPr>
             <a:r>
@@ -11993,7 +11537,7 @@
           <a:bodyPr wrap="square" rtlCol="0" anchor="ctr"/>
           <a:lstStyle/>
           <a:p>
-            <a:pPr algn="ctr" indent="0" marL="0">
+            <a:pPr marL="0" indent="0" algn="ctr">
               <a:buNone/>
             </a:pPr>
             <a:r>
@@ -12032,7 +11576,7 @@
           <a:bodyPr wrap="square" rtlCol="0" anchor="ctr"/>
           <a:lstStyle/>
           <a:p>
-            <a:pPr algn="l" indent="0" marL="0">
+            <a:pPr marL="0" indent="0" algn="l">
               <a:buNone/>
             </a:pPr>
             <a:r>
@@ -12071,7 +11615,7 @@
           <a:bodyPr wrap="square" rtlCol="0" anchor="ctr"/>
           <a:lstStyle/>
           <a:p>
-            <a:pPr algn="l" indent="0" marL="0">
+            <a:pPr marL="0" indent="0" algn="l">
               <a:buNone/>
             </a:pPr>
             <a:r>
@@ -12160,7 +11704,7 @@
           <a:bodyPr wrap="square" rtlCol="0" anchor="ctr"/>
           <a:lstStyle/>
           <a:p>
-            <a:pPr algn="ctr" indent="0" marL="0">
+            <a:pPr marL="0" indent="0" algn="ctr">
               <a:buNone/>
             </a:pPr>
             <a:r>
@@ -12199,7 +11743,7 @@
           <a:bodyPr wrap="square" rtlCol="0" anchor="ctr"/>
           <a:lstStyle/>
           <a:p>
-            <a:pPr algn="l" indent="0" marL="0">
+            <a:pPr marL="0" indent="0" algn="l">
               <a:buNone/>
             </a:pPr>
             <a:r>
@@ -12238,7 +11782,7 @@
           <a:bodyPr wrap="square" rtlCol="0" anchor="ctr"/>
           <a:lstStyle/>
           <a:p>
-            <a:pPr algn="l" indent="0" marL="0">
+            <a:pPr marL="0" indent="0" algn="l">
               <a:buNone/>
             </a:pPr>
             <a:r>
@@ -12327,7 +11871,7 @@
           <a:bodyPr wrap="square" rtlCol="0" anchor="ctr"/>
           <a:lstStyle/>
           <a:p>
-            <a:pPr algn="ctr" indent="0" marL="0">
+            <a:pPr marL="0" indent="0" algn="ctr">
               <a:buNone/>
             </a:pPr>
             <a:r>
@@ -12366,7 +11910,7 @@
           <a:bodyPr wrap="square" rtlCol="0" anchor="ctr"/>
           <a:lstStyle/>
           <a:p>
-            <a:pPr algn="l" indent="0" marL="0">
+            <a:pPr marL="0" indent="0" algn="l">
               <a:buNone/>
             </a:pPr>
             <a:r>
@@ -12405,7 +11949,7 @@
           <a:bodyPr wrap="square" rtlCol="0" anchor="ctr"/>
           <a:lstStyle/>
           <a:p>
-            <a:pPr algn="l" indent="0" marL="0">
+            <a:pPr marL="0" indent="0" algn="l">
               <a:buNone/>
             </a:pPr>
             <a:r>
@@ -12494,7 +12038,7 @@
           <a:bodyPr wrap="square" rtlCol="0" anchor="ctr"/>
           <a:lstStyle/>
           <a:p>
-            <a:pPr algn="ctr" indent="0" marL="0">
+            <a:pPr marL="0" indent="0" algn="ctr">
               <a:buNone/>
             </a:pPr>
             <a:r>
@@ -12533,7 +12077,7 @@
           <a:bodyPr wrap="square" rtlCol="0" anchor="ctr"/>
           <a:lstStyle/>
           <a:p>
-            <a:pPr algn="l" indent="0" marL="0">
+            <a:pPr marL="0" indent="0" algn="l">
               <a:buNone/>
             </a:pPr>
             <a:r>
@@ -12572,7 +12116,7 @@
           <a:bodyPr wrap="square" rtlCol="0" anchor="ctr"/>
           <a:lstStyle/>
           <a:p>
-            <a:pPr algn="l" indent="0" marL="0">
+            <a:pPr marL="0" indent="0" algn="l">
               <a:buNone/>
             </a:pPr>
             <a:r>
@@ -12606,6 +12150,7 @@
         <a:solidFill>
           <a:srgbClr val="0A0F1E"/>
         </a:solidFill>
+        <a:effectLst/>
       </p:bgPr>
     </p:bg>
     <p:spTree>
@@ -12668,11 +12213,11 @@
           <a:bodyPr wrap="square" rtlCol="0" anchor="ctr"/>
           <a:lstStyle/>
           <a:p>
-            <a:pPr algn="l" indent="0" marL="0">
-              <a:buNone/>
-            </a:pPr>
-            <a:r>
-              <a:rPr lang="en-US" sz="800" b="1" spc="300" kern="0" dirty="0">
+            <a:pPr marL="0" indent="0" algn="l">
+              <a:buNone/>
+            </a:pPr>
+            <a:r>
+              <a:rPr lang="en-US" sz="800" b="1" kern="0" spc="300" dirty="0">
                 <a:solidFill>
                   <a:srgbClr val="00D4FF"/>
                 </a:solidFill>
@@ -12707,7 +12252,7 @@
           <a:bodyPr wrap="square" rtlCol="0" anchor="ctr"/>
           <a:lstStyle/>
           <a:p>
-            <a:pPr algn="l" indent="0" marL="0">
+            <a:pPr marL="0" indent="0" algn="l">
               <a:buNone/>
             </a:pPr>
             <a:r>
@@ -12821,11 +12366,11 @@
           <a:bodyPr wrap="square" rtlCol="0" anchor="ctr"/>
           <a:lstStyle/>
           <a:p>
-            <a:pPr indent="0" marL="0">
-              <a:buNone/>
-            </a:pPr>
-            <a:r>
-              <a:rPr lang="en-US" sz="800" b="1" spc="200" kern="0" dirty="0">
+            <a:pPr marL="0" indent="0">
+              <a:buNone/>
+            </a:pPr>
+            <a:r>
+              <a:rPr lang="en-US" sz="800" b="1" kern="0" spc="200" dirty="0">
                 <a:solidFill>
                   <a:srgbClr val="00D4FF"/>
                 </a:solidFill>
@@ -12860,7 +12405,7 @@
           <a:bodyPr wrap="square" rtlCol="0" anchor="ctr"/>
           <a:lstStyle/>
           <a:p>
-            <a:pPr algn="l" indent="0" marL="0">
+            <a:pPr marL="0" indent="0" algn="l">
               <a:buNone/>
             </a:pPr>
             <a:r>
@@ -12949,11 +12494,11 @@
           <a:bodyPr wrap="square" rtlCol="0" anchor="ctr"/>
           <a:lstStyle/>
           <a:p>
-            <a:pPr indent="0" marL="0">
-              <a:buNone/>
-            </a:pPr>
-            <a:r>
-              <a:rPr lang="en-US" sz="800" b="1" spc="200" kern="0" dirty="0">
+            <a:pPr marL="0" indent="0">
+              <a:buNone/>
+            </a:pPr>
+            <a:r>
+              <a:rPr lang="en-US" sz="800" b="1" kern="0" spc="200" dirty="0">
                 <a:solidFill>
                   <a:srgbClr val="FF6B35"/>
                 </a:solidFill>
@@ -12988,7 +12533,7 @@
           <a:bodyPr wrap="square" rtlCol="0" anchor="ctr"/>
           <a:lstStyle/>
           <a:p>
-            <a:pPr indent="0" marL="0">
+            <a:pPr marL="0" indent="0">
               <a:buNone/>
             </a:pPr>
             <a:r>
@@ -13077,11 +12622,11 @@
           <a:bodyPr wrap="square" rtlCol="0" anchor="ctr"/>
           <a:lstStyle/>
           <a:p>
-            <a:pPr indent="0" marL="0">
-              <a:buNone/>
-            </a:pPr>
-            <a:r>
-              <a:rPr lang="en-US" sz="800" b="1" spc="200" kern="0" dirty="0">
+            <a:pPr marL="0" indent="0">
+              <a:buNone/>
+            </a:pPr>
+            <a:r>
+              <a:rPr lang="en-US" sz="800" b="1" kern="0" spc="200" dirty="0">
                 <a:solidFill>
                   <a:srgbClr val="FF6B35"/>
                 </a:solidFill>
@@ -13116,7 +12661,7 @@
           <a:bodyPr wrap="square" rtlCol="0" anchor="ctr"/>
           <a:lstStyle/>
           <a:p>
-            <a:pPr indent="0" marL="0">
+            <a:pPr marL="0" indent="0">
               <a:buNone/>
             </a:pPr>
             <a:r>
@@ -13130,9 +12675,6 @@
               </a:rPr>
               <a:t>Oversupply: </a:t>
             </a:r>
-            <a:pPr indent="0" marL="0">
-              <a:buNone/>
-            </a:pPr>
             <a:r>
               <a:rPr lang="en-US" sz="1050" dirty="0">
                 <a:solidFill>
@@ -13145,9 +12687,6 @@
               <a:t>too many bikes at quiet stations → high redistribution cost
 </a:t>
             </a:r>
-            <a:pPr indent="0" marL="0">
-              <a:buNone/>
-            </a:pPr>
             <a:r>
               <a:rPr lang="en-US" sz="1050" b="1" dirty="0">
                 <a:solidFill>
@@ -13159,9 +12698,6 @@
               </a:rPr>
               <a:t>Undersupply: </a:t>
             </a:r>
-            <a:pPr indent="0" marL="0">
-              <a:buNone/>
-            </a:pPr>
             <a:r>
               <a:rPr lang="en-US" sz="1050" dirty="0">
                 <a:solidFill>
@@ -13248,11 +12784,11 @@
           <a:bodyPr wrap="square" rtlCol="0" anchor="ctr"/>
           <a:lstStyle/>
           <a:p>
-            <a:pPr indent="0" marL="0">
-              <a:buNone/>
-            </a:pPr>
-            <a:r>
-              <a:rPr lang="en-US" sz="800" b="1" spc="200" kern="0" dirty="0">
+            <a:pPr marL="0" indent="0">
+              <a:buNone/>
+            </a:pPr>
+            <a:r>
+              <a:rPr lang="en-US" sz="800" b="1" kern="0" spc="200" dirty="0">
                 <a:solidFill>
                   <a:srgbClr val="00E5A0"/>
                 </a:solidFill>
@@ -13287,7 +12823,7 @@
           <a:bodyPr wrap="square" rtlCol="0" anchor="ctr"/>
           <a:lstStyle/>
           <a:p>
-            <a:pPr indent="0" marL="0">
+            <a:pPr marL="0" indent="0">
               <a:buNone/>
             </a:pPr>
             <a:r>
@@ -13376,11 +12912,11 @@
           <a:bodyPr wrap="square" rtlCol="0" anchor="ctr"/>
           <a:lstStyle/>
           <a:p>
-            <a:pPr indent="0" marL="0">
-              <a:buNone/>
-            </a:pPr>
-            <a:r>
-              <a:rPr lang="en-US" sz="800" b="1" spc="200" kern="0" dirty="0">
+            <a:pPr marL="0" indent="0">
+              <a:buNone/>
+            </a:pPr>
+            <a:r>
+              <a:rPr lang="en-US" sz="800" b="1" kern="0" spc="200" dirty="0">
                 <a:solidFill>
                   <a:srgbClr val="00D4FF"/>
                 </a:solidFill>
@@ -13415,7 +12951,7 @@
           <a:bodyPr wrap="square" rtlCol="0" anchor="ctr"/>
           <a:lstStyle/>
           <a:p>
-            <a:pPr indent="0" marL="0">
+            <a:pPr marL="0" indent="0">
               <a:buNone/>
             </a:pPr>
             <a:r>
@@ -13504,11 +13040,11 @@
           <a:bodyPr wrap="square" rtlCol="0" anchor="ctr"/>
           <a:lstStyle/>
           <a:p>
-            <a:pPr indent="0" marL="0">
-              <a:buNone/>
-            </a:pPr>
-            <a:r>
-              <a:rPr lang="en-US" sz="800" b="1" spc="200" kern="0" dirty="0">
+            <a:pPr marL="0" indent="0">
+              <a:buNone/>
+            </a:pPr>
+            <a:r>
+              <a:rPr lang="en-US" sz="800" b="1" kern="0" spc="200" dirty="0">
                 <a:solidFill>
                   <a:srgbClr val="A78BFA"/>
                 </a:solidFill>
@@ -13543,7 +13079,7 @@
           <a:bodyPr wrap="square" rtlCol="0" anchor="ctr"/>
           <a:lstStyle/>
           <a:p>
-            <a:pPr indent="0" marL="0">
+            <a:pPr marL="0" indent="0">
               <a:buNone/>
             </a:pPr>
             <a:r>
@@ -13557,9 +13093,6 @@
               </a:rPr>
               <a:t>RMSE </a:t>
             </a:r>
-            <a:pPr indent="0" marL="0">
-              <a:buNone/>
-            </a:pPr>
             <a:r>
               <a:rPr lang="en-US" sz="1050" dirty="0">
                 <a:solidFill>
@@ -13572,9 +13105,6 @@
               <a:t>(primary) — penalizes large errors heavily
 </a:t>
             </a:r>
-            <a:pPr indent="0" marL="0">
-              <a:buNone/>
-            </a:pPr>
             <a:r>
               <a:rPr lang="en-US" sz="1050" b="1" dirty="0">
                 <a:solidFill>
@@ -13586,9 +13116,6 @@
               </a:rPr>
               <a:t>MAE </a:t>
             </a:r>
-            <a:pPr indent="0" marL="0">
-              <a:buNone/>
-            </a:pPr>
             <a:r>
               <a:rPr lang="en-US" sz="1050" dirty="0">
                 <a:solidFill>
@@ -13601,9 +13128,6 @@
               <a:t>— avg error per hour, easy to interpret
 </a:t>
             </a:r>
-            <a:pPr indent="0" marL="0">
-              <a:buNone/>
-            </a:pPr>
             <a:r>
               <a:rPr lang="en-US" sz="1050" b="1" dirty="0">
                 <a:solidFill>
@@ -13615,9 +13139,6 @@
               </a:rPr>
               <a:t>R² </a:t>
             </a:r>
-            <a:pPr indent="0" marL="0">
-              <a:buNone/>
-            </a:pPr>
             <a:r>
               <a:rPr lang="en-US" sz="1050" dirty="0">
                 <a:solidFill>
@@ -13649,6 +13170,7 @@
         <a:solidFill>
           <a:srgbClr val="0A0F1E"/>
         </a:solidFill>
+        <a:effectLst/>
       </p:bgPr>
     </p:bg>
     <p:spTree>
@@ -13711,11 +13233,11 @@
           <a:bodyPr wrap="square" rtlCol="0" anchor="ctr"/>
           <a:lstStyle/>
           <a:p>
-            <a:pPr algn="l" indent="0" marL="0">
-              <a:buNone/>
-            </a:pPr>
-            <a:r>
-              <a:rPr lang="en-US" sz="800" b="1" spc="300" kern="0" dirty="0">
+            <a:pPr marL="0" indent="0" algn="l">
+              <a:buNone/>
+            </a:pPr>
+            <a:r>
+              <a:rPr lang="en-US" sz="800" b="1" kern="0" spc="300" dirty="0">
                 <a:solidFill>
                   <a:srgbClr val="00D4FF"/>
                 </a:solidFill>
@@ -13750,7 +13272,7 @@
           <a:bodyPr wrap="square" rtlCol="0" anchor="ctr"/>
           <a:lstStyle/>
           <a:p>
-            <a:pPr algn="l" indent="0" marL="0">
+            <a:pPr marL="0" indent="0" algn="l">
               <a:buNone/>
             </a:pPr>
             <a:r>
@@ -13839,7 +13361,7 @@
           <a:bodyPr wrap="square" rtlCol="0" anchor="ctr"/>
           <a:lstStyle/>
           <a:p>
-            <a:pPr algn="ctr" indent="0" marL="0">
+            <a:pPr marL="0" indent="0" algn="ctr">
               <a:buNone/>
             </a:pPr>
             <a:r>
@@ -13878,7 +13400,7 @@
           <a:bodyPr wrap="square" rtlCol="0" anchor="ctr"/>
           <a:lstStyle/>
           <a:p>
-            <a:pPr algn="ctr" indent="0" marL="0">
+            <a:pPr marL="0" indent="0" algn="ctr">
               <a:buNone/>
             </a:pPr>
             <a:r>
@@ -13942,7 +13464,7 @@
           <a:bodyPr wrap="square" rtlCol="0" anchor="ctr"/>
           <a:lstStyle/>
           <a:p>
-            <a:pPr algn="ctr" indent="0" marL="0">
+            <a:pPr marL="0" indent="0" algn="ctr">
               <a:buNone/>
             </a:pPr>
             <a:r>
@@ -13981,7 +13503,7 @@
           <a:bodyPr wrap="square" rtlCol="0" anchor="ctr"/>
           <a:lstStyle/>
           <a:p>
-            <a:pPr algn="ctr" indent="0" marL="0">
+            <a:pPr marL="0" indent="0" algn="ctr">
               <a:buNone/>
             </a:pPr>
             <a:r>
@@ -14045,7 +13567,7 @@
           <a:bodyPr wrap="square" rtlCol="0" anchor="ctr"/>
           <a:lstStyle/>
           <a:p>
-            <a:pPr algn="ctr" indent="0" marL="0">
+            <a:pPr marL="0" indent="0" algn="ctr">
               <a:buNone/>
             </a:pPr>
             <a:r>
@@ -14084,7 +13606,7 @@
           <a:bodyPr wrap="square" rtlCol="0" anchor="ctr"/>
           <a:lstStyle/>
           <a:p>
-            <a:pPr algn="ctr" indent="0" marL="0">
+            <a:pPr marL="0" indent="0" algn="ctr">
               <a:buNone/>
             </a:pPr>
             <a:r>
@@ -14148,7 +13670,7 @@
           <a:bodyPr wrap="square" rtlCol="0" anchor="ctr"/>
           <a:lstStyle/>
           <a:p>
-            <a:pPr algn="ctr" indent="0" marL="0">
+            <a:pPr marL="0" indent="0" algn="ctr">
               <a:buNone/>
             </a:pPr>
             <a:r>
@@ -14187,7 +13709,7 @@
           <a:bodyPr wrap="square" rtlCol="0" anchor="ctr"/>
           <a:lstStyle/>
           <a:p>
-            <a:pPr algn="ctr" indent="0" marL="0">
+            <a:pPr marL="0" indent="0" algn="ctr">
               <a:buNone/>
             </a:pPr>
             <a:r>
@@ -14226,11 +13748,11 @@
           <a:bodyPr wrap="square" rtlCol="0" anchor="ctr"/>
           <a:lstStyle/>
           <a:p>
-            <a:pPr indent="0" marL="0">
-              <a:buNone/>
-            </a:pPr>
-            <a:r>
-              <a:rPr lang="en-US" sz="800" b="1" spc="200" kern="0" dirty="0">
+            <a:pPr marL="0" indent="0">
+              <a:buNone/>
+            </a:pPr>
+            <a:r>
+              <a:rPr lang="en-US" sz="800" b="1" kern="0" spc="200" dirty="0">
                 <a:solidFill>
                   <a:srgbClr val="00D4FF"/>
                 </a:solidFill>
@@ -14246,7 +13768,7 @@
       </p:sp>
       <p:graphicFrame>
         <p:nvGraphicFramePr>
-          <p:cNvPr id="5" name="Table 0"/>
+          <p:cNvPr id="19" name="Table 0"/>
           <p:cNvGraphicFramePr>
             <a:graphicFrameLocks noGrp="1"/>
           </p:cNvGraphicFramePr>
@@ -14267,9 +13789,27 @@
             <a:tbl>
               <a:tblPr/>
               <a:tblGrid>
-                <a:gridCol w="1371600"/>
-                <a:gridCol w="914400"/>
-                <a:gridCol w="6035040"/>
+                <a:gridCol w="1371600">
+                  <a:extLst>
+                    <a:ext uri="{9D8B030D-6E8A-4147-A177-3AD203B41FA5}">
+                      <a16:colId xmlns:a16="http://schemas.microsoft.com/office/drawing/2014/main" val="20000"/>
+                    </a:ext>
+                  </a:extLst>
+                </a:gridCol>
+                <a:gridCol w="914400">
+                  <a:extLst>
+                    <a:ext uri="{9D8B030D-6E8A-4147-A177-3AD203B41FA5}">
+                      <a16:colId xmlns:a16="http://schemas.microsoft.com/office/drawing/2014/main" val="20001"/>
+                    </a:ext>
+                  </a:extLst>
+                </a:gridCol>
+                <a:gridCol w="6035040">
+                  <a:extLst>
+                    <a:ext uri="{9D8B030D-6E8A-4147-A177-3AD203B41FA5}">
+                      <a16:colId xmlns:a16="http://schemas.microsoft.com/office/drawing/2014/main" val="20002"/>
+                    </a:ext>
+                  </a:extLst>
+                </a:gridCol>
               </a:tblGrid>
               <a:tr h="237744">
                 <a:tc>
@@ -14277,7 +13817,7 @@
                     <a:bodyPr/>
                     <a:lstStyle/>
                     <a:p>
-                      <a:pPr algn="l" indent="0" marL="0">
+                      <a:pPr marL="0" indent="0" algn="l">
                         <a:buNone/>
                       </a:pPr>
                       <a:r>
@@ -14321,7 +13861,7 @@
                     <a:bodyPr/>
                     <a:lstStyle/>
                     <a:p>
-                      <a:pPr algn="ctr" indent="0" marL="0">
+                      <a:pPr marL="0" indent="0" algn="ctr">
                         <a:buNone/>
                       </a:pPr>
                       <a:r>
@@ -14365,7 +13905,7 @@
                     <a:bodyPr/>
                     <a:lstStyle/>
                     <a:p>
-                      <a:pPr algn="l" indent="0" marL="0">
+                      <a:pPr marL="0" indent="0" algn="l">
                         <a:buNone/>
                       </a:pPr>
                       <a:r>
@@ -14404,6 +13944,11 @@
                     </a:solidFill>
                   </a:tcPr>
                 </a:tc>
+                <a:extLst>
+                  <a:ext uri="{0D108BD9-81ED-4DB2-BD59-A6C34878D82A}">
+                    <a16:rowId xmlns:a16="http://schemas.microsoft.com/office/drawing/2014/main" val="10000"/>
+                  </a:ext>
+                </a:extLst>
               </a:tr>
               <a:tr h="237744">
                 <a:tc>
@@ -14411,7 +13956,7 @@
                     <a:bodyPr/>
                     <a:lstStyle/>
                     <a:p>
-                      <a:pPr algn="l" indent="0" marL="0">
+                      <a:pPr marL="0" indent="0" algn="l">
                         <a:buNone/>
                       </a:pPr>
                       <a:r>
@@ -14455,7 +14000,7 @@
                     <a:bodyPr/>
                     <a:lstStyle/>
                     <a:p>
-                      <a:pPr algn="ctr" indent="0" marL="0">
+                      <a:pPr marL="0" indent="0" algn="ctr">
                         <a:buNone/>
                       </a:pPr>
                       <a:r>
@@ -14499,7 +14044,7 @@
                     <a:bodyPr/>
                     <a:lstStyle/>
                     <a:p>
-                      <a:pPr algn="l" indent="0" marL="0">
+                      <a:pPr marL="0" indent="0" algn="l">
                         <a:buNone/>
                       </a:pPr>
                       <a:r>
@@ -14538,6 +14083,11 @@
                     </a:solidFill>
                   </a:tcPr>
                 </a:tc>
+                <a:extLst>
+                  <a:ext uri="{0D108BD9-81ED-4DB2-BD59-A6C34878D82A}">
+                    <a16:rowId xmlns:a16="http://schemas.microsoft.com/office/drawing/2014/main" val="10001"/>
+                  </a:ext>
+                </a:extLst>
               </a:tr>
               <a:tr h="237744">
                 <a:tc>
@@ -14545,7 +14095,7 @@
                     <a:bodyPr/>
                     <a:lstStyle/>
                     <a:p>
-                      <a:pPr algn="l" indent="0" marL="0">
+                      <a:pPr marL="0" indent="0" algn="l">
                         <a:buNone/>
                       </a:pPr>
                       <a:r>
@@ -14589,7 +14139,7 @@
                     <a:bodyPr/>
                     <a:lstStyle/>
                     <a:p>
-                      <a:pPr algn="ctr" indent="0" marL="0">
+                      <a:pPr marL="0" indent="0" algn="ctr">
                         <a:buNone/>
                       </a:pPr>
                       <a:r>
@@ -14633,7 +14183,7 @@
                     <a:bodyPr/>
                     <a:lstStyle/>
                     <a:p>
-                      <a:pPr algn="l" indent="0" marL="0">
+                      <a:pPr marL="0" indent="0" algn="l">
                         <a:buNone/>
                       </a:pPr>
                       <a:r>
@@ -14672,6 +14222,11 @@
                     </a:solidFill>
                   </a:tcPr>
                 </a:tc>
+                <a:extLst>
+                  <a:ext uri="{0D108BD9-81ED-4DB2-BD59-A6C34878D82A}">
+                    <a16:rowId xmlns:a16="http://schemas.microsoft.com/office/drawing/2014/main" val="10002"/>
+                  </a:ext>
+                </a:extLst>
               </a:tr>
               <a:tr h="237744">
                 <a:tc>
@@ -14679,7 +14234,7 @@
                     <a:bodyPr/>
                     <a:lstStyle/>
                     <a:p>
-                      <a:pPr algn="l" indent="0" marL="0">
+                      <a:pPr marL="0" indent="0" algn="l">
                         <a:buNone/>
                       </a:pPr>
                       <a:r>
@@ -14723,7 +14278,7 @@
                     <a:bodyPr/>
                     <a:lstStyle/>
                     <a:p>
-                      <a:pPr algn="ctr" indent="0" marL="0">
+                      <a:pPr marL="0" indent="0" algn="ctr">
                         <a:buNone/>
                       </a:pPr>
                       <a:r>
@@ -14767,7 +14322,7 @@
                     <a:bodyPr/>
                     <a:lstStyle/>
                     <a:p>
-                      <a:pPr algn="l" indent="0" marL="0">
+                      <a:pPr marL="0" indent="0" algn="l">
                         <a:buNone/>
                       </a:pPr>
                       <a:r>
@@ -14806,6 +14361,11 @@
                     </a:solidFill>
                   </a:tcPr>
                 </a:tc>
+                <a:extLst>
+                  <a:ext uri="{0D108BD9-81ED-4DB2-BD59-A6C34878D82A}">
+                    <a16:rowId xmlns:a16="http://schemas.microsoft.com/office/drawing/2014/main" val="10003"/>
+                  </a:ext>
+                </a:extLst>
               </a:tr>
               <a:tr h="237744">
                 <a:tc>
@@ -14813,7 +14373,7 @@
                     <a:bodyPr/>
                     <a:lstStyle/>
                     <a:p>
-                      <a:pPr algn="l" indent="0" marL="0">
+                      <a:pPr marL="0" indent="0" algn="l">
                         <a:buNone/>
                       </a:pPr>
                       <a:r>
@@ -14857,7 +14417,7 @@
                     <a:bodyPr/>
                     <a:lstStyle/>
                     <a:p>
-                      <a:pPr algn="ctr" indent="0" marL="0">
+                      <a:pPr marL="0" indent="0" algn="ctr">
                         <a:buNone/>
                       </a:pPr>
                       <a:r>
@@ -14901,7 +14461,7 @@
                     <a:bodyPr/>
                     <a:lstStyle/>
                     <a:p>
-                      <a:pPr algn="l" indent="0" marL="0">
+                      <a:pPr marL="0" indent="0" algn="l">
                         <a:buNone/>
                       </a:pPr>
                       <a:r>
@@ -14940,6 +14500,11 @@
                     </a:solidFill>
                   </a:tcPr>
                 </a:tc>
+                <a:extLst>
+                  <a:ext uri="{0D108BD9-81ED-4DB2-BD59-A6C34878D82A}">
+                    <a16:rowId xmlns:a16="http://schemas.microsoft.com/office/drawing/2014/main" val="10004"/>
+                  </a:ext>
+                </a:extLst>
               </a:tr>
               <a:tr h="237744">
                 <a:tc>
@@ -14947,7 +14512,7 @@
                     <a:bodyPr/>
                     <a:lstStyle/>
                     <a:p>
-                      <a:pPr algn="l" indent="0" marL="0">
+                      <a:pPr marL="0" indent="0" algn="l">
                         <a:buNone/>
                       </a:pPr>
                       <a:r>
@@ -14991,7 +14556,7 @@
                     <a:bodyPr/>
                     <a:lstStyle/>
                     <a:p>
-                      <a:pPr algn="ctr" indent="0" marL="0">
+                      <a:pPr marL="0" indent="0" algn="ctr">
                         <a:buNone/>
                       </a:pPr>
                       <a:r>
@@ -15035,7 +14600,7 @@
                     <a:bodyPr/>
                     <a:lstStyle/>
                     <a:p>
-                      <a:pPr algn="l" indent="0" marL="0">
+                      <a:pPr marL="0" indent="0" algn="l">
                         <a:buNone/>
                       </a:pPr>
                       <a:r>
@@ -15074,6 +14639,11 @@
                     </a:solidFill>
                   </a:tcPr>
                 </a:tc>
+                <a:extLst>
+                  <a:ext uri="{0D108BD9-81ED-4DB2-BD59-A6C34878D82A}">
+                    <a16:rowId xmlns:a16="http://schemas.microsoft.com/office/drawing/2014/main" val="10005"/>
+                  </a:ext>
+                </a:extLst>
               </a:tr>
               <a:tr h="237744">
                 <a:tc>
@@ -15081,7 +14651,7 @@
                     <a:bodyPr/>
                     <a:lstStyle/>
                     <a:p>
-                      <a:pPr algn="l" indent="0" marL="0">
+                      <a:pPr marL="0" indent="0" algn="l">
                         <a:buNone/>
                       </a:pPr>
                       <a:r>
@@ -15125,7 +14695,7 @@
                     <a:bodyPr/>
                     <a:lstStyle/>
                     <a:p>
-                      <a:pPr algn="ctr" indent="0" marL="0">
+                      <a:pPr marL="0" indent="0" algn="ctr">
                         <a:buNone/>
                       </a:pPr>
                       <a:r>
@@ -15169,7 +14739,7 @@
                     <a:bodyPr/>
                     <a:lstStyle/>
                     <a:p>
-                      <a:pPr algn="l" indent="0" marL="0">
+                      <a:pPr marL="0" indent="0" algn="l">
                         <a:buNone/>
                       </a:pPr>
                       <a:r>
@@ -15208,6 +14778,11 @@
                     </a:solidFill>
                   </a:tcPr>
                 </a:tc>
+                <a:extLst>
+                  <a:ext uri="{0D108BD9-81ED-4DB2-BD59-A6C34878D82A}">
+                    <a16:rowId xmlns:a16="http://schemas.microsoft.com/office/drawing/2014/main" val="10006"/>
+                  </a:ext>
+                </a:extLst>
               </a:tr>
               <a:tr h="237744">
                 <a:tc>
@@ -15215,7 +14790,7 @@
                     <a:bodyPr/>
                     <a:lstStyle/>
                     <a:p>
-                      <a:pPr algn="l" indent="0" marL="0">
+                      <a:pPr marL="0" indent="0" algn="l">
                         <a:buNone/>
                       </a:pPr>
                       <a:r>
@@ -15259,7 +14834,7 @@
                     <a:bodyPr/>
                     <a:lstStyle/>
                     <a:p>
-                      <a:pPr algn="ctr" indent="0" marL="0">
+                      <a:pPr marL="0" indent="0" algn="ctr">
                         <a:buNone/>
                       </a:pPr>
                       <a:r>
@@ -15303,7 +14878,7 @@
                     <a:bodyPr/>
                     <a:lstStyle/>
                     <a:p>
-                      <a:pPr algn="l" indent="0" marL="0">
+                      <a:pPr marL="0" indent="0" algn="l">
                         <a:buNone/>
                       </a:pPr>
                       <a:r>
@@ -15342,6 +14917,11 @@
                     </a:solidFill>
                   </a:tcPr>
                 </a:tc>
+                <a:extLst>
+                  <a:ext uri="{0D108BD9-81ED-4DB2-BD59-A6C34878D82A}">
+                    <a16:rowId xmlns:a16="http://schemas.microsoft.com/office/drawing/2014/main" val="10007"/>
+                  </a:ext>
+                </a:extLst>
               </a:tr>
               <a:tr h="237744">
                 <a:tc>
@@ -15349,7 +14929,7 @@
                     <a:bodyPr/>
                     <a:lstStyle/>
                     <a:p>
-                      <a:pPr algn="l" indent="0" marL="0">
+                      <a:pPr marL="0" indent="0" algn="l">
                         <a:buNone/>
                       </a:pPr>
                       <a:r>
@@ -15393,7 +14973,7 @@
                     <a:bodyPr/>
                     <a:lstStyle/>
                     <a:p>
-                      <a:pPr algn="ctr" indent="0" marL="0">
+                      <a:pPr marL="0" indent="0" algn="ctr">
                         <a:buNone/>
                       </a:pPr>
                       <a:r>
@@ -15437,7 +15017,7 @@
                     <a:bodyPr/>
                     <a:lstStyle/>
                     <a:p>
-                      <a:pPr algn="l" indent="0" marL="0">
+                      <a:pPr marL="0" indent="0" algn="l">
                         <a:buNone/>
                       </a:pPr>
                       <a:r>
@@ -15476,6 +15056,11 @@
                     </a:solidFill>
                   </a:tcPr>
                 </a:tc>
+                <a:extLst>
+                  <a:ext uri="{0D108BD9-81ED-4DB2-BD59-A6C34878D82A}">
+                    <a16:rowId xmlns:a16="http://schemas.microsoft.com/office/drawing/2014/main" val="10008"/>
+                  </a:ext>
+                </a:extLst>
               </a:tr>
               <a:tr h="237744">
                 <a:tc>
@@ -15483,7 +15068,7 @@
                     <a:bodyPr/>
                     <a:lstStyle/>
                     <a:p>
-                      <a:pPr algn="l" indent="0" marL="0">
+                      <a:pPr marL="0" indent="0" algn="l">
                         <a:buNone/>
                       </a:pPr>
                       <a:r>
@@ -15527,7 +15112,7 @@
                     <a:bodyPr/>
                     <a:lstStyle/>
                     <a:p>
-                      <a:pPr algn="ctr" indent="0" marL="0">
+                      <a:pPr marL="0" indent="0" algn="ctr">
                         <a:buNone/>
                       </a:pPr>
                       <a:r>
@@ -15571,7 +15156,7 @@
                     <a:bodyPr/>
                     <a:lstStyle/>
                     <a:p>
-                      <a:pPr algn="l" indent="0" marL="0">
+                      <a:pPr marL="0" indent="0" algn="l">
                         <a:buNone/>
                       </a:pPr>
                       <a:r>
@@ -15610,6 +15195,11 @@
                     </a:solidFill>
                   </a:tcPr>
                 </a:tc>
+                <a:extLst>
+                  <a:ext uri="{0D108BD9-81ED-4DB2-BD59-A6C34878D82A}">
+                    <a16:rowId xmlns:a16="http://schemas.microsoft.com/office/drawing/2014/main" val="10009"/>
+                  </a:ext>
+                </a:extLst>
               </a:tr>
               <a:tr h="237744">
                 <a:tc>
@@ -15617,7 +15207,7 @@
                     <a:bodyPr/>
                     <a:lstStyle/>
                     <a:p>
-                      <a:pPr algn="l" indent="0" marL="0">
+                      <a:pPr marL="0" indent="0" algn="l">
                         <a:buNone/>
                       </a:pPr>
                       <a:r>
@@ -15661,7 +15251,7 @@
                     <a:bodyPr/>
                     <a:lstStyle/>
                     <a:p>
-                      <a:pPr algn="ctr" indent="0" marL="0">
+                      <a:pPr marL="0" indent="0" algn="ctr">
                         <a:buNone/>
                       </a:pPr>
                       <a:r>
@@ -15705,7 +15295,7 @@
                     <a:bodyPr/>
                     <a:lstStyle/>
                     <a:p>
-                      <a:pPr algn="l" indent="0" marL="0">
+                      <a:pPr marL="0" indent="0" algn="l">
                         <a:buNone/>
                       </a:pPr>
                       <a:r>
@@ -15744,6 +15334,11 @@
                     </a:solidFill>
                   </a:tcPr>
                 </a:tc>
+                <a:extLst>
+                  <a:ext uri="{0D108BD9-81ED-4DB2-BD59-A6C34878D82A}">
+                    <a16:rowId xmlns:a16="http://schemas.microsoft.com/office/drawing/2014/main" val="10010"/>
+                  </a:ext>
+                </a:extLst>
               </a:tr>
               <a:tr h="237744">
                 <a:tc>
@@ -15751,7 +15346,7 @@
                     <a:bodyPr/>
                     <a:lstStyle/>
                     <a:p>
-                      <a:pPr algn="l" indent="0" marL="0">
+                      <a:pPr marL="0" indent="0" algn="l">
                         <a:buNone/>
                       </a:pPr>
                       <a:r>
@@ -15795,7 +15390,7 @@
                     <a:bodyPr/>
                     <a:lstStyle/>
                     <a:p>
-                      <a:pPr algn="ctr" indent="0" marL="0">
+                      <a:pPr marL="0" indent="0" algn="ctr">
                         <a:buNone/>
                       </a:pPr>
                       <a:r>
@@ -15839,7 +15434,7 @@
                     <a:bodyPr/>
                     <a:lstStyle/>
                     <a:p>
-                      <a:pPr algn="l" indent="0" marL="0">
+                      <a:pPr marL="0" indent="0" algn="l">
                         <a:buNone/>
                       </a:pPr>
                       <a:r>
@@ -15878,6 +15473,11 @@
                     </a:solidFill>
                   </a:tcPr>
                 </a:tc>
+                <a:extLst>
+                  <a:ext uri="{0D108BD9-81ED-4DB2-BD59-A6C34878D82A}">
+                    <a16:rowId xmlns:a16="http://schemas.microsoft.com/office/drawing/2014/main" val="10011"/>
+                  </a:ext>
+                </a:extLst>
               </a:tr>
             </a:tbl>
           </a:graphicData>
@@ -15899,6 +15499,7 @@
         <a:solidFill>
           <a:srgbClr val="0A0F1E"/>
         </a:solidFill>
+        <a:effectLst/>
       </p:bgPr>
     </p:bg>
     <p:spTree>
@@ -15961,11 +15562,11 @@
           <a:bodyPr wrap="square" rtlCol="0" anchor="ctr"/>
           <a:lstStyle/>
           <a:p>
-            <a:pPr algn="l" indent="0" marL="0">
-              <a:buNone/>
-            </a:pPr>
-            <a:r>
-              <a:rPr lang="en-US" sz="800" b="1" spc="300" kern="0" dirty="0">
+            <a:pPr marL="0" indent="0" algn="l">
+              <a:buNone/>
+            </a:pPr>
+            <a:r>
+              <a:rPr lang="en-US" sz="800" b="1" kern="0" spc="300" dirty="0">
                 <a:solidFill>
                   <a:srgbClr val="00D4FF"/>
                 </a:solidFill>
@@ -16000,7 +15601,7 @@
           <a:bodyPr wrap="square" rtlCol="0" anchor="ctr"/>
           <a:lstStyle/>
           <a:p>
-            <a:pPr algn="l" indent="0" marL="0">
+            <a:pPr marL="0" indent="0" algn="l">
               <a:buNone/>
             </a:pPr>
             <a:r>
@@ -16114,11 +15715,11 @@
           <a:bodyPr wrap="square" rtlCol="0" anchor="ctr"/>
           <a:lstStyle/>
           <a:p>
-            <a:pPr indent="0" marL="0">
-              <a:buNone/>
-            </a:pPr>
-            <a:r>
-              <a:rPr lang="en-US" sz="800" b="1" spc="200" kern="0" dirty="0">
+            <a:pPr marL="0" indent="0">
+              <a:buNone/>
+            </a:pPr>
+            <a:r>
+              <a:rPr lang="en-US" sz="800" b="1" kern="0" spc="200" dirty="0">
                 <a:solidFill>
                   <a:srgbClr val="0EA5E9"/>
                 </a:solidFill>
@@ -16153,7 +15754,7 @@
           <a:bodyPr wrap="square" rtlCol="0" anchor="ctr"/>
           <a:lstStyle/>
           <a:p>
-            <a:pPr algn="ctr" indent="0" marL="0">
+            <a:pPr marL="0" indent="0" algn="ctr">
               <a:buNone/>
             </a:pPr>
             <a:r>
@@ -16192,7 +15793,7 @@
           <a:bodyPr wrap="square" rtlCol="0" anchor="ctr"/>
           <a:lstStyle/>
           <a:p>
-            <a:pPr algn="ctr" indent="0" marL="0">
+            <a:pPr marL="0" indent="0" algn="ctr">
               <a:buNone/>
             </a:pPr>
             <a:r>
@@ -16231,7 +15832,7 @@
           <a:bodyPr wrap="square" rtlCol="0" anchor="ctr"/>
           <a:lstStyle/>
           <a:p>
-            <a:pPr algn="ctr" indent="0" marL="0">
+            <a:pPr marL="0" indent="0" algn="ctr">
               <a:buNone/>
             </a:pPr>
             <a:r>
@@ -16270,7 +15871,7 @@
           <a:bodyPr wrap="square" rtlCol="0" anchor="ctr"/>
           <a:lstStyle/>
           <a:p>
-            <a:pPr algn="ctr" indent="0" marL="0">
+            <a:pPr marL="0" indent="0" algn="ctr">
               <a:buNone/>
             </a:pPr>
             <a:r>
@@ -16309,7 +15910,7 @@
           <a:bodyPr wrap="square" rtlCol="0" anchor="ctr"/>
           <a:lstStyle/>
           <a:p>
-            <a:pPr algn="ctr" indent="0" marL="0">
+            <a:pPr marL="0" indent="0" algn="ctr">
               <a:buNone/>
             </a:pPr>
             <a:r>
@@ -16348,7 +15949,7 @@
           <a:bodyPr wrap="square" rtlCol="0" anchor="ctr"/>
           <a:lstStyle/>
           <a:p>
-            <a:pPr algn="ctr" indent="0" marL="0">
+            <a:pPr marL="0" indent="0" algn="ctr">
               <a:buNone/>
             </a:pPr>
             <a:r>
@@ -16387,7 +15988,7 @@
           <a:bodyPr wrap="square" rtlCol="0" anchor="ctr"/>
           <a:lstStyle/>
           <a:p>
-            <a:pPr algn="ctr" indent="0" marL="0">
+            <a:pPr marL="0" indent="0" algn="ctr">
               <a:buNone/>
             </a:pPr>
             <a:r>
@@ -16426,7 +16027,7 @@
           <a:bodyPr wrap="square" rtlCol="0" anchor="ctr"/>
           <a:lstStyle/>
           <a:p>
-            <a:pPr algn="ctr" indent="0" marL="0">
+            <a:pPr marL="0" indent="0" algn="ctr">
               <a:buNone/>
             </a:pPr>
             <a:r>
@@ -16465,7 +16066,7 @@
           <a:bodyPr wrap="square" rtlCol="0" anchor="ctr"/>
           <a:lstStyle/>
           <a:p>
-            <a:pPr indent="0" marL="0">
+            <a:pPr marL="0" indent="0">
               <a:buNone/>
             </a:pPr>
             <a:r>
@@ -16554,11 +16155,11 @@
           <a:bodyPr wrap="square" rtlCol="0" anchor="ctr"/>
           <a:lstStyle/>
           <a:p>
-            <a:pPr indent="0" marL="0">
-              <a:buNone/>
-            </a:pPr>
-            <a:r>
-              <a:rPr lang="en-US" sz="800" b="1" spc="200" kern="0" dirty="0">
+            <a:pPr marL="0" indent="0">
+              <a:buNone/>
+            </a:pPr>
+            <a:r>
+              <a:rPr lang="en-US" sz="800" b="1" kern="0" spc="200" dirty="0">
                 <a:solidFill>
                   <a:srgbClr val="FF6B35"/>
                 </a:solidFill>
@@ -16593,7 +16194,7 @@
           <a:bodyPr wrap="square" rtlCol="0" anchor="ctr"/>
           <a:lstStyle/>
           <a:p>
-            <a:pPr algn="ctr" indent="0" marL="0">
+            <a:pPr marL="0" indent="0" algn="ctr">
               <a:buNone/>
             </a:pPr>
             <a:r>
@@ -16632,7 +16233,7 @@
           <a:bodyPr wrap="square" rtlCol="0" anchor="ctr"/>
           <a:lstStyle/>
           <a:p>
-            <a:pPr algn="ctr" indent="0" marL="0">
+            <a:pPr marL="0" indent="0" algn="ctr">
               <a:buNone/>
             </a:pPr>
             <a:r>
@@ -16671,7 +16272,7 @@
           <a:bodyPr wrap="square" rtlCol="0" anchor="ctr"/>
           <a:lstStyle/>
           <a:p>
-            <a:pPr algn="ctr" indent="0" marL="0">
+            <a:pPr marL="0" indent="0" algn="ctr">
               <a:buNone/>
             </a:pPr>
             <a:r>
@@ -16710,7 +16311,7 @@
           <a:bodyPr wrap="square" rtlCol="0" anchor="ctr"/>
           <a:lstStyle/>
           <a:p>
-            <a:pPr algn="ctr" indent="0" marL="0">
+            <a:pPr marL="0" indent="0" algn="ctr">
               <a:buNone/>
             </a:pPr>
             <a:r>
@@ -16749,7 +16350,7 @@
           <a:bodyPr wrap="square" rtlCol="0" anchor="ctr"/>
           <a:lstStyle/>
           <a:p>
-            <a:pPr algn="ctr" indent="0" marL="0">
+            <a:pPr marL="0" indent="0" algn="ctr">
               <a:buNone/>
             </a:pPr>
             <a:r>
@@ -16788,7 +16389,7 @@
           <a:bodyPr wrap="square" rtlCol="0" anchor="ctr"/>
           <a:lstStyle/>
           <a:p>
-            <a:pPr algn="ctr" indent="0" marL="0">
+            <a:pPr marL="0" indent="0" algn="ctr">
               <a:buNone/>
             </a:pPr>
             <a:r>
@@ -16827,7 +16428,7 @@
           <a:bodyPr wrap="square" rtlCol="0" anchor="ctr"/>
           <a:lstStyle/>
           <a:p>
-            <a:pPr algn="ctr" indent="0" marL="0">
+            <a:pPr marL="0" indent="0" algn="ctr">
               <a:buNone/>
             </a:pPr>
             <a:r>
@@ -16866,7 +16467,7 @@
           <a:bodyPr wrap="square" rtlCol="0" anchor="ctr"/>
           <a:lstStyle/>
           <a:p>
-            <a:pPr algn="ctr" indent="0" marL="0">
+            <a:pPr marL="0" indent="0" algn="ctr">
               <a:buNone/>
             </a:pPr>
             <a:r>
@@ -16905,7 +16506,7 @@
           <a:bodyPr wrap="square" rtlCol="0" anchor="ctr"/>
           <a:lstStyle/>
           <a:p>
-            <a:pPr indent="0" marL="0">
+            <a:pPr marL="0" indent="0">
               <a:buNone/>
             </a:pPr>
             <a:r>
@@ -16994,11 +16595,11 @@
           <a:bodyPr wrap="square" rtlCol="0" anchor="ctr"/>
           <a:lstStyle/>
           <a:p>
-            <a:pPr indent="0" marL="0">
-              <a:buNone/>
-            </a:pPr>
-            <a:r>
-              <a:rPr lang="en-US" sz="800" b="1" spc="200" kern="0" dirty="0">
+            <a:pPr marL="0" indent="0">
+              <a:buNone/>
+            </a:pPr>
+            <a:r>
+              <a:rPr lang="en-US" sz="800" b="1" kern="0" spc="200" dirty="0">
                 <a:solidFill>
                   <a:srgbClr val="00E5A0"/>
                 </a:solidFill>
@@ -17033,7 +16634,7 @@
           <a:bodyPr wrap="square" rtlCol="0" anchor="ctr"/>
           <a:lstStyle/>
           <a:p>
-            <a:pPr indent="0" marL="0">
+            <a:pPr marL="0" indent="0">
               <a:buNone/>
             </a:pPr>
             <a:r>
@@ -17047,9 +16648,6 @@
               </a:rPr>
               <a:t>Registered users average 4× more rentals per hour than casual users </a:t>
             </a:r>
-            <a:pPr indent="0" marL="0">
-              <a:buNone/>
-            </a:pPr>
             <a:r>
               <a:rPr lang="en-US" sz="1050" b="1" dirty="0">
                 <a:solidFill>
@@ -17061,9 +16659,6 @@
               </a:rPr>
               <a:t>(153.4 vs 35.8)</a:t>
             </a:r>
-            <a:pPr indent="0" marL="0">
-              <a:buNone/>
-            </a:pPr>
             <a:r>
               <a:rPr lang="en-US" sz="1050" dirty="0">
                 <a:solidFill>
@@ -17075,9 +16670,6 @@
               </a:rPr>
               <a:t> and have a higher maximum demand </a:t>
             </a:r>
-            <a:pPr indent="0" marL="0">
-              <a:buNone/>
-            </a:pPr>
             <a:r>
               <a:rPr lang="en-US" sz="1050" b="1" dirty="0">
                 <a:solidFill>
@@ -17089,9 +16681,6 @@
               </a:rPr>
               <a:t>(876 vs 362)</a:t>
             </a:r>
-            <a:pPr indent="0" marL="0">
-              <a:buNone/>
-            </a:pPr>
             <a:r>
               <a:rPr lang="en-US" sz="1050" dirty="0">
                 <a:solidFill>
@@ -17123,6 +16712,7 @@
         <a:solidFill>
           <a:srgbClr val="0A0F1E"/>
         </a:solidFill>
+        <a:effectLst/>
       </p:bgPr>
     </p:bg>
     <p:spTree>
@@ -17185,11 +16775,11 @@
           <a:bodyPr wrap="square" rtlCol="0" anchor="ctr"/>
           <a:lstStyle/>
           <a:p>
-            <a:pPr algn="l" indent="0" marL="0">
-              <a:buNone/>
-            </a:pPr>
-            <a:r>
-              <a:rPr lang="en-US" sz="800" b="1" spc="300" kern="0" dirty="0">
+            <a:pPr marL="0" indent="0" algn="l">
+              <a:buNone/>
+            </a:pPr>
+            <a:r>
+              <a:rPr lang="en-US" sz="800" b="1" kern="0" spc="300" dirty="0">
                 <a:solidFill>
                   <a:srgbClr val="00D4FF"/>
                 </a:solidFill>
@@ -17224,7 +16814,7 @@
           <a:bodyPr wrap="square" rtlCol="0" anchor="ctr"/>
           <a:lstStyle/>
           <a:p>
-            <a:pPr algn="l" indent="0" marL="0">
+            <a:pPr marL="0" indent="0" algn="l">
               <a:buNone/>
             </a:pPr>
             <a:r>
@@ -17269,7 +16859,7 @@
       </p:sp>
       <p:graphicFrame>
         <p:nvGraphicFramePr>
-          <p:cNvPr id="6" name="Chart 0" descr=""/>
+          <p:cNvPr id="6" name="Chart 0"/>
           <p:cNvGraphicFramePr/>
           <p:nvPr/>
         </p:nvGraphicFramePr>
@@ -17277,15 +16867,15 @@
           <a:off x="411480" y="1051560"/>
           <a:ext cx="4114800" cy="2834640"/>
         </p:xfrm>
-        <a:graphic xmlns:a="http://schemas.openxmlformats.org/drawingml/2006/main">
+        <a:graphic>
           <a:graphicData uri="http://schemas.openxmlformats.org/drawingml/2006/chart">
-            <c:chart xmlns:c="http://schemas.openxmlformats.org/drawingml/2006/chart" r:id="rId1"/>
+            <c:chart xmlns:c="http://schemas.openxmlformats.org/drawingml/2006/chart" xmlns:r="http://schemas.openxmlformats.org/officeDocument/2006/relationships" r:id="rId3"/>
           </a:graphicData>
         </a:graphic>
       </p:graphicFrame>
       <p:graphicFrame>
         <p:nvGraphicFramePr>
-          <p:cNvPr id="7" name="Chart 1" descr=""/>
+          <p:cNvPr id="7" name="Chart 1"/>
           <p:cNvGraphicFramePr/>
           <p:nvPr/>
         </p:nvGraphicFramePr>
@@ -17293,9 +16883,9 @@
           <a:off x="4663440" y="1051560"/>
           <a:ext cx="4114800" cy="2834640"/>
         </p:xfrm>
-        <a:graphic xmlns:a="http://schemas.openxmlformats.org/drawingml/2006/main">
+        <a:graphic>
           <a:graphicData uri="http://schemas.openxmlformats.org/drawingml/2006/chart">
-            <c:chart xmlns:c="http://schemas.openxmlformats.org/drawingml/2006/chart" r:id="rId2"/>
+            <c:chart xmlns:c="http://schemas.openxmlformats.org/drawingml/2006/chart" xmlns:r="http://schemas.openxmlformats.org/officeDocument/2006/relationships" r:id="rId4"/>
           </a:graphicData>
         </a:graphic>
       </p:graphicFrame>
@@ -17370,7 +16960,7 @@
           <a:bodyPr wrap="square" rtlCol="0" anchor="ctr"/>
           <a:lstStyle/>
           <a:p>
-            <a:pPr indent="0" marL="0">
+            <a:pPr marL="0" indent="0">
               <a:buNone/>
             </a:pPr>
             <a:r>
@@ -17409,7 +16999,7 @@
           <a:bodyPr wrap="square" rtlCol="0" anchor="ctr"/>
           <a:lstStyle/>
           <a:p>
-            <a:pPr indent="0" marL="0">
+            <a:pPr marL="0" indent="0">
               <a:buNone/>
             </a:pPr>
             <a:r>
@@ -17498,7 +17088,7 @@
           <a:bodyPr wrap="square" rtlCol="0" anchor="ctr"/>
           <a:lstStyle/>
           <a:p>
-            <a:pPr indent="0" marL="0">
+            <a:pPr marL="0" indent="0">
               <a:buNone/>
             </a:pPr>
             <a:r>
@@ -17537,7 +17127,7 @@
           <a:bodyPr wrap="square" rtlCol="0" anchor="ctr"/>
           <a:lstStyle/>
           <a:p>
-            <a:pPr indent="0" marL="0">
+            <a:pPr marL="0" indent="0">
               <a:buNone/>
             </a:pPr>
             <a:r>
@@ -17571,6 +17161,7 @@
         <a:solidFill>
           <a:srgbClr val="0A0F1E"/>
         </a:solidFill>
+        <a:effectLst/>
       </p:bgPr>
     </p:bg>
     <p:spTree>
@@ -17633,11 +17224,11 @@
           <a:bodyPr wrap="square" rtlCol="0" anchor="ctr"/>
           <a:lstStyle/>
           <a:p>
-            <a:pPr algn="l" indent="0" marL="0">
-              <a:buNone/>
-            </a:pPr>
-            <a:r>
-              <a:rPr lang="en-US" sz="800" b="1" spc="300" kern="0" dirty="0">
+            <a:pPr marL="0" indent="0" algn="l">
+              <a:buNone/>
+            </a:pPr>
+            <a:r>
+              <a:rPr lang="en-US" sz="800" b="1" kern="0" spc="300" dirty="0">
                 <a:solidFill>
                   <a:srgbClr val="00D4FF"/>
                 </a:solidFill>
@@ -17672,7 +17263,7 @@
           <a:bodyPr wrap="square" rtlCol="0" anchor="ctr"/>
           <a:lstStyle/>
           <a:p>
-            <a:pPr algn="l" indent="0" marL="0">
+            <a:pPr marL="0" indent="0" algn="l">
               <a:buNone/>
             </a:pPr>
             <a:r>
@@ -17717,7 +17308,7 @@
       </p:sp>
       <p:graphicFrame>
         <p:nvGraphicFramePr>
-          <p:cNvPr id="6" name="Chart 0" descr=""/>
+          <p:cNvPr id="6" name="Chart 0"/>
           <p:cNvGraphicFramePr/>
           <p:nvPr/>
         </p:nvGraphicFramePr>
@@ -17725,15 +17316,15 @@
           <a:off x="411480" y="1078992"/>
           <a:ext cx="4114800" cy="2560320"/>
         </p:xfrm>
-        <a:graphic xmlns:a="http://schemas.openxmlformats.org/drawingml/2006/main">
+        <a:graphic>
           <a:graphicData uri="http://schemas.openxmlformats.org/drawingml/2006/chart">
-            <c:chart xmlns:c="http://schemas.openxmlformats.org/drawingml/2006/chart" r:id="rId1"/>
+            <c:chart xmlns:c="http://schemas.openxmlformats.org/drawingml/2006/chart" xmlns:r="http://schemas.openxmlformats.org/officeDocument/2006/relationships" r:id="rId3"/>
           </a:graphicData>
         </a:graphic>
       </p:graphicFrame>
       <p:graphicFrame>
         <p:nvGraphicFramePr>
-          <p:cNvPr id="7" name="Chart 1" descr=""/>
+          <p:cNvPr id="7" name="Chart 1"/>
           <p:cNvGraphicFramePr/>
           <p:nvPr/>
         </p:nvGraphicFramePr>
@@ -17741,9 +17332,9 @@
           <a:off x="4663440" y="1078992"/>
           <a:ext cx="4114800" cy="2560320"/>
         </p:xfrm>
-        <a:graphic xmlns:a="http://schemas.openxmlformats.org/drawingml/2006/main">
+        <a:graphic>
           <a:graphicData uri="http://schemas.openxmlformats.org/drawingml/2006/chart">
-            <c:chart xmlns:c="http://schemas.openxmlformats.org/drawingml/2006/chart" r:id="rId2"/>
+            <c:chart xmlns:c="http://schemas.openxmlformats.org/drawingml/2006/chart" xmlns:r="http://schemas.openxmlformats.org/officeDocument/2006/relationships" r:id="rId4"/>
           </a:graphicData>
         </a:graphic>
       </p:graphicFrame>
@@ -17793,7 +17384,7 @@
           <a:bodyPr wrap="square" rtlCol="0" anchor="ctr"/>
           <a:lstStyle/>
           <a:p>
-            <a:pPr algn="ctr" indent="0" marL="0">
+            <a:pPr marL="0" indent="0" algn="ctr">
               <a:buNone/>
             </a:pPr>
             <a:r>
@@ -17832,7 +17423,7 @@
           <a:bodyPr wrap="square" rtlCol="0" anchor="ctr"/>
           <a:lstStyle/>
           <a:p>
-            <a:pPr algn="ctr" indent="0" marL="0">
+            <a:pPr marL="0" indent="0" algn="ctr">
               <a:buNone/>
             </a:pPr>
             <a:r>
@@ -17871,7 +17462,7 @@
           <a:bodyPr wrap="square" rtlCol="0" anchor="ctr"/>
           <a:lstStyle/>
           <a:p>
-            <a:pPr algn="ctr" indent="0" marL="0">
+            <a:pPr marL="0" indent="0" algn="ctr">
               <a:buNone/>
             </a:pPr>
             <a:r>
@@ -17935,7 +17526,7 @@
           <a:bodyPr wrap="square" rtlCol="0" anchor="ctr"/>
           <a:lstStyle/>
           <a:p>
-            <a:pPr algn="ctr" indent="0" marL="0">
+            <a:pPr marL="0" indent="0" algn="ctr">
               <a:buNone/>
             </a:pPr>
             <a:r>
@@ -17974,7 +17565,7 @@
           <a:bodyPr wrap="square" rtlCol="0" anchor="ctr"/>
           <a:lstStyle/>
           <a:p>
-            <a:pPr algn="ctr" indent="0" marL="0">
+            <a:pPr marL="0" indent="0" algn="ctr">
               <a:buNone/>
             </a:pPr>
             <a:r>
@@ -18013,7 +17604,7 @@
           <a:bodyPr wrap="square" rtlCol="0" anchor="ctr"/>
           <a:lstStyle/>
           <a:p>
-            <a:pPr algn="ctr" indent="0" marL="0">
+            <a:pPr marL="0" indent="0" algn="ctr">
               <a:buNone/>
             </a:pPr>
             <a:r>
@@ -18077,7 +17668,7 @@
           <a:bodyPr wrap="square" rtlCol="0" anchor="ctr"/>
           <a:lstStyle/>
           <a:p>
-            <a:pPr algn="ctr" indent="0" marL="0">
+            <a:pPr marL="0" indent="0" algn="ctr">
               <a:buNone/>
             </a:pPr>
             <a:r>
@@ -18116,7 +17707,7 @@
           <a:bodyPr wrap="square" rtlCol="0" anchor="ctr"/>
           <a:lstStyle/>
           <a:p>
-            <a:pPr algn="ctr" indent="0" marL="0">
+            <a:pPr marL="0" indent="0" algn="ctr">
               <a:buNone/>
             </a:pPr>
             <a:r>
@@ -18155,7 +17746,7 @@
           <a:bodyPr wrap="square" rtlCol="0" anchor="ctr"/>
           <a:lstStyle/>
           <a:p>
-            <a:pPr algn="ctr" indent="0" marL="0">
+            <a:pPr marL="0" indent="0" algn="ctr">
               <a:buNone/>
             </a:pPr>
             <a:r>
@@ -18219,7 +17810,7 @@
           <a:bodyPr wrap="square" rtlCol="0" anchor="ctr"/>
           <a:lstStyle/>
           <a:p>
-            <a:pPr algn="ctr" indent="0" marL="0">
+            <a:pPr marL="0" indent="0" algn="ctr">
               <a:buNone/>
             </a:pPr>
             <a:r>
@@ -18258,7 +17849,7 @@
           <a:bodyPr wrap="square" rtlCol="0" anchor="ctr"/>
           <a:lstStyle/>
           <a:p>
-            <a:pPr algn="ctr" indent="0" marL="0">
+            <a:pPr marL="0" indent="0" algn="ctr">
               <a:buNone/>
             </a:pPr>
             <a:r>
@@ -18297,7 +17888,7 @@
           <a:bodyPr wrap="square" rtlCol="0" anchor="ctr"/>
           <a:lstStyle/>
           <a:p>
-            <a:pPr algn="ctr" indent="0" marL="0">
+            <a:pPr marL="0" indent="0" algn="ctr">
               <a:buNone/>
             </a:pPr>
             <a:r>
@@ -18336,11 +17927,11 @@
           <a:bodyPr wrap="square" rtlCol="0" anchor="ctr"/>
           <a:lstStyle/>
           <a:p>
-            <a:pPr indent="0" marL="0">
-              <a:buNone/>
-            </a:pPr>
-            <a:r>
-              <a:rPr lang="en-US" sz="750" b="1" spc="100" kern="0" dirty="0">
+            <a:pPr marL="0" indent="0">
+              <a:buNone/>
+            </a:pPr>
+            <a:r>
+              <a:rPr lang="en-US" sz="750" b="1" kern="0" spc="100" dirty="0">
                 <a:solidFill>
                   <a:srgbClr val="7B8DB0"/>
                 </a:solidFill>
@@ -18370,6 +17961,7 @@
         <a:solidFill>
           <a:srgbClr val="0A0F1E"/>
         </a:solidFill>
+        <a:effectLst/>
       </p:bgPr>
     </p:bg>
     <p:spTree>
@@ -18432,11 +18024,11 @@
           <a:bodyPr wrap="square" rtlCol="0" anchor="ctr"/>
           <a:lstStyle/>
           <a:p>
-            <a:pPr algn="l" indent="0" marL="0">
-              <a:buNone/>
-            </a:pPr>
-            <a:r>
-              <a:rPr lang="en-US" sz="800" b="1" spc="300" kern="0" dirty="0">
+            <a:pPr marL="0" indent="0" algn="l">
+              <a:buNone/>
+            </a:pPr>
+            <a:r>
+              <a:rPr lang="en-US" sz="800" b="1" kern="0" spc="300" dirty="0">
                 <a:solidFill>
                   <a:srgbClr val="00D4FF"/>
                 </a:solidFill>
@@ -18471,7 +18063,7 @@
           <a:bodyPr wrap="square" rtlCol="0" anchor="ctr"/>
           <a:lstStyle/>
           <a:p>
-            <a:pPr algn="l" indent="0" marL="0">
+            <a:pPr marL="0" indent="0" algn="l">
               <a:buNone/>
             </a:pPr>
             <a:r>
@@ -18610,7 +18202,7 @@
           <a:bodyPr wrap="square" rtlCol="0" anchor="ctr"/>
           <a:lstStyle/>
           <a:p>
-            <a:pPr algn="ctr" indent="0" marL="0">
+            <a:pPr marL="0" indent="0" algn="ctr">
               <a:buNone/>
             </a:pPr>
             <a:r>
@@ -18649,7 +18241,7 @@
           <a:bodyPr wrap="square" rtlCol="0" anchor="ctr"/>
           <a:lstStyle/>
           <a:p>
-            <a:pPr algn="ctr" indent="0" marL="0">
+            <a:pPr marL="0" indent="0" algn="ctr">
               <a:buNone/>
             </a:pPr>
             <a:r>
@@ -18666,7 +18258,7 @@
             <a:endParaRPr lang="en-US" sz="1100" dirty="0"/>
           </a:p>
           <a:p>
-            <a:pPr algn="ctr" indent="0" marL="0">
+            <a:pPr marL="0" indent="0" algn="ctr">
               <a:buNone/>
             </a:pPr>
             <a:r>
@@ -18705,7 +18297,7 @@
           <a:bodyPr wrap="square" rtlCol="0" anchor="ctr"/>
           <a:lstStyle/>
           <a:p>
-            <a:pPr algn="ctr" indent="0" marL="0">
+            <a:pPr marL="0" indent="0" algn="ctr">
               <a:buNone/>
             </a:pPr>
             <a:r>
@@ -18722,7 +18314,7 @@
             <a:endParaRPr lang="en-US" sz="900" dirty="0"/>
           </a:p>
           <a:p>
-            <a:pPr algn="ctr" indent="0" marL="0">
+            <a:pPr marL="0" indent="0" algn="ctr">
               <a:buNone/>
             </a:pPr>
             <a:r>
@@ -18739,7 +18331,7 @@
             <a:endParaRPr lang="en-US" sz="900" dirty="0"/>
           </a:p>
           <a:p>
-            <a:pPr algn="ctr" indent="0" marL="0">
+            <a:pPr marL="0" indent="0" algn="ctr">
               <a:buNone/>
             </a:pPr>
             <a:r>
@@ -18878,7 +18470,7 @@
           <a:bodyPr wrap="square" rtlCol="0" anchor="ctr"/>
           <a:lstStyle/>
           <a:p>
-            <a:pPr algn="ctr" indent="0" marL="0">
+            <a:pPr marL="0" indent="0" algn="ctr">
               <a:buNone/>
             </a:pPr>
             <a:r>
@@ -18917,7 +18509,7 @@
           <a:bodyPr wrap="square" rtlCol="0" anchor="ctr"/>
           <a:lstStyle/>
           <a:p>
-            <a:pPr algn="ctr" indent="0" marL="0">
+            <a:pPr marL="0" indent="0" algn="ctr">
               <a:buNone/>
             </a:pPr>
             <a:r>
@@ -18934,7 +18526,7 @@
             <a:endParaRPr lang="en-US" sz="1100" dirty="0"/>
           </a:p>
           <a:p>
-            <a:pPr algn="ctr" indent="0" marL="0">
+            <a:pPr marL="0" indent="0" algn="ctr">
               <a:buNone/>
             </a:pPr>
             <a:r>
@@ -18973,7 +18565,7 @@
           <a:bodyPr wrap="square" rtlCol="0" anchor="ctr"/>
           <a:lstStyle/>
           <a:p>
-            <a:pPr algn="ctr" indent="0" marL="0">
+            <a:pPr marL="0" indent="0" algn="ctr">
               <a:buNone/>
             </a:pPr>
             <a:r>
@@ -18990,7 +18582,7 @@
             <a:endParaRPr lang="en-US" sz="900" dirty="0"/>
           </a:p>
           <a:p>
-            <a:pPr algn="ctr" indent="0" marL="0">
+            <a:pPr marL="0" indent="0" algn="ctr">
               <a:buNone/>
             </a:pPr>
             <a:r>
@@ -19007,7 +18599,7 @@
             <a:endParaRPr lang="en-US" sz="900" dirty="0"/>
           </a:p>
           <a:p>
-            <a:pPr algn="ctr" indent="0" marL="0">
+            <a:pPr marL="0" indent="0" algn="ctr">
               <a:buNone/>
             </a:pPr>
             <a:r>
@@ -19146,7 +18738,7 @@
           <a:bodyPr wrap="square" rtlCol="0" anchor="ctr"/>
           <a:lstStyle/>
           <a:p>
-            <a:pPr algn="ctr" indent="0" marL="0">
+            <a:pPr marL="0" indent="0" algn="ctr">
               <a:buNone/>
             </a:pPr>
             <a:r>
@@ -19185,7 +18777,7 @@
           <a:bodyPr wrap="square" rtlCol="0" anchor="ctr"/>
           <a:lstStyle/>
           <a:p>
-            <a:pPr algn="ctr" indent="0" marL="0">
+            <a:pPr marL="0" indent="0" algn="ctr">
               <a:buNone/>
             </a:pPr>
             <a:r>
@@ -19202,7 +18794,7 @@
             <a:endParaRPr lang="en-US" sz="1100" dirty="0"/>
           </a:p>
           <a:p>
-            <a:pPr algn="ctr" indent="0" marL="0">
+            <a:pPr marL="0" indent="0" algn="ctr">
               <a:buNone/>
             </a:pPr>
             <a:r>
@@ -19241,7 +18833,7 @@
           <a:bodyPr wrap="square" rtlCol="0" anchor="ctr"/>
           <a:lstStyle/>
           <a:p>
-            <a:pPr algn="ctr" indent="0" marL="0">
+            <a:pPr marL="0" indent="0" algn="ctr">
               <a:buNone/>
             </a:pPr>
             <a:r>
@@ -19258,7 +18850,7 @@
             <a:endParaRPr lang="en-US" sz="900" dirty="0"/>
           </a:p>
           <a:p>
-            <a:pPr algn="ctr" indent="0" marL="0">
+            <a:pPr marL="0" indent="0" algn="ctr">
               <a:buNone/>
             </a:pPr>
             <a:r>
@@ -19275,7 +18867,7 @@
             <a:endParaRPr lang="en-US" sz="900" dirty="0"/>
           </a:p>
           <a:p>
-            <a:pPr algn="ctr" indent="0" marL="0">
+            <a:pPr marL="0" indent="0" algn="ctr">
               <a:buNone/>
             </a:pPr>
             <a:r>
@@ -19414,7 +19006,7 @@
           <a:bodyPr wrap="square" rtlCol="0" anchor="ctr"/>
           <a:lstStyle/>
           <a:p>
-            <a:pPr algn="ctr" indent="0" marL="0">
+            <a:pPr marL="0" indent="0" algn="ctr">
               <a:buNone/>
             </a:pPr>
             <a:r>
@@ -19453,7 +19045,7 @@
           <a:bodyPr wrap="square" rtlCol="0" anchor="ctr"/>
           <a:lstStyle/>
           <a:p>
-            <a:pPr algn="ctr" indent="0" marL="0">
+            <a:pPr marL="0" indent="0" algn="ctr">
               <a:buNone/>
             </a:pPr>
             <a:r>
@@ -19470,7 +19062,7 @@
             <a:endParaRPr lang="en-US" sz="1100" dirty="0"/>
           </a:p>
           <a:p>
-            <a:pPr algn="ctr" indent="0" marL="0">
+            <a:pPr marL="0" indent="0" algn="ctr">
               <a:buNone/>
             </a:pPr>
             <a:r>
@@ -19509,7 +19101,7 @@
           <a:bodyPr wrap="square" rtlCol="0" anchor="ctr"/>
           <a:lstStyle/>
           <a:p>
-            <a:pPr algn="ctr" indent="0" marL="0">
+            <a:pPr marL="0" indent="0" algn="ctr">
               <a:buNone/>
             </a:pPr>
             <a:r>
@@ -19526,7 +19118,7 @@
             <a:endParaRPr lang="en-US" sz="900" dirty="0"/>
           </a:p>
           <a:p>
-            <a:pPr algn="ctr" indent="0" marL="0">
+            <a:pPr marL="0" indent="0" algn="ctr">
               <a:buNone/>
             </a:pPr>
             <a:r>
@@ -19543,7 +19135,7 @@
             <a:endParaRPr lang="en-US" sz="900" dirty="0"/>
           </a:p>
           <a:p>
-            <a:pPr algn="ctr" indent="0" marL="0">
+            <a:pPr marL="0" indent="0" algn="ctr">
               <a:buNone/>
             </a:pPr>
             <a:r>
@@ -19682,7 +19274,7 @@
           <a:bodyPr wrap="square" rtlCol="0" anchor="ctr"/>
           <a:lstStyle/>
           <a:p>
-            <a:pPr algn="ctr" indent="0" marL="0">
+            <a:pPr marL="0" indent="0" algn="ctr">
               <a:buNone/>
             </a:pPr>
             <a:r>
@@ -19721,7 +19313,7 @@
           <a:bodyPr wrap="square" rtlCol="0" anchor="ctr"/>
           <a:lstStyle/>
           <a:p>
-            <a:pPr algn="ctr" indent="0" marL="0">
+            <a:pPr marL="0" indent="0" algn="ctr">
               <a:buNone/>
             </a:pPr>
             <a:r>
@@ -19738,7 +19330,7 @@
             <a:endParaRPr lang="en-US" sz="1100" dirty="0"/>
           </a:p>
           <a:p>
-            <a:pPr algn="ctr" indent="0" marL="0">
+            <a:pPr marL="0" indent="0" algn="ctr">
               <a:buNone/>
             </a:pPr>
             <a:r>
@@ -19777,7 +19369,7 @@
           <a:bodyPr wrap="square" rtlCol="0" anchor="ctr"/>
           <a:lstStyle/>
           <a:p>
-            <a:pPr algn="ctr" indent="0" marL="0">
+            <a:pPr marL="0" indent="0" algn="ctr">
               <a:buNone/>
             </a:pPr>
             <a:r>
@@ -19794,7 +19386,7 @@
             <a:endParaRPr lang="en-US" sz="900" dirty="0"/>
           </a:p>
           <a:p>
-            <a:pPr algn="ctr" indent="0" marL="0">
+            <a:pPr marL="0" indent="0" algn="ctr">
               <a:buNone/>
             </a:pPr>
             <a:r>
@@ -19811,7 +19403,7 @@
             <a:endParaRPr lang="en-US" sz="900" dirty="0"/>
           </a:p>
           <a:p>
-            <a:pPr algn="ctr" indent="0" marL="0">
+            <a:pPr marL="0" indent="0" algn="ctr">
               <a:buNone/>
             </a:pPr>
             <a:r>
@@ -19850,11 +19442,11 @@
           <a:bodyPr wrap="square" rtlCol="0" anchor="ctr"/>
           <a:lstStyle/>
           <a:p>
-            <a:pPr indent="0" marL="0">
-              <a:buNone/>
-            </a:pPr>
-            <a:r>
-              <a:rPr lang="en-US" sz="800" b="1" spc="200" kern="0" dirty="0">
+            <a:pPr marL="0" indent="0">
+              <a:buNone/>
+            </a:pPr>
+            <a:r>
+              <a:rPr lang="en-US" sz="800" b="1" kern="0" spc="200" dirty="0">
                 <a:solidFill>
                   <a:srgbClr val="00D4FF"/>
                 </a:solidFill>
@@ -19914,7 +19506,7 @@
           <a:bodyPr wrap="square" rtlCol="0" anchor="ctr"/>
           <a:lstStyle/>
           <a:p>
-            <a:pPr indent="0" marL="0">
+            <a:pPr marL="0" indent="0">
               <a:buNone/>
             </a:pPr>
             <a:r>
@@ -19953,7 +19545,7 @@
           <a:bodyPr wrap="square" rtlCol="0" anchor="ctr"/>
           <a:lstStyle/>
           <a:p>
-            <a:pPr indent="0" marL="0">
+            <a:pPr marL="0" indent="0">
               <a:buNone/>
             </a:pPr>
             <a:r>
@@ -20017,7 +19609,7 @@
           <a:bodyPr wrap="square" rtlCol="0" anchor="ctr"/>
           <a:lstStyle/>
           <a:p>
-            <a:pPr indent="0" marL="0">
+            <a:pPr marL="0" indent="0">
               <a:buNone/>
             </a:pPr>
             <a:r>
@@ -20056,7 +19648,7 @@
           <a:bodyPr wrap="square" rtlCol="0" anchor="ctr"/>
           <a:lstStyle/>
           <a:p>
-            <a:pPr indent="0" marL="0">
+            <a:pPr marL="0" indent="0">
               <a:buNone/>
             </a:pPr>
             <a:r>
@@ -20120,7 +19712,7 @@
           <a:bodyPr wrap="square" rtlCol="0" anchor="ctr"/>
           <a:lstStyle/>
           <a:p>
-            <a:pPr indent="0" marL="0">
+            <a:pPr marL="0" indent="0">
               <a:buNone/>
             </a:pPr>
             <a:r>
@@ -20159,7 +19751,7 @@
           <a:bodyPr wrap="square" rtlCol="0" anchor="ctr"/>
           <a:lstStyle/>
           <a:p>
-            <a:pPr indent="0" marL="0">
+            <a:pPr marL="0" indent="0">
               <a:buNone/>
             </a:pPr>
             <a:r>
@@ -20223,7 +19815,7 @@
           <a:bodyPr wrap="square" rtlCol="0" anchor="ctr"/>
           <a:lstStyle/>
           <a:p>
-            <a:pPr indent="0" marL="0">
+            <a:pPr marL="0" indent="0">
               <a:buNone/>
             </a:pPr>
             <a:r>
@@ -20262,7 +19854,7 @@
           <a:bodyPr wrap="square" rtlCol="0" anchor="ctr"/>
           <a:lstStyle/>
           <a:p>
-            <a:pPr indent="0" marL="0">
+            <a:pPr marL="0" indent="0">
               <a:buNone/>
             </a:pPr>
             <a:r>
@@ -20326,7 +19918,7 @@
           <a:bodyPr wrap="square" rtlCol="0" anchor="ctr"/>
           <a:lstStyle/>
           <a:p>
-            <a:pPr indent="0" marL="0">
+            <a:pPr marL="0" indent="0">
               <a:buNone/>
             </a:pPr>
             <a:r>
@@ -20365,7 +19957,7 @@
           <a:bodyPr wrap="square" rtlCol="0" anchor="ctr"/>
           <a:lstStyle/>
           <a:p>
-            <a:pPr indent="0" marL="0">
+            <a:pPr marL="0" indent="0">
               <a:buNone/>
             </a:pPr>
             <a:r>
@@ -20429,7 +20021,7 @@
           <a:bodyPr wrap="square" rtlCol="0" anchor="ctr"/>
           <a:lstStyle/>
           <a:p>
-            <a:pPr indent="0" marL="0">
+            <a:pPr marL="0" indent="0">
               <a:buNone/>
             </a:pPr>
             <a:r>
@@ -20468,7 +20060,7 @@
           <a:bodyPr wrap="square" rtlCol="0" anchor="ctr"/>
           <a:lstStyle/>
           <a:p>
-            <a:pPr indent="0" marL="0">
+            <a:pPr marL="0" indent="0">
               <a:buNone/>
             </a:pPr>
             <a:r>
@@ -20532,7 +20124,7 @@
           <a:bodyPr wrap="square" rtlCol="0" anchor="ctr"/>
           <a:lstStyle/>
           <a:p>
-            <a:pPr indent="0" marL="0">
+            <a:pPr marL="0" indent="0">
               <a:buNone/>
             </a:pPr>
             <a:r>
@@ -20571,7 +20163,7 @@
           <a:bodyPr wrap="square" rtlCol="0" anchor="ctr"/>
           <a:lstStyle/>
           <a:p>
-            <a:pPr indent="0" marL="0">
+            <a:pPr marL="0" indent="0">
               <a:buNone/>
             </a:pPr>
             <a:r>
@@ -20635,7 +20227,7 @@
           <a:bodyPr wrap="square" rtlCol="0" anchor="ctr"/>
           <a:lstStyle/>
           <a:p>
-            <a:pPr indent="0" marL="0">
+            <a:pPr marL="0" indent="0">
               <a:buNone/>
             </a:pPr>
             <a:r>
@@ -20674,7 +20266,7 @@
           <a:bodyPr wrap="square" rtlCol="0" anchor="ctr"/>
           <a:lstStyle/>
           <a:p>
-            <a:pPr indent="0" marL="0">
+            <a:pPr marL="0" indent="0">
               <a:buNone/>
             </a:pPr>
             <a:r>
@@ -20708,6 +20300,7 @@
         <a:solidFill>
           <a:srgbClr val="0A0F1E"/>
         </a:solidFill>
+        <a:effectLst/>
       </p:bgPr>
     </p:bg>
     <p:spTree>
@@ -20770,11 +20363,11 @@
           <a:bodyPr wrap="square" rtlCol="0" anchor="ctr"/>
           <a:lstStyle/>
           <a:p>
-            <a:pPr algn="l" indent="0" marL="0">
-              <a:buNone/>
-            </a:pPr>
-            <a:r>
-              <a:rPr lang="en-US" sz="800" b="1" spc="300" kern="0" dirty="0">
+            <a:pPr marL="0" indent="0" algn="l">
+              <a:buNone/>
+            </a:pPr>
+            <a:r>
+              <a:rPr lang="en-US" sz="800" b="1" kern="0" spc="300" dirty="0">
                 <a:solidFill>
                   <a:srgbClr val="00D4FF"/>
                 </a:solidFill>
@@ -20809,7 +20402,7 @@
           <a:bodyPr wrap="square" rtlCol="0" anchor="ctr"/>
           <a:lstStyle/>
           <a:p>
-            <a:pPr algn="l" indent="0" marL="0">
+            <a:pPr marL="0" indent="0" algn="l">
               <a:buNone/>
             </a:pPr>
             <a:r>
@@ -20854,7 +20447,7 @@
       </p:sp>
       <p:graphicFrame>
         <p:nvGraphicFramePr>
-          <p:cNvPr id="6" name="Chart 0" descr=""/>
+          <p:cNvPr id="6" name="Chart 0"/>
           <p:cNvGraphicFramePr/>
           <p:nvPr/>
         </p:nvGraphicFramePr>
@@ -20862,15 +20455,15 @@
           <a:off x="411480" y="1051560"/>
           <a:ext cx="4114800" cy="2194560"/>
         </p:xfrm>
-        <a:graphic xmlns:a="http://schemas.openxmlformats.org/drawingml/2006/main">
+        <a:graphic>
           <a:graphicData uri="http://schemas.openxmlformats.org/drawingml/2006/chart">
-            <c:chart xmlns:c="http://schemas.openxmlformats.org/drawingml/2006/chart" r:id="rId1"/>
+            <c:chart xmlns:c="http://schemas.openxmlformats.org/drawingml/2006/chart" xmlns:r="http://schemas.openxmlformats.org/officeDocument/2006/relationships" r:id="rId3"/>
           </a:graphicData>
         </a:graphic>
       </p:graphicFrame>
       <p:graphicFrame>
         <p:nvGraphicFramePr>
-          <p:cNvPr id="7" name="Chart 1" descr=""/>
+          <p:cNvPr id="7" name="Chart 1"/>
           <p:cNvGraphicFramePr/>
           <p:nvPr/>
         </p:nvGraphicFramePr>
@@ -20878,9 +20471,9 @@
           <a:off x="4663440" y="1051560"/>
           <a:ext cx="4114800" cy="2194560"/>
         </p:xfrm>
-        <a:graphic xmlns:a="http://schemas.openxmlformats.org/drawingml/2006/main">
+        <a:graphic>
           <a:graphicData uri="http://schemas.openxmlformats.org/drawingml/2006/chart">
-            <c:chart xmlns:c="http://schemas.openxmlformats.org/drawingml/2006/chart" r:id="rId2"/>
+            <c:chart xmlns:c="http://schemas.openxmlformats.org/drawingml/2006/chart" xmlns:r="http://schemas.openxmlformats.org/officeDocument/2006/relationships" r:id="rId4"/>
           </a:graphicData>
         </a:graphic>
       </p:graphicFrame>
@@ -20905,11 +20498,11 @@
           <a:bodyPr wrap="square" rtlCol="0" anchor="ctr"/>
           <a:lstStyle/>
           <a:p>
-            <a:pPr indent="0" marL="0">
-              <a:buNone/>
-            </a:pPr>
-            <a:r>
-              <a:rPr lang="en-US" sz="800" b="1" spc="200" kern="0" dirty="0">
+            <a:pPr marL="0" indent="0">
+              <a:buNone/>
+            </a:pPr>
+            <a:r>
+              <a:rPr lang="en-US" sz="800" b="1" kern="0" spc="200" dirty="0">
                 <a:solidFill>
                   <a:srgbClr val="00D4FF"/>
                 </a:solidFill>
@@ -20946,11 +20539,41 @@
             <a:tbl>
               <a:tblPr/>
               <a:tblGrid>
-                <a:gridCol w="2560320"/>
-                <a:gridCol w="1371600"/>
-                <a:gridCol w="1188720"/>
-                <a:gridCol w="1645920"/>
-                <a:gridCol w="1554480"/>
+                <a:gridCol w="2560320">
+                  <a:extLst>
+                    <a:ext uri="{9D8B030D-6E8A-4147-A177-3AD203B41FA5}">
+                      <a16:colId xmlns:a16="http://schemas.microsoft.com/office/drawing/2014/main" val="20000"/>
+                    </a:ext>
+                  </a:extLst>
+                </a:gridCol>
+                <a:gridCol w="1371600">
+                  <a:extLst>
+                    <a:ext uri="{9D8B030D-6E8A-4147-A177-3AD203B41FA5}">
+                      <a16:colId xmlns:a16="http://schemas.microsoft.com/office/drawing/2014/main" val="20001"/>
+                    </a:ext>
+                  </a:extLst>
+                </a:gridCol>
+                <a:gridCol w="1188720">
+                  <a:extLst>
+                    <a:ext uri="{9D8B030D-6E8A-4147-A177-3AD203B41FA5}">
+                      <a16:colId xmlns:a16="http://schemas.microsoft.com/office/drawing/2014/main" val="20002"/>
+                    </a:ext>
+                  </a:extLst>
+                </a:gridCol>
+                <a:gridCol w="1645920">
+                  <a:extLst>
+                    <a:ext uri="{9D8B030D-6E8A-4147-A177-3AD203B41FA5}">
+                      <a16:colId xmlns:a16="http://schemas.microsoft.com/office/drawing/2014/main" val="20003"/>
+                    </a:ext>
+                  </a:extLst>
+                </a:gridCol>
+                <a:gridCol w="1554480">
+                  <a:extLst>
+                    <a:ext uri="{9D8B030D-6E8A-4147-A177-3AD203B41FA5}">
+                      <a16:colId xmlns:a16="http://schemas.microsoft.com/office/drawing/2014/main" val="20004"/>
+                    </a:ext>
+                  </a:extLst>
+                </a:gridCol>
               </a:tblGrid>
               <a:tr h="256032">
                 <a:tc>
@@ -20958,7 +20581,7 @@
                     <a:bodyPr/>
                     <a:lstStyle/>
                     <a:p>
-                      <a:pPr algn="ctr" indent="0" marL="0">
+                      <a:pPr marL="0" indent="0" algn="ctr">
                         <a:buNone/>
                       </a:pPr>
                       <a:r>
@@ -21002,7 +20625,7 @@
                     <a:bodyPr/>
                     <a:lstStyle/>
                     <a:p>
-                      <a:pPr algn="ctr" indent="0" marL="0">
+                      <a:pPr marL="0" indent="0" algn="ctr">
                         <a:buNone/>
                       </a:pPr>
                       <a:r>
@@ -21046,7 +20669,7 @@
                     <a:bodyPr/>
                     <a:lstStyle/>
                     <a:p>
-                      <a:pPr algn="ctr" indent="0" marL="0">
+                      <a:pPr marL="0" indent="0" algn="ctr">
                         <a:buNone/>
                       </a:pPr>
                       <a:r>
@@ -21090,7 +20713,7 @@
                     <a:bodyPr/>
                     <a:lstStyle/>
                     <a:p>
-                      <a:pPr algn="ctr" indent="0" marL="0">
+                      <a:pPr marL="0" indent="0" algn="ctr">
                         <a:buNone/>
                       </a:pPr>
                       <a:r>
@@ -21134,7 +20757,7 @@
                     <a:bodyPr/>
                     <a:lstStyle/>
                     <a:p>
-                      <a:pPr algn="ctr" indent="0" marL="0">
+                      <a:pPr marL="0" indent="0" algn="ctr">
                         <a:buNone/>
                       </a:pPr>
                       <a:r>
@@ -21173,6 +20796,11 @@
                     </a:solidFill>
                   </a:tcPr>
                 </a:tc>
+                <a:extLst>
+                  <a:ext uri="{0D108BD9-81ED-4DB2-BD59-A6C34878D82A}">
+                    <a16:rowId xmlns:a16="http://schemas.microsoft.com/office/drawing/2014/main" val="10000"/>
+                  </a:ext>
+                </a:extLst>
               </a:tr>
               <a:tr h="256032">
                 <a:tc>
@@ -21180,7 +20808,7 @@
                     <a:bodyPr/>
                     <a:lstStyle/>
                     <a:p>
-                      <a:pPr indent="0" marL="0">
+                      <a:pPr marL="0" indent="0">
                         <a:buNone/>
                       </a:pPr>
                       <a:r>
@@ -21224,7 +20852,7 @@
                     <a:bodyPr/>
                     <a:lstStyle/>
                     <a:p>
-                      <a:pPr algn="ctr" indent="0" marL="0">
+                      <a:pPr marL="0" indent="0" algn="ctr">
                         <a:buNone/>
                       </a:pPr>
                       <a:r>
@@ -21268,7 +20896,7 @@
                     <a:bodyPr/>
                     <a:lstStyle/>
                     <a:p>
-                      <a:pPr algn="ctr" indent="0" marL="0">
+                      <a:pPr marL="0" indent="0" algn="ctr">
                         <a:buNone/>
                       </a:pPr>
                       <a:r>
@@ -21312,7 +20940,7 @@
                     <a:bodyPr/>
                     <a:lstStyle/>
                     <a:p>
-                      <a:pPr algn="ctr" indent="0" marL="0">
+                      <a:pPr marL="0" indent="0" algn="ctr">
                         <a:buNone/>
                       </a:pPr>
                       <a:r>
@@ -21356,7 +20984,7 @@
                     <a:bodyPr/>
                     <a:lstStyle/>
                     <a:p>
-                      <a:pPr algn="ctr" indent="0" marL="0">
+                      <a:pPr marL="0" indent="0" algn="ctr">
                         <a:buNone/>
                       </a:pPr>
                       <a:r>
@@ -21395,6 +21023,11 @@
                     </a:solidFill>
                   </a:tcPr>
                 </a:tc>
+                <a:extLst>
+                  <a:ext uri="{0D108BD9-81ED-4DB2-BD59-A6C34878D82A}">
+                    <a16:rowId xmlns:a16="http://schemas.microsoft.com/office/drawing/2014/main" val="10001"/>
+                  </a:ext>
+                </a:extLst>
               </a:tr>
               <a:tr h="256032">
                 <a:tc>
@@ -21402,7 +21035,7 @@
                     <a:bodyPr/>
                     <a:lstStyle/>
                     <a:p>
-                      <a:pPr indent="0" marL="0">
+                      <a:pPr marL="0" indent="0">
                         <a:buNone/>
                       </a:pPr>
                       <a:r>
@@ -21446,7 +21079,7 @@
                     <a:bodyPr/>
                     <a:lstStyle/>
                     <a:p>
-                      <a:pPr algn="ctr" indent="0" marL="0">
+                      <a:pPr marL="0" indent="0" algn="ctr">
                         <a:buNone/>
                       </a:pPr>
                       <a:r>
@@ -21490,7 +21123,7 @@
                     <a:bodyPr/>
                     <a:lstStyle/>
                     <a:p>
-                      <a:pPr algn="ctr" indent="0" marL="0">
+                      <a:pPr marL="0" indent="0" algn="ctr">
                         <a:buNone/>
                       </a:pPr>
                       <a:r>
@@ -21534,7 +21167,7 @@
                     <a:bodyPr/>
                     <a:lstStyle/>
                     <a:p>
-                      <a:pPr algn="ctr" indent="0" marL="0">
+                      <a:pPr marL="0" indent="0" algn="ctr">
                         <a:buNone/>
                       </a:pPr>
                       <a:r>
@@ -21578,7 +21211,7 @@
                     <a:bodyPr/>
                     <a:lstStyle/>
                     <a:p>
-                      <a:pPr algn="ctr" indent="0" marL="0">
+                      <a:pPr marL="0" indent="0" algn="ctr">
                         <a:buNone/>
                       </a:pPr>
                       <a:r>
@@ -21617,6 +21250,11 @@
                     </a:solidFill>
                   </a:tcPr>
                 </a:tc>
+                <a:extLst>
+                  <a:ext uri="{0D108BD9-81ED-4DB2-BD59-A6C34878D82A}">
+                    <a16:rowId xmlns:a16="http://schemas.microsoft.com/office/drawing/2014/main" val="10002"/>
+                  </a:ext>
+                </a:extLst>
               </a:tr>
               <a:tr h="256032">
                 <a:tc>
@@ -21624,7 +21262,7 @@
                     <a:bodyPr/>
                     <a:lstStyle/>
                     <a:p>
-                      <a:pPr indent="0" marL="0">
+                      <a:pPr marL="0" indent="0">
                         <a:buNone/>
                       </a:pPr>
                       <a:r>
@@ -21668,7 +21306,7 @@
                     <a:bodyPr/>
                     <a:lstStyle/>
                     <a:p>
-                      <a:pPr algn="ctr" indent="0" marL="0">
+                      <a:pPr marL="0" indent="0" algn="ctr">
                         <a:buNone/>
                       </a:pPr>
                       <a:r>
@@ -21712,7 +21350,7 @@
                     <a:bodyPr/>
                     <a:lstStyle/>
                     <a:p>
-                      <a:pPr algn="ctr" indent="0" marL="0">
+                      <a:pPr marL="0" indent="0" algn="ctr">
                         <a:buNone/>
                       </a:pPr>
                       <a:r>
@@ -21756,7 +21394,7 @@
                     <a:bodyPr/>
                     <a:lstStyle/>
                     <a:p>
-                      <a:pPr algn="ctr" indent="0" marL="0">
+                      <a:pPr marL="0" indent="0" algn="ctr">
                         <a:buNone/>
                       </a:pPr>
                       <a:r>
@@ -21800,7 +21438,7 @@
                     <a:bodyPr/>
                     <a:lstStyle/>
                     <a:p>
-                      <a:pPr algn="ctr" indent="0" marL="0">
+                      <a:pPr marL="0" indent="0" algn="ctr">
                         <a:buNone/>
                       </a:pPr>
                       <a:r>
@@ -21839,6 +21477,11 @@
                     </a:solidFill>
                   </a:tcPr>
                 </a:tc>
+                <a:extLst>
+                  <a:ext uri="{0D108BD9-81ED-4DB2-BD59-A6C34878D82A}">
+                    <a16:rowId xmlns:a16="http://schemas.microsoft.com/office/drawing/2014/main" val="10003"/>
+                  </a:ext>
+                </a:extLst>
               </a:tr>
               <a:tr h="256032">
                 <a:tc>
@@ -21846,7 +21489,7 @@
                     <a:bodyPr/>
                     <a:lstStyle/>
                     <a:p>
-                      <a:pPr indent="0" marL="0">
+                      <a:pPr marL="0" indent="0">
                         <a:buNone/>
                       </a:pPr>
                       <a:r>
@@ -21890,7 +21533,7 @@
                     <a:bodyPr/>
                     <a:lstStyle/>
                     <a:p>
-                      <a:pPr algn="ctr" indent="0" marL="0">
+                      <a:pPr marL="0" indent="0" algn="ctr">
                         <a:buNone/>
                       </a:pPr>
                       <a:r>
@@ -21934,7 +21577,7 @@
                     <a:bodyPr/>
                     <a:lstStyle/>
                     <a:p>
-                      <a:pPr algn="ctr" indent="0" marL="0">
+                      <a:pPr marL="0" indent="0" algn="ctr">
                         <a:buNone/>
                       </a:pPr>
                       <a:r>
@@ -21978,7 +21621,7 @@
                     <a:bodyPr/>
                     <a:lstStyle/>
                     <a:p>
-                      <a:pPr algn="ctr" indent="0" marL="0">
+                      <a:pPr marL="0" indent="0" algn="ctr">
                         <a:buNone/>
                       </a:pPr>
                       <a:r>
@@ -22022,7 +21665,7 @@
                     <a:bodyPr/>
                     <a:lstStyle/>
                     <a:p>
-                      <a:pPr algn="ctr" indent="0" marL="0">
+                      <a:pPr marL="0" indent="0" algn="ctr">
                         <a:buNone/>
                       </a:pPr>
                       <a:r>
@@ -22061,6 +21704,11 @@
                     </a:solidFill>
                   </a:tcPr>
                 </a:tc>
+                <a:extLst>
+                  <a:ext uri="{0D108BD9-81ED-4DB2-BD59-A6C34878D82A}">
+                    <a16:rowId xmlns:a16="http://schemas.microsoft.com/office/drawing/2014/main" val="10004"/>
+                  </a:ext>
+                </a:extLst>
               </a:tr>
             </a:tbl>
           </a:graphicData>
@@ -22367,4 +22015,299 @@
     </a:ext>
   </a:extLst>
 </a:theme>
+</file>
+
+<file path=ppt/theme/theme2.xml><?xml version="1.0" encoding="utf-8"?>
+<a:theme xmlns:a="http://schemas.openxmlformats.org/drawingml/2006/main" name="Office Theme">
+  <a:themeElements>
+    <a:clrScheme name="Office">
+      <a:dk1>
+        <a:sysClr val="windowText" lastClr="000000"/>
+      </a:dk1>
+      <a:lt1>
+        <a:sysClr val="window" lastClr="FFFFFF"/>
+      </a:lt1>
+      <a:dk2>
+        <a:srgbClr val="44546A"/>
+      </a:dk2>
+      <a:lt2>
+        <a:srgbClr val="E7E6E6"/>
+      </a:lt2>
+      <a:accent1>
+        <a:srgbClr val="4472C4"/>
+      </a:accent1>
+      <a:accent2>
+        <a:srgbClr val="ED7D31"/>
+      </a:accent2>
+      <a:accent3>
+        <a:srgbClr val="A5A5A5"/>
+      </a:accent3>
+      <a:accent4>
+        <a:srgbClr val="FFC000"/>
+      </a:accent4>
+      <a:accent5>
+        <a:srgbClr val="5B9BD5"/>
+      </a:accent5>
+      <a:accent6>
+        <a:srgbClr val="70AD47"/>
+      </a:accent6>
+      <a:hlink>
+        <a:srgbClr val="0563C1"/>
+      </a:hlink>
+      <a:folHlink>
+        <a:srgbClr val="954F72"/>
+      </a:folHlink>
+    </a:clrScheme>
+    <a:fontScheme name="Office">
+      <a:majorFont>
+        <a:latin typeface="Calibri Light" panose="020F0302020204030204"/>
+        <a:ea typeface=""/>
+        <a:cs typeface=""/>
+        <a:font script="Jpan" typeface="游ゴシック Light"/>
+        <a:font script="Hang" typeface="맑은 고딕"/>
+        <a:font script="Hans" typeface="等线 Light"/>
+        <a:font script="Hant" typeface="新細明體"/>
+        <a:font script="Arab" typeface="Times New Roman"/>
+        <a:font script="Hebr" typeface="Times New Roman"/>
+        <a:font script="Thai" typeface="Angsana New"/>
+        <a:font script="Ethi" typeface="Nyala"/>
+        <a:font script="Beng" typeface="Vrinda"/>
+        <a:font script="Gujr" typeface="Shruti"/>
+        <a:font script="Khmr" typeface="MoolBoran"/>
+        <a:font script="Knda" typeface="Tunga"/>
+        <a:font script="Guru" typeface="Raavi"/>
+        <a:font script="Cans" typeface="Euphemia"/>
+        <a:font script="Cher" typeface="Plantagenet Cherokee"/>
+        <a:font script="Yiii" typeface="Microsoft Yi Baiti"/>
+        <a:font script="Tibt" typeface="Microsoft Himalaya"/>
+        <a:font script="Thaa" typeface="MV Boli"/>
+        <a:font script="Deva" typeface="Mangal"/>
+        <a:font script="Telu" typeface="Gautami"/>
+        <a:font script="Taml" typeface="Latha"/>
+        <a:font script="Syrc" typeface="Estrangelo Edessa"/>
+        <a:font script="Orya" typeface="Kalinga"/>
+        <a:font script="Mlym" typeface="Kartika"/>
+        <a:font script="Laoo" typeface="DokChampa"/>
+        <a:font script="Sinh" typeface="Iskoola Pota"/>
+        <a:font script="Mong" typeface="Mongolian Baiti"/>
+        <a:font script="Viet" typeface="Times New Roman"/>
+        <a:font script="Uigh" typeface="Microsoft Uighur"/>
+        <a:font script="Geor" typeface="Sylfaen"/>
+        <a:font script="Armn" typeface="Arial"/>
+        <a:font script="Bugi" typeface="Leelawadee UI"/>
+        <a:font script="Bopo" typeface="Microsoft JhengHei"/>
+        <a:font script="Java" typeface="Javanese Text"/>
+        <a:font script="Lisu" typeface="Segoe UI"/>
+        <a:font script="Mymr" typeface="Myanmar Text"/>
+        <a:font script="Nkoo" typeface="Ebrima"/>
+        <a:font script="Olck" typeface="Nirmala UI"/>
+        <a:font script="Osma" typeface="Ebrima"/>
+        <a:font script="Phag" typeface="Phagspa"/>
+        <a:font script="Syrn" typeface="Estrangelo Edessa"/>
+        <a:font script="Syrj" typeface="Estrangelo Edessa"/>
+        <a:font script="Syre" typeface="Estrangelo Edessa"/>
+        <a:font script="Sora" typeface="Nirmala UI"/>
+        <a:font script="Tale" typeface="Microsoft Tai Le"/>
+        <a:font script="Talu" typeface="Microsoft New Tai Lue"/>
+        <a:font script="Tfng" typeface="Ebrima"/>
+      </a:majorFont>
+      <a:minorFont>
+        <a:latin typeface="Calibri" panose="020F0502020204030204"/>
+        <a:ea typeface=""/>
+        <a:cs typeface=""/>
+        <a:font script="Jpan" typeface="游ゴシック"/>
+        <a:font script="Hang" typeface="맑은 고딕"/>
+        <a:font script="Hans" typeface="等线"/>
+        <a:font script="Hant" typeface="新細明體"/>
+        <a:font script="Arab" typeface="Arial"/>
+        <a:font script="Hebr" typeface="Arial"/>
+        <a:font script="Thai" typeface="Cordia New"/>
+        <a:font script="Ethi" typeface="Nyala"/>
+        <a:font script="Beng" typeface="Vrinda"/>
+        <a:font script="Gujr" typeface="Shruti"/>
+        <a:font script="Khmr" typeface="DaunPenh"/>
+        <a:font script="Knda" typeface="Tunga"/>
+        <a:font script="Guru" typeface="Raavi"/>
+        <a:font script="Cans" typeface="Euphemia"/>
+        <a:font script="Cher" typeface="Plantagenet Cherokee"/>
+        <a:font script="Yiii" typeface="Microsoft Yi Baiti"/>
+        <a:font script="Tibt" typeface="Microsoft Himalaya"/>
+        <a:font script="Thaa" typeface="MV Boli"/>
+        <a:font script="Deva" typeface="Mangal"/>
+        <a:font script="Telu" typeface="Gautami"/>
+        <a:font script="Taml" typeface="Latha"/>
+        <a:font script="Syrc" typeface="Estrangelo Edessa"/>
+        <a:font script="Orya" typeface="Kalinga"/>
+        <a:font script="Mlym" typeface="Kartika"/>
+        <a:font script="Laoo" typeface="DokChampa"/>
+        <a:font script="Sinh" typeface="Iskoola Pota"/>
+        <a:font script="Mong" typeface="Mongolian Baiti"/>
+        <a:font script="Viet" typeface="Arial"/>
+        <a:font script="Uigh" typeface="Microsoft Uighur"/>
+        <a:font script="Geor" typeface="Sylfaen"/>
+        <a:font script="Armn" typeface="Arial"/>
+        <a:font script="Bugi" typeface="Leelawadee UI"/>
+        <a:font script="Bopo" typeface="Microsoft JhengHei"/>
+        <a:font script="Java" typeface="Javanese Text"/>
+        <a:font script="Lisu" typeface="Segoe UI"/>
+        <a:font script="Mymr" typeface="Myanmar Text"/>
+        <a:font script="Nkoo" typeface="Ebrima"/>
+        <a:font script="Olck" typeface="Nirmala UI"/>
+        <a:font script="Osma" typeface="Ebrima"/>
+        <a:font script="Phag" typeface="Phagspa"/>
+        <a:font script="Syrn" typeface="Estrangelo Edessa"/>
+        <a:font script="Syrj" typeface="Estrangelo Edessa"/>
+        <a:font script="Syre" typeface="Estrangelo Edessa"/>
+        <a:font script="Sora" typeface="Nirmala UI"/>
+        <a:font script="Tale" typeface="Microsoft Tai Le"/>
+        <a:font script="Talu" typeface="Microsoft New Tai Lue"/>
+        <a:font script="Tfng" typeface="Ebrima"/>
+      </a:minorFont>
+    </a:fontScheme>
+    <a:fmtScheme name="Office">
+      <a:fillStyleLst>
+        <a:solidFill>
+          <a:schemeClr val="phClr"/>
+        </a:solidFill>
+        <a:gradFill rotWithShape="1">
+          <a:gsLst>
+            <a:gs pos="0">
+              <a:schemeClr val="phClr">
+                <a:lumMod val="110000"/>
+                <a:satMod val="105000"/>
+                <a:tint val="67000"/>
+              </a:schemeClr>
+            </a:gs>
+            <a:gs pos="50000">
+              <a:schemeClr val="phClr">
+                <a:lumMod val="105000"/>
+                <a:satMod val="103000"/>
+                <a:tint val="73000"/>
+              </a:schemeClr>
+            </a:gs>
+            <a:gs pos="100000">
+              <a:schemeClr val="phClr">
+                <a:lumMod val="105000"/>
+                <a:satMod val="109000"/>
+                <a:tint val="81000"/>
+              </a:schemeClr>
+            </a:gs>
+          </a:gsLst>
+          <a:lin ang="5400000" scaled="0"/>
+        </a:gradFill>
+        <a:gradFill rotWithShape="1">
+          <a:gsLst>
+            <a:gs pos="0">
+              <a:schemeClr val="phClr">
+                <a:satMod val="103000"/>
+                <a:lumMod val="102000"/>
+                <a:tint val="94000"/>
+              </a:schemeClr>
+            </a:gs>
+            <a:gs pos="50000">
+              <a:schemeClr val="phClr">
+                <a:satMod val="110000"/>
+                <a:lumMod val="100000"/>
+                <a:shade val="100000"/>
+              </a:schemeClr>
+            </a:gs>
+            <a:gs pos="100000">
+              <a:schemeClr val="phClr">
+                <a:lumMod val="99000"/>
+                <a:satMod val="120000"/>
+                <a:shade val="78000"/>
+              </a:schemeClr>
+            </a:gs>
+          </a:gsLst>
+          <a:lin ang="5400000" scaled="0"/>
+        </a:gradFill>
+      </a:fillStyleLst>
+      <a:lnStyleLst>
+        <a:ln w="6350" cap="flat" cmpd="sng" algn="ctr">
+          <a:solidFill>
+            <a:schemeClr val="phClr"/>
+          </a:solidFill>
+          <a:prstDash val="solid"/>
+          <a:miter lim="800000"/>
+        </a:ln>
+        <a:ln w="12700" cap="flat" cmpd="sng" algn="ctr">
+          <a:solidFill>
+            <a:schemeClr val="phClr"/>
+          </a:solidFill>
+          <a:prstDash val="solid"/>
+          <a:miter lim="800000"/>
+        </a:ln>
+        <a:ln w="19050" cap="flat" cmpd="sng" algn="ctr">
+          <a:solidFill>
+            <a:schemeClr val="phClr"/>
+          </a:solidFill>
+          <a:prstDash val="solid"/>
+          <a:miter lim="800000"/>
+        </a:ln>
+      </a:lnStyleLst>
+      <a:effectStyleLst>
+        <a:effectStyle>
+          <a:effectLst/>
+        </a:effectStyle>
+        <a:effectStyle>
+          <a:effectLst/>
+        </a:effectStyle>
+        <a:effectStyle>
+          <a:effectLst>
+            <a:outerShdw blurRad="57150" dist="19050" dir="5400000" algn="ctr" rotWithShape="0">
+              <a:srgbClr val="000000">
+                <a:alpha val="63000"/>
+              </a:srgbClr>
+            </a:outerShdw>
+          </a:effectLst>
+        </a:effectStyle>
+      </a:effectStyleLst>
+      <a:bgFillStyleLst>
+        <a:solidFill>
+          <a:schemeClr val="phClr"/>
+        </a:solidFill>
+        <a:solidFill>
+          <a:schemeClr val="phClr">
+            <a:tint val="95000"/>
+            <a:satMod val="170000"/>
+          </a:schemeClr>
+        </a:solidFill>
+        <a:gradFill rotWithShape="1">
+          <a:gsLst>
+            <a:gs pos="0">
+              <a:schemeClr val="phClr">
+                <a:tint val="93000"/>
+                <a:satMod val="150000"/>
+                <a:shade val="98000"/>
+                <a:lumMod val="102000"/>
+              </a:schemeClr>
+            </a:gs>
+            <a:gs pos="50000">
+              <a:schemeClr val="phClr">
+                <a:tint val="98000"/>
+                <a:satMod val="130000"/>
+                <a:shade val="90000"/>
+                <a:lumMod val="103000"/>
+              </a:schemeClr>
+            </a:gs>
+            <a:gs pos="100000">
+              <a:schemeClr val="phClr">
+                <a:shade val="63000"/>
+                <a:satMod val="120000"/>
+              </a:schemeClr>
+            </a:gs>
+          </a:gsLst>
+          <a:lin ang="5400000" scaled="0"/>
+        </a:gradFill>
+      </a:bgFillStyleLst>
+    </a:fmtScheme>
+  </a:themeElements>
+  <a:objectDefaults/>
+  <a:extraClrSchemeLst/>
+  <a:extLst>
+    <a:ext uri="{05A4C25C-085E-4340-85A3-A5531E510DB2}">
+      <thm15:themeFamily xmlns:thm15="http://schemas.microsoft.com/office/thememl/2012/main" name="Office Theme" id="{62F939B6-93AF-4DB8-9C6B-D6C7DFDC589F}" vid="{4A3C46E8-61CC-4603-A589-7422A47A8E4A}"/>
+    </a:ext>
+  </a:extLst>
+</a:theme>
 </file>